--- a/Python/Lesson 10 - HTTP and APIs/HTTP and APIs.pptx
+++ b/Python/Lesson 10 - HTTP and APIs/HTTP and APIs.pptx
@@ -5,33 +5,36 @@
     <p:sldMasterId id="2147483660" r:id="rId1"/>
   </p:sldMasterIdLst>
   <p:notesMasterIdLst>
-    <p:notesMasterId r:id="rId26"/>
+    <p:notesMasterId r:id="rId29"/>
   </p:notesMasterIdLst>
   <p:sldIdLst>
     <p:sldId id="256" r:id="rId2"/>
-    <p:sldId id="1289" r:id="rId3"/>
-    <p:sldId id="285" r:id="rId4"/>
-    <p:sldId id="1270" r:id="rId5"/>
-    <p:sldId id="287" r:id="rId6"/>
-    <p:sldId id="1271" r:id="rId7"/>
-    <p:sldId id="286" r:id="rId8"/>
-    <p:sldId id="1272" r:id="rId9"/>
-    <p:sldId id="1275" r:id="rId10"/>
-    <p:sldId id="1276" r:id="rId11"/>
-    <p:sldId id="1278" r:id="rId12"/>
-    <p:sldId id="1279" r:id="rId13"/>
-    <p:sldId id="1273" r:id="rId14"/>
-    <p:sldId id="1287" r:id="rId15"/>
-    <p:sldId id="1288" r:id="rId16"/>
-    <p:sldId id="1286" r:id="rId17"/>
-    <p:sldId id="1274" r:id="rId18"/>
-    <p:sldId id="1280" r:id="rId19"/>
-    <p:sldId id="1281" r:id="rId20"/>
-    <p:sldId id="1284" r:id="rId21"/>
-    <p:sldId id="1282" r:id="rId22"/>
-    <p:sldId id="1283" r:id="rId23"/>
-    <p:sldId id="1285" r:id="rId24"/>
-    <p:sldId id="284" r:id="rId25"/>
+    <p:sldId id="486" r:id="rId3"/>
+    <p:sldId id="1289" r:id="rId4"/>
+    <p:sldId id="285" r:id="rId5"/>
+    <p:sldId id="1270" r:id="rId6"/>
+    <p:sldId id="287" r:id="rId7"/>
+    <p:sldId id="1271" r:id="rId8"/>
+    <p:sldId id="286" r:id="rId9"/>
+    <p:sldId id="1272" r:id="rId10"/>
+    <p:sldId id="1275" r:id="rId11"/>
+    <p:sldId id="1276" r:id="rId12"/>
+    <p:sldId id="1278" r:id="rId13"/>
+    <p:sldId id="1279" r:id="rId14"/>
+    <p:sldId id="1273" r:id="rId15"/>
+    <p:sldId id="1287" r:id="rId16"/>
+    <p:sldId id="1292" r:id="rId17"/>
+    <p:sldId id="1291" r:id="rId18"/>
+    <p:sldId id="1288" r:id="rId19"/>
+    <p:sldId id="1286" r:id="rId20"/>
+    <p:sldId id="1274" r:id="rId21"/>
+    <p:sldId id="1280" r:id="rId22"/>
+    <p:sldId id="1281" r:id="rId23"/>
+    <p:sldId id="1284" r:id="rId24"/>
+    <p:sldId id="1282" r:id="rId25"/>
+    <p:sldId id="1283" r:id="rId26"/>
+    <p:sldId id="1285" r:id="rId27"/>
+    <p:sldId id="284" r:id="rId28"/>
   </p:sldIdLst>
   <p:sldSz cx="12192000" cy="6858000"/>
   <p:notesSz cx="6858000" cy="9144000"/>
@@ -220,7 +223,7 @@
           <a:p>
             <a:fld id="{7D2F5B96-EC90-4B10-91AC-E32DA21E81E1}" type="datetimeFigureOut">
               <a:rPr lang="en-US" smtClean="0"/>
-              <a:t>23-Jun-26</a:t>
+              <a:t>7/10/2026</a:t>
             </a:fld>
             <a:endParaRPr lang="en-US"/>
           </a:p>
@@ -495,7 +498,7 @@
         <p:cNvPr id="1" name="">
           <a:extLst>
             <a:ext uri="{FF2B5EF4-FFF2-40B4-BE49-F238E27FC236}">
-              <a16:creationId xmlns:a16="http://schemas.microsoft.com/office/drawing/2014/main" id="{13077C63-A4C9-7DA1-59CC-332A927100BD}"/>
+              <a16:creationId xmlns:a16="http://schemas.microsoft.com/office/drawing/2014/main" id="{1CD64719-007A-9D20-6D43-3A4FCAADACE1}"/>
             </a:ext>
           </a:extLst>
         </p:cNvPr>
@@ -515,7 +518,7 @@
           <p:cNvPr id="2" name="Slide Image Placeholder 1">
             <a:extLst>
               <a:ext uri="{FF2B5EF4-FFF2-40B4-BE49-F238E27FC236}">
-                <a16:creationId xmlns:a16="http://schemas.microsoft.com/office/drawing/2014/main" id="{B8BDAA95-81CB-FCCD-A0FD-03388B78AB91}"/>
+                <a16:creationId xmlns:a16="http://schemas.microsoft.com/office/drawing/2014/main" id="{E432F23C-3B6C-06AD-FDEF-F55DEF812C1E}"/>
               </a:ext>
             </a:extLst>
           </p:cNvPr>
@@ -526,14 +529,19 @@
             <p:ph type="sldImg"/>
           </p:nvPr>
         </p:nvSpPr>
-        <p:spPr/>
+        <p:spPr>
+          <a:xfrm>
+            <a:off x="381000" y="685800"/>
+            <a:ext cx="6096000" cy="3429000"/>
+          </a:xfrm>
+        </p:spPr>
       </p:sp>
       <p:sp>
         <p:nvSpPr>
           <p:cNvPr id="3" name="Notes Placeholder 2">
             <a:extLst>
               <a:ext uri="{FF2B5EF4-FFF2-40B4-BE49-F238E27FC236}">
-                <a16:creationId xmlns:a16="http://schemas.microsoft.com/office/drawing/2014/main" id="{321CBDEE-43BF-4C70-1B4A-1D1DA6E659C4}"/>
+                <a16:creationId xmlns:a16="http://schemas.microsoft.com/office/drawing/2014/main" id="{0784E9A6-CB51-3C7D-DF18-0DDEC1AC4207}"/>
               </a:ext>
             </a:extLst>
           </p:cNvPr>
@@ -549,10 +557,7 @@
           <a:bodyPr/>
           <a:lstStyle/>
           <a:p>
-            <a:r>
-              <a:rPr lang="en-US" dirty="0"/>
-              <a:t>https://www.rfc-editor.org/rfc/rfc1945</a:t>
-            </a:r>
+            <a:endParaRPr lang="en-US" dirty="0"/>
           </a:p>
         </p:txBody>
       </p:sp>
@@ -561,7 +566,7 @@
           <p:cNvPr id="4" name="Slide Number Placeholder 3">
             <a:extLst>
               <a:ext uri="{FF2B5EF4-FFF2-40B4-BE49-F238E27FC236}">
-                <a16:creationId xmlns:a16="http://schemas.microsoft.com/office/drawing/2014/main" id="{ACE423FF-7CDA-5E46-7BC5-A77ADACA455B}"/>
+                <a16:creationId xmlns:a16="http://schemas.microsoft.com/office/drawing/2014/main" id="{D045C7A3-AEE3-A283-A203-B801AB559F92}"/>
               </a:ext>
             </a:extLst>
           </p:cNvPr>
@@ -577,7 +582,7 @@
           <a:bodyPr/>
           <a:lstStyle/>
           <a:p>
-            <a:fld id="{BE457D5F-ED05-449E-97D0-205DAB987247}" type="slidenum">
+            <a:fld id="{292570D5-C374-43AE-876B-55C2A221664E}" type="slidenum">
               <a:rPr lang="en-US" smtClean="0"/>
               <a:t>2</a:t>
             </a:fld>
@@ -588,7 +593,7 @@
     </p:spTree>
     <p:extLst>
       <p:ext uri="{BB962C8B-B14F-4D97-AF65-F5344CB8AC3E}">
-        <p14:creationId xmlns:p14="http://schemas.microsoft.com/office/powerpoint/2010/main" val="2550835093"/>
+        <p14:creationId xmlns:p14="http://schemas.microsoft.com/office/powerpoint/2010/main" val="2731214060"/>
       </p:ext>
     </p:extLst>
   </p:cSld>
@@ -603,7 +608,13 @@
   <p:cSld>
     <p:spTree>
       <p:nvGrpSpPr>
-        <p:cNvPr id="1" name=""/>
+        <p:cNvPr id="1" name="">
+          <a:extLst>
+            <a:ext uri="{FF2B5EF4-FFF2-40B4-BE49-F238E27FC236}">
+              <a16:creationId xmlns:a16="http://schemas.microsoft.com/office/drawing/2014/main" id="{536F02DE-DFC8-D451-2546-4F218A2A0898}"/>
+            </a:ext>
+          </a:extLst>
+        </p:cNvPr>
         <p:cNvGrpSpPr/>
         <p:nvPr/>
       </p:nvGrpSpPr>
@@ -617,7 +628,13 @@
       </p:grpSpPr>
       <p:sp>
         <p:nvSpPr>
-          <p:cNvPr id="2" name="Slide Image Placeholder 1"/>
+          <p:cNvPr id="2" name="Slide Image Placeholder 1">
+            <a:extLst>
+              <a:ext uri="{FF2B5EF4-FFF2-40B4-BE49-F238E27FC236}">
+                <a16:creationId xmlns:a16="http://schemas.microsoft.com/office/drawing/2014/main" id="{8880FDF5-D189-423F-0586-8EDEC365E844}"/>
+              </a:ext>
+            </a:extLst>
+          </p:cNvPr>
           <p:cNvSpPr>
             <a:spLocks noGrp="1" noRot="1" noChangeAspect="1"/>
           </p:cNvSpPr>
@@ -629,7 +646,13 @@
       </p:sp>
       <p:sp>
         <p:nvSpPr>
-          <p:cNvPr id="3" name="Notes Placeholder 2"/>
+          <p:cNvPr id="3" name="Notes Placeholder 2">
+            <a:extLst>
+              <a:ext uri="{FF2B5EF4-FFF2-40B4-BE49-F238E27FC236}">
+                <a16:creationId xmlns:a16="http://schemas.microsoft.com/office/drawing/2014/main" id="{2137CF05-2E6F-D07E-AEDC-74BAC8A8C9F8}"/>
+              </a:ext>
+            </a:extLst>
+          </p:cNvPr>
           <p:cNvSpPr>
             <a:spLocks noGrp="1"/>
           </p:cNvSpPr>
@@ -644,81 +667,47 @@
           <a:p>
             <a:r>
               <a:rPr lang="en-US" dirty="0"/>
-              <a:t>Pros:</a:t>
-            </a:r>
-          </a:p>
-          <a:p>
-            <a:pPr marL="171450" indent="-171450">
-              <a:buFontTx/>
-              <a:buChar char="-"/>
-            </a:pPr>
+              <a:t>GET /test HTTP/1.1</a:t>
+            </a:r>
+          </a:p>
+          <a:p>
             <a:r>
               <a:rPr lang="en-US" dirty="0"/>
-              <a:t>Simple</a:t>
-            </a:r>
-          </a:p>
-          <a:p>
-            <a:pPr marL="171450" indent="-171450">
-              <a:buFontTx/>
-              <a:buChar char="-"/>
-            </a:pPr>
+              <a:t>Host: example.com</a:t>
+            </a:r>
+          </a:p>
+          <a:p>
             <a:r>
               <a:rPr lang="en-US" dirty="0"/>
-              <a:t>Stateless</a:t>
-            </a:r>
-          </a:p>
-          <a:p>
-            <a:pPr marL="171450" indent="-171450">
-              <a:buFontTx/>
-              <a:buChar char="-"/>
-            </a:pPr>
+              <a:t>Accept: */*</a:t>
+            </a:r>
+          </a:p>
+          <a:p>
+            <a:endParaRPr lang="en-US" dirty="0"/>
+          </a:p>
+          <a:p>
             <a:r>
               <a:rPr lang="en-US" dirty="0"/>
-              <a:t>User-specific</a:t>
-            </a:r>
-          </a:p>
-          <a:p>
-            <a:pPr marL="0" indent="0">
-              <a:buFontTx/>
-              <a:buNone/>
-            </a:pPr>
+              <a:t>{"param"="hello"}</a:t>
+            </a:r>
+          </a:p>
+          <a:p>
             <a:endParaRPr lang="en-US" dirty="0"/>
           </a:p>
           <a:p>
-            <a:pPr marL="0" indent="0">
-              <a:buFontTx/>
-              <a:buNone/>
-            </a:pPr>
-            <a:r>
-              <a:rPr lang="en-US" dirty="0"/>
-              <a:t>Cons;</a:t>
-            </a:r>
-          </a:p>
-          <a:p>
-            <a:pPr marL="171450" indent="-171450">
-              <a:buFontTx/>
-              <a:buChar char="-"/>
-            </a:pPr>
-            <a:r>
-              <a:rPr lang="en-US" dirty="0"/>
-              <a:t>Sending password repeatedly</a:t>
-            </a:r>
-          </a:p>
-          <a:p>
-            <a:pPr marL="171450" indent="-171450">
-              <a:buFontTx/>
-              <a:buChar char="-"/>
-            </a:pPr>
-            <a:r>
-              <a:rPr lang="en-US" dirty="0"/>
-              <a:t>Cannot auth 3rd parties</a:t>
-            </a:r>
-          </a:p>
-        </p:txBody>
-      </p:sp>
-      <p:sp>
-        <p:nvSpPr>
-          <p:cNvPr id="4" name="Slide Number Placeholder 3"/>
+            <a:endParaRPr lang="en-US" dirty="0"/>
+          </a:p>
+        </p:txBody>
+      </p:sp>
+      <p:sp>
+        <p:nvSpPr>
+          <p:cNvPr id="4" name="Slide Number Placeholder 3">
+            <a:extLst>
+              <a:ext uri="{FF2B5EF4-FFF2-40B4-BE49-F238E27FC236}">
+                <a16:creationId xmlns:a16="http://schemas.microsoft.com/office/drawing/2014/main" id="{9D9E26E9-E2D3-BF05-C6B9-D2B8990F6D7D}"/>
+              </a:ext>
+            </a:extLst>
+          </p:cNvPr>
           <p:cNvSpPr>
             <a:spLocks noGrp="1"/>
           </p:cNvSpPr>
@@ -733,7 +722,7 @@
           <a:p>
             <a:fld id="{BE457D5F-ED05-449E-97D0-205DAB987247}" type="slidenum">
               <a:rPr lang="en-US" smtClean="0"/>
-              <a:t>18</a:t>
+              <a:t>15</a:t>
             </a:fld>
             <a:endParaRPr lang="en-US"/>
           </a:p>
@@ -742,7 +731,7 @@
     </p:spTree>
     <p:extLst>
       <p:ext uri="{BB962C8B-B14F-4D97-AF65-F5344CB8AC3E}">
-        <p14:creationId xmlns:p14="http://schemas.microsoft.com/office/powerpoint/2010/main" val="1265215026"/>
+        <p14:creationId xmlns:p14="http://schemas.microsoft.com/office/powerpoint/2010/main" val="3150115669"/>
       </p:ext>
     </p:extLst>
   </p:cSld>
@@ -757,7 +746,13 @@
   <p:cSld>
     <p:spTree>
       <p:nvGrpSpPr>
-        <p:cNvPr id="1" name=""/>
+        <p:cNvPr id="1" name="">
+          <a:extLst>
+            <a:ext uri="{FF2B5EF4-FFF2-40B4-BE49-F238E27FC236}">
+              <a16:creationId xmlns:a16="http://schemas.microsoft.com/office/drawing/2014/main" id="{0D21A957-493B-D9CB-B33A-C0283A5114C3}"/>
+            </a:ext>
+          </a:extLst>
+        </p:cNvPr>
         <p:cNvGrpSpPr/>
         <p:nvPr/>
       </p:nvGrpSpPr>
@@ -771,7 +766,13 @@
       </p:grpSpPr>
       <p:sp>
         <p:nvSpPr>
-          <p:cNvPr id="2" name="Slide Image Placeholder 1"/>
+          <p:cNvPr id="2" name="Slide Image Placeholder 1">
+            <a:extLst>
+              <a:ext uri="{FF2B5EF4-FFF2-40B4-BE49-F238E27FC236}">
+                <a16:creationId xmlns:a16="http://schemas.microsoft.com/office/drawing/2014/main" id="{75F1AF6A-9FA6-98B0-0196-DD909BBC4B99}"/>
+              </a:ext>
+            </a:extLst>
+          </p:cNvPr>
           <p:cNvSpPr>
             <a:spLocks noGrp="1" noRot="1" noChangeAspect="1"/>
           </p:cNvSpPr>
@@ -783,7 +784,13 @@
       </p:sp>
       <p:sp>
         <p:nvSpPr>
-          <p:cNvPr id="3" name="Notes Placeholder 2"/>
+          <p:cNvPr id="3" name="Notes Placeholder 2">
+            <a:extLst>
+              <a:ext uri="{FF2B5EF4-FFF2-40B4-BE49-F238E27FC236}">
+                <a16:creationId xmlns:a16="http://schemas.microsoft.com/office/drawing/2014/main" id="{AE68F741-0C43-0FA6-80D7-C91035EC956B}"/>
+              </a:ext>
+            </a:extLst>
+          </p:cNvPr>
           <p:cNvSpPr>
             <a:spLocks noGrp="1"/>
           </p:cNvSpPr>
@@ -798,84 +805,47 @@
           <a:p>
             <a:r>
               <a:rPr lang="en-US" dirty="0"/>
-              <a:t>Pros:</a:t>
-            </a:r>
-          </a:p>
-          <a:p>
-            <a:pPr marL="171450" indent="-171450">
-              <a:buFontTx/>
-              <a:buChar char="-"/>
-            </a:pPr>
+              <a:t>GET /test HTTP/1.1</a:t>
+            </a:r>
+          </a:p>
+          <a:p>
             <a:r>
               <a:rPr lang="en-US" dirty="0"/>
-              <a:t>Simple</a:t>
-            </a:r>
-          </a:p>
-          <a:p>
-            <a:pPr marL="171450" indent="-171450">
-              <a:buFontTx/>
-              <a:buChar char="-"/>
-            </a:pPr>
+              <a:t>Host: example.com</a:t>
+            </a:r>
+          </a:p>
+          <a:p>
             <a:r>
               <a:rPr lang="en-US" dirty="0"/>
-              <a:t>Stateless</a:t>
-            </a:r>
-          </a:p>
-          <a:p>
-            <a:pPr marL="171450" indent="-171450">
-              <a:buFontTx/>
-              <a:buChar char="-"/>
-            </a:pPr>
+              <a:t>Accept: */*</a:t>
+            </a:r>
+          </a:p>
+          <a:p>
+            <a:endParaRPr lang="en-US" dirty="0"/>
+          </a:p>
+          <a:p>
             <a:r>
               <a:rPr lang="en-US" dirty="0"/>
-              <a:t>Can auth 3rd parties</a:t>
-            </a:r>
-          </a:p>
-          <a:p>
-            <a:pPr marL="0" indent="0">
-              <a:buFontTx/>
-              <a:buNone/>
-            </a:pPr>
+              <a:t>{"param"="hello"}</a:t>
+            </a:r>
+          </a:p>
+          <a:p>
             <a:endParaRPr lang="en-US" dirty="0"/>
           </a:p>
           <a:p>
-            <a:pPr marL="0" indent="0">
-              <a:buFontTx/>
-              <a:buNone/>
-            </a:pPr>
-            <a:r>
-              <a:rPr lang="en-US" dirty="0"/>
-              <a:t>Cons;</a:t>
-            </a:r>
-          </a:p>
-          <a:p>
-            <a:pPr marL="171450" indent="-171450">
-              <a:buFontTx/>
-              <a:buChar char="-"/>
-            </a:pPr>
-            <a:r>
-              <a:rPr lang="en-US" dirty="0"/>
-              <a:t>Hard to rotate keys</a:t>
-            </a:r>
-          </a:p>
-          <a:p>
-            <a:pPr marL="171450" indent="-171450">
-              <a:buFontTx/>
-              <a:buChar char="-"/>
-            </a:pPr>
-            <a:r>
-              <a:rPr lang="en-US" dirty="0"/>
-              <a:t>Generally not user-specific</a:t>
-            </a:r>
-          </a:p>
-          <a:p>
             <a:endParaRPr lang="en-US" dirty="0"/>
           </a:p>
         </p:txBody>
       </p:sp>
       <p:sp>
         <p:nvSpPr>
-          <p:cNvPr id="4" name="Slide Number Placeholder 3"/>
+          <p:cNvPr id="4" name="Slide Number Placeholder 3">
+            <a:extLst>
+              <a:ext uri="{FF2B5EF4-FFF2-40B4-BE49-F238E27FC236}">
+                <a16:creationId xmlns:a16="http://schemas.microsoft.com/office/drawing/2014/main" id="{823EE639-A545-DD0A-0A9C-DAC57C611113}"/>
+              </a:ext>
+            </a:extLst>
+          </p:cNvPr>
           <p:cNvSpPr>
             <a:spLocks noGrp="1"/>
           </p:cNvSpPr>
@@ -890,7 +860,7 @@
           <a:p>
             <a:fld id="{BE457D5F-ED05-449E-97D0-205DAB987247}" type="slidenum">
               <a:rPr lang="en-US" smtClean="0"/>
-              <a:t>19</a:t>
+              <a:t>16</a:t>
             </a:fld>
             <a:endParaRPr lang="en-US"/>
           </a:p>
@@ -899,7 +869,7 @@
     </p:spTree>
     <p:extLst>
       <p:ext uri="{BB962C8B-B14F-4D97-AF65-F5344CB8AC3E}">
-        <p14:creationId xmlns:p14="http://schemas.microsoft.com/office/powerpoint/2010/main" val="1253076170"/>
+        <p14:creationId xmlns:p14="http://schemas.microsoft.com/office/powerpoint/2010/main" val="3045761798"/>
       </p:ext>
     </p:extLst>
   </p:cSld>
@@ -914,7 +884,13 @@
   <p:cSld>
     <p:spTree>
       <p:nvGrpSpPr>
-        <p:cNvPr id="1" name=""/>
+        <p:cNvPr id="1" name="">
+          <a:extLst>
+            <a:ext uri="{FF2B5EF4-FFF2-40B4-BE49-F238E27FC236}">
+              <a16:creationId xmlns:a16="http://schemas.microsoft.com/office/drawing/2014/main" id="{928CF528-9826-BCC1-BDA2-5C59B46E11EC}"/>
+            </a:ext>
+          </a:extLst>
+        </p:cNvPr>
         <p:cNvGrpSpPr/>
         <p:nvPr/>
       </p:nvGrpSpPr>
@@ -928,7 +904,13 @@
       </p:grpSpPr>
       <p:sp>
         <p:nvSpPr>
-          <p:cNvPr id="2" name="Slide Image Placeholder 1"/>
+          <p:cNvPr id="2" name="Slide Image Placeholder 1">
+            <a:extLst>
+              <a:ext uri="{FF2B5EF4-FFF2-40B4-BE49-F238E27FC236}">
+                <a16:creationId xmlns:a16="http://schemas.microsoft.com/office/drawing/2014/main" id="{591F6B39-0CF7-38D2-AA55-08BAEA0B32E3}"/>
+              </a:ext>
+            </a:extLst>
+          </p:cNvPr>
           <p:cNvSpPr>
             <a:spLocks noGrp="1" noRot="1" noChangeAspect="1"/>
           </p:cNvSpPr>
@@ -940,7 +922,13 @@
       </p:sp>
       <p:sp>
         <p:nvSpPr>
-          <p:cNvPr id="3" name="Notes Placeholder 2"/>
+          <p:cNvPr id="3" name="Notes Placeholder 2">
+            <a:extLst>
+              <a:ext uri="{FF2B5EF4-FFF2-40B4-BE49-F238E27FC236}">
+                <a16:creationId xmlns:a16="http://schemas.microsoft.com/office/drawing/2014/main" id="{101070C2-CDE2-0841-E91E-CF5B5112B0D7}"/>
+              </a:ext>
+            </a:extLst>
+          </p:cNvPr>
           <p:cNvSpPr>
             <a:spLocks noGrp="1"/>
           </p:cNvSpPr>
@@ -955,74 +943,47 @@
           <a:p>
             <a:r>
               <a:rPr lang="en-US" dirty="0"/>
-              <a:t>Pros:</a:t>
-            </a:r>
-          </a:p>
-          <a:p>
-            <a:pPr marL="171450" indent="-171450">
-              <a:buFontTx/>
-              <a:buChar char="-"/>
-            </a:pPr>
+              <a:t>GET /test HTTP/1.1</a:t>
+            </a:r>
+          </a:p>
+          <a:p>
             <a:r>
               <a:rPr lang="en-US" dirty="0"/>
-              <a:t>Simple</a:t>
-            </a:r>
-          </a:p>
-          <a:p>
-            <a:pPr marL="171450" indent="-171450">
-              <a:buFontTx/>
-              <a:buChar char="-"/>
-            </a:pPr>
+              <a:t>Host: example.com</a:t>
+            </a:r>
+          </a:p>
+          <a:p>
             <a:r>
               <a:rPr lang="en-US" dirty="0"/>
-              <a:t>User-specific</a:t>
-            </a:r>
-          </a:p>
-          <a:p>
-            <a:pPr marL="0" indent="0">
-              <a:buFontTx/>
-              <a:buNone/>
-            </a:pPr>
+              <a:t>Accept: */*</a:t>
+            </a:r>
+          </a:p>
+          <a:p>
             <a:endParaRPr lang="en-US" dirty="0"/>
           </a:p>
           <a:p>
-            <a:pPr marL="0" indent="0">
-              <a:buFontTx/>
-              <a:buNone/>
-            </a:pPr>
             <a:r>
               <a:rPr lang="en-US" dirty="0"/>
-              <a:t>Cons:</a:t>
-            </a:r>
-          </a:p>
-          <a:p>
-            <a:pPr marL="171450" indent="-171450">
-              <a:buFontTx/>
-              <a:buChar char="-"/>
-            </a:pPr>
-            <a:r>
-              <a:rPr lang="en-US" dirty="0"/>
-              <a:t>Stateful</a:t>
-            </a:r>
-          </a:p>
-          <a:p>
-            <a:pPr marL="171450" indent="-171450">
-              <a:buFontTx/>
-              <a:buChar char="-"/>
-            </a:pPr>
-            <a:r>
-              <a:rPr lang="en-US" dirty="0"/>
-              <a:t>Cannot auth 3rd parties</a:t>
+              <a:t>{"param"="hello"}</a:t>
             </a:r>
           </a:p>
           <a:p>
             <a:endParaRPr lang="en-US" dirty="0"/>
           </a:p>
-        </p:txBody>
-      </p:sp>
-      <p:sp>
-        <p:nvSpPr>
-          <p:cNvPr id="4" name="Slide Number Placeholder 3"/>
+          <a:p>
+            <a:endParaRPr lang="en-US" dirty="0"/>
+          </a:p>
+        </p:txBody>
+      </p:sp>
+      <p:sp>
+        <p:nvSpPr>
+          <p:cNvPr id="4" name="Slide Number Placeholder 3">
+            <a:extLst>
+              <a:ext uri="{FF2B5EF4-FFF2-40B4-BE49-F238E27FC236}">
+                <a16:creationId xmlns:a16="http://schemas.microsoft.com/office/drawing/2014/main" id="{24ED080A-40DB-A76C-ABF6-2054C9229666}"/>
+              </a:ext>
+            </a:extLst>
+          </p:cNvPr>
           <p:cNvSpPr>
             <a:spLocks noGrp="1"/>
           </p:cNvSpPr>
@@ -1037,7 +998,7 @@
           <a:p>
             <a:fld id="{BE457D5F-ED05-449E-97D0-205DAB987247}" type="slidenum">
               <a:rPr lang="en-US" smtClean="0"/>
-              <a:t>20</a:t>
+              <a:t>17</a:t>
             </a:fld>
             <a:endParaRPr lang="en-US"/>
           </a:p>
@@ -1046,7 +1007,7 @@
     </p:spTree>
     <p:extLst>
       <p:ext uri="{BB962C8B-B14F-4D97-AF65-F5344CB8AC3E}">
-        <p14:creationId xmlns:p14="http://schemas.microsoft.com/office/powerpoint/2010/main" val="3830640556"/>
+        <p14:creationId xmlns:p14="http://schemas.microsoft.com/office/powerpoint/2010/main" val="1009161496"/>
       </p:ext>
     </p:extLst>
   </p:cSld>
@@ -1112,7 +1073,7 @@
             </a:pPr>
             <a:r>
               <a:rPr lang="en-US" dirty="0"/>
-              <a:t>Limited scope / time</a:t>
+              <a:t>Simple</a:t>
             </a:r>
           </a:p>
           <a:p>
@@ -1122,7 +1083,7 @@
             </a:pPr>
             <a:r>
               <a:rPr lang="en-US" dirty="0"/>
-              <a:t>User-specific</a:t>
+              <a:t>Stateless</a:t>
             </a:r>
           </a:p>
           <a:p>
@@ -1132,7 +1093,7 @@
             </a:pPr>
             <a:r>
               <a:rPr lang="en-US" dirty="0"/>
-              <a:t>Can auth 3rd parties</a:t>
+              <a:t>User-specific</a:t>
             </a:r>
           </a:p>
           <a:p>
@@ -1149,7 +1110,7 @@
             </a:pPr>
             <a:r>
               <a:rPr lang="en-US" dirty="0"/>
-              <a:t>Cons:</a:t>
+              <a:t>Cons;</a:t>
             </a:r>
           </a:p>
           <a:p>
@@ -1159,19 +1120,17 @@
             </a:pPr>
             <a:r>
               <a:rPr lang="en-US" dirty="0"/>
-              <a:t>Complexity</a:t>
-            </a:r>
-          </a:p>
-          <a:p>
-            <a:endParaRPr lang="en-US" dirty="0"/>
-          </a:p>
-          <a:p>
-            <a:endParaRPr lang="en-US" dirty="0"/>
-          </a:p>
-          <a:p>
+              <a:t>Sending password repeatedly</a:t>
+            </a:r>
+          </a:p>
+          <a:p>
+            <a:pPr marL="171450" indent="-171450">
+              <a:buFontTx/>
+              <a:buChar char="-"/>
+            </a:pPr>
             <a:r>
               <a:rPr lang="en-US" dirty="0"/>
-              <a:t>https://www.c-sharpcorner.com/article/a-net-developers-complete-guide-to-choose-right-authentication-from-basic-aut/</a:t>
+              <a:t>Cannot auth 3rd parties</a:t>
             </a:r>
           </a:p>
         </p:txBody>
@@ -1202,7 +1161,7 @@
     </p:spTree>
     <p:extLst>
       <p:ext uri="{BB962C8B-B14F-4D97-AF65-F5344CB8AC3E}">
-        <p14:creationId xmlns:p14="http://schemas.microsoft.com/office/powerpoint/2010/main" val="1610383274"/>
+        <p14:creationId xmlns:p14="http://schemas.microsoft.com/office/powerpoint/2010/main" val="1265215026"/>
       </p:ext>
     </p:extLst>
   </p:cSld>
@@ -1258,8 +1217,78 @@
           <a:p>
             <a:r>
               <a:rPr lang="en-US" dirty="0"/>
-              <a:t>https://medium.com/@reddyyashu20/beginners-guide-to-fastapi-openai-chatgpt-api-integration-50a0c3b8571e</a:t>
-            </a:r>
+              <a:t>Pros:</a:t>
+            </a:r>
+          </a:p>
+          <a:p>
+            <a:pPr marL="171450" indent="-171450">
+              <a:buFontTx/>
+              <a:buChar char="-"/>
+            </a:pPr>
+            <a:r>
+              <a:rPr lang="en-US" dirty="0"/>
+              <a:t>Simple</a:t>
+            </a:r>
+          </a:p>
+          <a:p>
+            <a:pPr marL="171450" indent="-171450">
+              <a:buFontTx/>
+              <a:buChar char="-"/>
+            </a:pPr>
+            <a:r>
+              <a:rPr lang="en-US" dirty="0"/>
+              <a:t>Stateless</a:t>
+            </a:r>
+          </a:p>
+          <a:p>
+            <a:pPr marL="171450" indent="-171450">
+              <a:buFontTx/>
+              <a:buChar char="-"/>
+            </a:pPr>
+            <a:r>
+              <a:rPr lang="en-US" dirty="0"/>
+              <a:t>Can auth 3rd parties</a:t>
+            </a:r>
+          </a:p>
+          <a:p>
+            <a:pPr marL="0" indent="0">
+              <a:buFontTx/>
+              <a:buNone/>
+            </a:pPr>
+            <a:endParaRPr lang="en-US" dirty="0"/>
+          </a:p>
+          <a:p>
+            <a:pPr marL="0" indent="0">
+              <a:buFontTx/>
+              <a:buNone/>
+            </a:pPr>
+            <a:r>
+              <a:rPr lang="en-US" dirty="0"/>
+              <a:t>Cons;</a:t>
+            </a:r>
+          </a:p>
+          <a:p>
+            <a:pPr marL="171450" indent="-171450">
+              <a:buFontTx/>
+              <a:buChar char="-"/>
+            </a:pPr>
+            <a:r>
+              <a:rPr lang="en-US" dirty="0"/>
+              <a:t>Hard to rotate keys</a:t>
+            </a:r>
+          </a:p>
+          <a:p>
+            <a:pPr marL="171450" indent="-171450">
+              <a:buFontTx/>
+              <a:buChar char="-"/>
+            </a:pPr>
+            <a:r>
+              <a:rPr lang="en-US" dirty="0"/>
+              <a:t>Generally not user-specific</a:t>
+            </a:r>
+          </a:p>
+          <a:p>
+            <a:endParaRPr lang="en-US" dirty="0"/>
           </a:p>
         </p:txBody>
       </p:sp>
@@ -1281,6 +1310,396 @@
             <a:fld id="{BE457D5F-ED05-449E-97D0-205DAB987247}" type="slidenum">
               <a:rPr lang="en-US" smtClean="0"/>
               <a:t>22</a:t>
+            </a:fld>
+            <a:endParaRPr lang="en-US"/>
+          </a:p>
+        </p:txBody>
+      </p:sp>
+    </p:spTree>
+    <p:extLst>
+      <p:ext uri="{BB962C8B-B14F-4D97-AF65-F5344CB8AC3E}">
+        <p14:creationId xmlns:p14="http://schemas.microsoft.com/office/powerpoint/2010/main" val="1253076170"/>
+      </p:ext>
+    </p:extLst>
+  </p:cSld>
+  <p:clrMapOvr>
+    <a:masterClrMapping/>
+  </p:clrMapOvr>
+</p:notes>
+</file>
+
+<file path=ppt/notesSlides/notesSlide15.xml><?xml version="1.0" encoding="utf-8"?>
+<p:notes xmlns:a="http://schemas.openxmlformats.org/drawingml/2006/main" xmlns:r="http://schemas.openxmlformats.org/officeDocument/2006/relationships" xmlns:p="http://schemas.openxmlformats.org/presentationml/2006/main">
+  <p:cSld>
+    <p:spTree>
+      <p:nvGrpSpPr>
+        <p:cNvPr id="1" name=""/>
+        <p:cNvGrpSpPr/>
+        <p:nvPr/>
+      </p:nvGrpSpPr>
+      <p:grpSpPr>
+        <a:xfrm>
+          <a:off x="0" y="0"/>
+          <a:ext cx="0" cy="0"/>
+          <a:chOff x="0" y="0"/>
+          <a:chExt cx="0" cy="0"/>
+        </a:xfrm>
+      </p:grpSpPr>
+      <p:sp>
+        <p:nvSpPr>
+          <p:cNvPr id="2" name="Slide Image Placeholder 1"/>
+          <p:cNvSpPr>
+            <a:spLocks noGrp="1" noRot="1" noChangeAspect="1"/>
+          </p:cNvSpPr>
+          <p:nvPr>
+            <p:ph type="sldImg"/>
+          </p:nvPr>
+        </p:nvSpPr>
+        <p:spPr/>
+      </p:sp>
+      <p:sp>
+        <p:nvSpPr>
+          <p:cNvPr id="3" name="Notes Placeholder 2"/>
+          <p:cNvSpPr>
+            <a:spLocks noGrp="1"/>
+          </p:cNvSpPr>
+          <p:nvPr>
+            <p:ph type="body" idx="1"/>
+          </p:nvPr>
+        </p:nvSpPr>
+        <p:spPr/>
+        <p:txBody>
+          <a:bodyPr/>
+          <a:lstStyle/>
+          <a:p>
+            <a:r>
+              <a:rPr lang="en-US" dirty="0"/>
+              <a:t>Pros:</a:t>
+            </a:r>
+          </a:p>
+          <a:p>
+            <a:pPr marL="171450" indent="-171450">
+              <a:buFontTx/>
+              <a:buChar char="-"/>
+            </a:pPr>
+            <a:r>
+              <a:rPr lang="en-US" dirty="0"/>
+              <a:t>Simple</a:t>
+            </a:r>
+          </a:p>
+          <a:p>
+            <a:pPr marL="171450" indent="-171450">
+              <a:buFontTx/>
+              <a:buChar char="-"/>
+            </a:pPr>
+            <a:r>
+              <a:rPr lang="en-US" dirty="0"/>
+              <a:t>User-specific</a:t>
+            </a:r>
+          </a:p>
+          <a:p>
+            <a:pPr marL="0" indent="0">
+              <a:buFontTx/>
+              <a:buNone/>
+            </a:pPr>
+            <a:endParaRPr lang="en-US" dirty="0"/>
+          </a:p>
+          <a:p>
+            <a:pPr marL="0" indent="0">
+              <a:buFontTx/>
+              <a:buNone/>
+            </a:pPr>
+            <a:r>
+              <a:rPr lang="en-US" dirty="0"/>
+              <a:t>Cons:</a:t>
+            </a:r>
+          </a:p>
+          <a:p>
+            <a:pPr marL="171450" indent="-171450">
+              <a:buFontTx/>
+              <a:buChar char="-"/>
+            </a:pPr>
+            <a:r>
+              <a:rPr lang="en-US" dirty="0"/>
+              <a:t>Stateful</a:t>
+            </a:r>
+          </a:p>
+          <a:p>
+            <a:pPr marL="171450" indent="-171450">
+              <a:buFontTx/>
+              <a:buChar char="-"/>
+            </a:pPr>
+            <a:r>
+              <a:rPr lang="en-US" dirty="0"/>
+              <a:t>Cannot auth 3rd parties</a:t>
+            </a:r>
+          </a:p>
+          <a:p>
+            <a:endParaRPr lang="en-US" dirty="0"/>
+          </a:p>
+        </p:txBody>
+      </p:sp>
+      <p:sp>
+        <p:nvSpPr>
+          <p:cNvPr id="4" name="Slide Number Placeholder 3"/>
+          <p:cNvSpPr>
+            <a:spLocks noGrp="1"/>
+          </p:cNvSpPr>
+          <p:nvPr>
+            <p:ph type="sldNum" sz="quarter" idx="5"/>
+          </p:nvPr>
+        </p:nvSpPr>
+        <p:spPr/>
+        <p:txBody>
+          <a:bodyPr/>
+          <a:lstStyle/>
+          <a:p>
+            <a:fld id="{BE457D5F-ED05-449E-97D0-205DAB987247}" type="slidenum">
+              <a:rPr lang="en-US" smtClean="0"/>
+              <a:t>23</a:t>
+            </a:fld>
+            <a:endParaRPr lang="en-US"/>
+          </a:p>
+        </p:txBody>
+      </p:sp>
+    </p:spTree>
+    <p:extLst>
+      <p:ext uri="{BB962C8B-B14F-4D97-AF65-F5344CB8AC3E}">
+        <p14:creationId xmlns:p14="http://schemas.microsoft.com/office/powerpoint/2010/main" val="3830640556"/>
+      </p:ext>
+    </p:extLst>
+  </p:cSld>
+  <p:clrMapOvr>
+    <a:masterClrMapping/>
+  </p:clrMapOvr>
+</p:notes>
+</file>
+
+<file path=ppt/notesSlides/notesSlide16.xml><?xml version="1.0" encoding="utf-8"?>
+<p:notes xmlns:a="http://schemas.openxmlformats.org/drawingml/2006/main" xmlns:r="http://schemas.openxmlformats.org/officeDocument/2006/relationships" xmlns:p="http://schemas.openxmlformats.org/presentationml/2006/main">
+  <p:cSld>
+    <p:spTree>
+      <p:nvGrpSpPr>
+        <p:cNvPr id="1" name=""/>
+        <p:cNvGrpSpPr/>
+        <p:nvPr/>
+      </p:nvGrpSpPr>
+      <p:grpSpPr>
+        <a:xfrm>
+          <a:off x="0" y="0"/>
+          <a:ext cx="0" cy="0"/>
+          <a:chOff x="0" y="0"/>
+          <a:chExt cx="0" cy="0"/>
+        </a:xfrm>
+      </p:grpSpPr>
+      <p:sp>
+        <p:nvSpPr>
+          <p:cNvPr id="2" name="Slide Image Placeholder 1"/>
+          <p:cNvSpPr>
+            <a:spLocks noGrp="1" noRot="1" noChangeAspect="1"/>
+          </p:cNvSpPr>
+          <p:nvPr>
+            <p:ph type="sldImg"/>
+          </p:nvPr>
+        </p:nvSpPr>
+        <p:spPr/>
+      </p:sp>
+      <p:sp>
+        <p:nvSpPr>
+          <p:cNvPr id="3" name="Notes Placeholder 2"/>
+          <p:cNvSpPr>
+            <a:spLocks noGrp="1"/>
+          </p:cNvSpPr>
+          <p:nvPr>
+            <p:ph type="body" idx="1"/>
+          </p:nvPr>
+        </p:nvSpPr>
+        <p:spPr/>
+        <p:txBody>
+          <a:bodyPr/>
+          <a:lstStyle/>
+          <a:p>
+            <a:r>
+              <a:rPr lang="en-US" dirty="0"/>
+              <a:t>Pros:</a:t>
+            </a:r>
+          </a:p>
+          <a:p>
+            <a:pPr marL="171450" indent="-171450">
+              <a:buFontTx/>
+              <a:buChar char="-"/>
+            </a:pPr>
+            <a:r>
+              <a:rPr lang="en-US" dirty="0"/>
+              <a:t>Limited scope / time</a:t>
+            </a:r>
+          </a:p>
+          <a:p>
+            <a:pPr marL="171450" indent="-171450">
+              <a:buFontTx/>
+              <a:buChar char="-"/>
+            </a:pPr>
+            <a:r>
+              <a:rPr lang="en-US" dirty="0"/>
+              <a:t>User-specific</a:t>
+            </a:r>
+          </a:p>
+          <a:p>
+            <a:pPr marL="171450" indent="-171450">
+              <a:buFontTx/>
+              <a:buChar char="-"/>
+            </a:pPr>
+            <a:r>
+              <a:rPr lang="en-US" dirty="0"/>
+              <a:t>Can auth 3rd parties</a:t>
+            </a:r>
+          </a:p>
+          <a:p>
+            <a:pPr marL="0" indent="0">
+              <a:buFontTx/>
+              <a:buNone/>
+            </a:pPr>
+            <a:endParaRPr lang="en-US" dirty="0"/>
+          </a:p>
+          <a:p>
+            <a:pPr marL="0" indent="0">
+              <a:buFontTx/>
+              <a:buNone/>
+            </a:pPr>
+            <a:r>
+              <a:rPr lang="en-US" dirty="0"/>
+              <a:t>Cons:</a:t>
+            </a:r>
+          </a:p>
+          <a:p>
+            <a:pPr marL="171450" indent="-171450">
+              <a:buFontTx/>
+              <a:buChar char="-"/>
+            </a:pPr>
+            <a:r>
+              <a:rPr lang="en-US" dirty="0"/>
+              <a:t>Complexity</a:t>
+            </a:r>
+          </a:p>
+          <a:p>
+            <a:endParaRPr lang="en-US" dirty="0"/>
+          </a:p>
+          <a:p>
+            <a:endParaRPr lang="en-US" dirty="0"/>
+          </a:p>
+          <a:p>
+            <a:r>
+              <a:rPr lang="en-US" dirty="0"/>
+              <a:t>https://www.c-sharpcorner.com/article/a-net-developers-complete-guide-to-choose-right-authentication-from-basic-aut/</a:t>
+            </a:r>
+          </a:p>
+        </p:txBody>
+      </p:sp>
+      <p:sp>
+        <p:nvSpPr>
+          <p:cNvPr id="4" name="Slide Number Placeholder 3"/>
+          <p:cNvSpPr>
+            <a:spLocks noGrp="1"/>
+          </p:cNvSpPr>
+          <p:nvPr>
+            <p:ph type="sldNum" sz="quarter" idx="5"/>
+          </p:nvPr>
+        </p:nvSpPr>
+        <p:spPr/>
+        <p:txBody>
+          <a:bodyPr/>
+          <a:lstStyle/>
+          <a:p>
+            <a:fld id="{BE457D5F-ED05-449E-97D0-205DAB987247}" type="slidenum">
+              <a:rPr lang="en-US" smtClean="0"/>
+              <a:t>24</a:t>
+            </a:fld>
+            <a:endParaRPr lang="en-US"/>
+          </a:p>
+        </p:txBody>
+      </p:sp>
+    </p:spTree>
+    <p:extLst>
+      <p:ext uri="{BB962C8B-B14F-4D97-AF65-F5344CB8AC3E}">
+        <p14:creationId xmlns:p14="http://schemas.microsoft.com/office/powerpoint/2010/main" val="1610383274"/>
+      </p:ext>
+    </p:extLst>
+  </p:cSld>
+  <p:clrMapOvr>
+    <a:masterClrMapping/>
+  </p:clrMapOvr>
+</p:notes>
+</file>
+
+<file path=ppt/notesSlides/notesSlide17.xml><?xml version="1.0" encoding="utf-8"?>
+<p:notes xmlns:a="http://schemas.openxmlformats.org/drawingml/2006/main" xmlns:r="http://schemas.openxmlformats.org/officeDocument/2006/relationships" xmlns:p="http://schemas.openxmlformats.org/presentationml/2006/main">
+  <p:cSld>
+    <p:spTree>
+      <p:nvGrpSpPr>
+        <p:cNvPr id="1" name=""/>
+        <p:cNvGrpSpPr/>
+        <p:nvPr/>
+      </p:nvGrpSpPr>
+      <p:grpSpPr>
+        <a:xfrm>
+          <a:off x="0" y="0"/>
+          <a:ext cx="0" cy="0"/>
+          <a:chOff x="0" y="0"/>
+          <a:chExt cx="0" cy="0"/>
+        </a:xfrm>
+      </p:grpSpPr>
+      <p:sp>
+        <p:nvSpPr>
+          <p:cNvPr id="2" name="Slide Image Placeholder 1"/>
+          <p:cNvSpPr>
+            <a:spLocks noGrp="1" noRot="1" noChangeAspect="1"/>
+          </p:cNvSpPr>
+          <p:nvPr>
+            <p:ph type="sldImg"/>
+          </p:nvPr>
+        </p:nvSpPr>
+        <p:spPr/>
+      </p:sp>
+      <p:sp>
+        <p:nvSpPr>
+          <p:cNvPr id="3" name="Notes Placeholder 2"/>
+          <p:cNvSpPr>
+            <a:spLocks noGrp="1"/>
+          </p:cNvSpPr>
+          <p:nvPr>
+            <p:ph type="body" idx="1"/>
+          </p:nvPr>
+        </p:nvSpPr>
+        <p:spPr/>
+        <p:txBody>
+          <a:bodyPr/>
+          <a:lstStyle/>
+          <a:p>
+            <a:r>
+              <a:rPr lang="en-US" dirty="0"/>
+              <a:t>https://medium.com/@reddyyashu20/beginners-guide-to-fastapi-openai-chatgpt-api-integration-50a0c3b8571e</a:t>
+            </a:r>
+          </a:p>
+        </p:txBody>
+      </p:sp>
+      <p:sp>
+        <p:nvSpPr>
+          <p:cNvPr id="4" name="Slide Number Placeholder 3"/>
+          <p:cNvSpPr>
+            <a:spLocks noGrp="1"/>
+          </p:cNvSpPr>
+          <p:nvPr>
+            <p:ph type="sldNum" sz="quarter" idx="5"/>
+          </p:nvPr>
+        </p:nvSpPr>
+        <p:spPr/>
+        <p:txBody>
+          <a:bodyPr/>
+          <a:lstStyle/>
+          <a:p>
+            <a:fld id="{BE457D5F-ED05-449E-97D0-205DAB987247}" type="slidenum">
+              <a:rPr lang="en-US" smtClean="0"/>
+              <a:t>25</a:t>
             </a:fld>
             <a:endParaRPr lang="en-US"/>
           </a:p>
@@ -1304,7 +1723,13 @@
   <p:cSld>
     <p:spTree>
       <p:nvGrpSpPr>
-        <p:cNvPr id="1" name=""/>
+        <p:cNvPr id="1" name="">
+          <a:extLst>
+            <a:ext uri="{FF2B5EF4-FFF2-40B4-BE49-F238E27FC236}">
+              <a16:creationId xmlns:a16="http://schemas.microsoft.com/office/drawing/2014/main" id="{13077C63-A4C9-7DA1-59CC-332A927100BD}"/>
+            </a:ext>
+          </a:extLst>
+        </p:cNvPr>
         <p:cNvGrpSpPr/>
         <p:nvPr/>
       </p:nvGrpSpPr>
@@ -1318,7 +1743,13 @@
       </p:grpSpPr>
       <p:sp>
         <p:nvSpPr>
-          <p:cNvPr id="2" name="Slide Image Placeholder 1"/>
+          <p:cNvPr id="2" name="Slide Image Placeholder 1">
+            <a:extLst>
+              <a:ext uri="{FF2B5EF4-FFF2-40B4-BE49-F238E27FC236}">
+                <a16:creationId xmlns:a16="http://schemas.microsoft.com/office/drawing/2014/main" id="{B8BDAA95-81CB-FCCD-A0FD-03388B78AB91}"/>
+              </a:ext>
+            </a:extLst>
+          </p:cNvPr>
           <p:cNvSpPr>
             <a:spLocks noGrp="1" noRot="1" noChangeAspect="1"/>
           </p:cNvSpPr>
@@ -1330,7 +1761,13 @@
       </p:sp>
       <p:sp>
         <p:nvSpPr>
-          <p:cNvPr id="3" name="Notes Placeholder 2"/>
+          <p:cNvPr id="3" name="Notes Placeholder 2">
+            <a:extLst>
+              <a:ext uri="{FF2B5EF4-FFF2-40B4-BE49-F238E27FC236}">
+                <a16:creationId xmlns:a16="http://schemas.microsoft.com/office/drawing/2014/main" id="{321CBDEE-43BF-4C70-1B4A-1D1DA6E659C4}"/>
+              </a:ext>
+            </a:extLst>
+          </p:cNvPr>
           <p:cNvSpPr>
             <a:spLocks noGrp="1"/>
           </p:cNvSpPr>
@@ -1352,7 +1789,13 @@
       </p:sp>
       <p:sp>
         <p:nvSpPr>
-          <p:cNvPr id="4" name="Slide Number Placeholder 3"/>
+          <p:cNvPr id="4" name="Slide Number Placeholder 3">
+            <a:extLst>
+              <a:ext uri="{FF2B5EF4-FFF2-40B4-BE49-F238E27FC236}">
+                <a16:creationId xmlns:a16="http://schemas.microsoft.com/office/drawing/2014/main" id="{ACE423FF-7CDA-5E46-7BC5-A77ADACA455B}"/>
+              </a:ext>
+            </a:extLst>
+          </p:cNvPr>
           <p:cNvSpPr>
             <a:spLocks noGrp="1"/>
           </p:cNvSpPr>
@@ -1376,7 +1819,7 @@
     </p:spTree>
     <p:extLst>
       <p:ext uri="{BB962C8B-B14F-4D97-AF65-F5344CB8AC3E}">
-        <p14:creationId xmlns:p14="http://schemas.microsoft.com/office/powerpoint/2010/main" val="3837193348"/>
+        <p14:creationId xmlns:p14="http://schemas.microsoft.com/office/powerpoint/2010/main" val="2550835093"/>
       </p:ext>
     </p:extLst>
   </p:cSld>
@@ -1432,19 +1875,19 @@
           <a:p>
             <a:r>
               <a:rPr lang="en-US" dirty="0"/>
-              <a:t>HTTP has four fundamental rules that govern how communication works. First, the client always initiates. Browsers start every conversation. Second, the server always responds. It must reply to every request, even if just to say 'error'. Third, it's one request, one response. Each HTTP exchange is complete in itself. Fourth, and most importantly, HTTP is stateless - the server doesn't remember previous requests. This is why cookies exist. Without them, you'd have to log in for every single page you visit. </a:t>
-            </a:r>
-          </a:p>
-        </p:txBody>
-      </p:sp>
-      <p:sp>
-        <p:nvSpPr>
-          <p:cNvPr id="4" name="Footer Placeholder 3"/>
-          <p:cNvSpPr>
-            <a:spLocks noGrp="1"/>
-          </p:cNvSpPr>
-          <p:nvPr>
-            <p:ph type="ftr" sz="quarter" idx="4"/>
+              <a:t>https://www.rfc-editor.org/rfc/rfc1945</a:t>
+            </a:r>
+          </a:p>
+        </p:txBody>
+      </p:sp>
+      <p:sp>
+        <p:nvSpPr>
+          <p:cNvPr id="4" name="Slide Number Placeholder 3"/>
+          <p:cNvSpPr>
+            <a:spLocks noGrp="1"/>
+          </p:cNvSpPr>
+          <p:nvPr>
+            <p:ph type="sldNum" sz="quarter" idx="5"/>
           </p:nvPr>
         </p:nvSpPr>
         <p:spPr/>
@@ -1452,39 +1895,8 @@
           <a:bodyPr/>
           <a:lstStyle/>
           <a:p>
-            <a:pPr>
-              <a:defRPr/>
-            </a:pPr>
-            <a:r>
-              <a:rPr lang="en-US"/>
-              <a:t>P&amp;NE AIAD Departure Brief</a:t>
-            </a:r>
-          </a:p>
-        </p:txBody>
-      </p:sp>
-      <p:sp>
-        <p:nvSpPr>
-          <p:cNvPr id="5" name="Slide Number Placeholder 4"/>
-          <p:cNvSpPr>
-            <a:spLocks noGrp="1"/>
-          </p:cNvSpPr>
-          <p:nvPr>
-            <p:ph type="sldNum" sz="quarter" idx="5"/>
-          </p:nvPr>
-        </p:nvSpPr>
-        <p:spPr/>
-        <p:txBody>
-          <a:bodyPr/>
-          <a:lstStyle/>
-          <a:p>
-            <a:pPr>
-              <a:defRPr/>
-            </a:pPr>
-            <a:fld id="{7FE6B1A2-9BDA-4174-9639-C12B0222CFB2}" type="slidenum">
+            <a:fld id="{BE457D5F-ED05-449E-97D0-205DAB987247}" type="slidenum">
               <a:rPr lang="en-US" smtClean="0"/>
-              <a:pPr>
-                <a:defRPr/>
-              </a:pPr>
               <a:t>4</a:t>
             </a:fld>
             <a:endParaRPr lang="en-US"/>
@@ -1494,7 +1906,7 @@
     </p:spTree>
     <p:extLst>
       <p:ext uri="{BB962C8B-B14F-4D97-AF65-F5344CB8AC3E}">
-        <p14:creationId xmlns:p14="http://schemas.microsoft.com/office/powerpoint/2010/main" val="1183947962"/>
+        <p14:creationId xmlns:p14="http://schemas.microsoft.com/office/powerpoint/2010/main" val="3837193348"/>
       </p:ext>
     </p:extLst>
   </p:cSld>
@@ -1550,46 +1962,19 @@
           <a:p>
             <a:r>
               <a:rPr lang="en-US" dirty="0"/>
-              <a:t>GET /test HTTP/1.1</a:t>
-            </a:r>
-          </a:p>
-          <a:p>
-            <a:r>
-              <a:rPr lang="en-US" dirty="0"/>
-              <a:t>Host: example.com</a:t>
-            </a:r>
-          </a:p>
-          <a:p>
-            <a:r>
-              <a:rPr lang="en-US" dirty="0"/>
-              <a:t>Accept: */*</a:t>
-            </a:r>
-          </a:p>
-          <a:p>
-            <a:endParaRPr lang="en-US" dirty="0"/>
-          </a:p>
-          <a:p>
-            <a:r>
-              <a:rPr lang="en-US" dirty="0"/>
-              <a:t>{"param"="hello"}</a:t>
-            </a:r>
-          </a:p>
-          <a:p>
-            <a:endParaRPr lang="en-US" dirty="0"/>
-          </a:p>
-          <a:p>
-            <a:endParaRPr lang="en-US" dirty="0"/>
-          </a:p>
-        </p:txBody>
-      </p:sp>
-      <p:sp>
-        <p:nvSpPr>
-          <p:cNvPr id="4" name="Slide Number Placeholder 3"/>
-          <p:cNvSpPr>
-            <a:spLocks noGrp="1"/>
-          </p:cNvSpPr>
-          <p:nvPr>
-            <p:ph type="sldNum" sz="quarter" idx="5"/>
+              <a:t>HTTP has four fundamental rules that govern how communication works. First, the client always initiates. Browsers start every conversation. Second, the server always responds. It must reply to every request, even if just to say 'error'. Third, it's one request, one response. Each HTTP exchange is complete in itself. Fourth, and most importantly, HTTP is stateless - the server doesn't remember previous requests. This is why cookies exist. Without them, you'd have to log in for every single page you visit. </a:t>
+            </a:r>
+          </a:p>
+        </p:txBody>
+      </p:sp>
+      <p:sp>
+        <p:nvSpPr>
+          <p:cNvPr id="4" name="Footer Placeholder 3"/>
+          <p:cNvSpPr>
+            <a:spLocks noGrp="1"/>
+          </p:cNvSpPr>
+          <p:nvPr>
+            <p:ph type="ftr" sz="quarter" idx="4"/>
           </p:nvPr>
         </p:nvSpPr>
         <p:spPr/>
@@ -1597,8 +1982,39 @@
           <a:bodyPr/>
           <a:lstStyle/>
           <a:p>
-            <a:fld id="{BE457D5F-ED05-449E-97D0-205DAB987247}" type="slidenum">
+            <a:pPr>
+              <a:defRPr/>
+            </a:pPr>
+            <a:r>
+              <a:rPr lang="en-US"/>
+              <a:t>P&amp;NE AIAD Departure Brief</a:t>
+            </a:r>
+          </a:p>
+        </p:txBody>
+      </p:sp>
+      <p:sp>
+        <p:nvSpPr>
+          <p:cNvPr id="5" name="Slide Number Placeholder 4"/>
+          <p:cNvSpPr>
+            <a:spLocks noGrp="1"/>
+          </p:cNvSpPr>
+          <p:nvPr>
+            <p:ph type="sldNum" sz="quarter" idx="5"/>
+          </p:nvPr>
+        </p:nvSpPr>
+        <p:spPr/>
+        <p:txBody>
+          <a:bodyPr/>
+          <a:lstStyle/>
+          <a:p>
+            <a:pPr>
+              <a:defRPr/>
+            </a:pPr>
+            <a:fld id="{7FE6B1A2-9BDA-4174-9639-C12B0222CFB2}" type="slidenum">
               <a:rPr lang="en-US" smtClean="0"/>
+              <a:pPr>
+                <a:defRPr/>
+              </a:pPr>
               <a:t>5</a:t>
             </a:fld>
             <a:endParaRPr lang="en-US"/>
@@ -1608,7 +2024,7 @@
     </p:spTree>
     <p:extLst>
       <p:ext uri="{BB962C8B-B14F-4D97-AF65-F5344CB8AC3E}">
-        <p14:creationId xmlns:p14="http://schemas.microsoft.com/office/powerpoint/2010/main" val="1372614856"/>
+        <p14:creationId xmlns:p14="http://schemas.microsoft.com/office/powerpoint/2010/main" val="1183947962"/>
       </p:ext>
     </p:extLst>
   </p:cSld>
@@ -1664,8 +2080,35 @@
           <a:p>
             <a:r>
               <a:rPr lang="en-US" dirty="0"/>
-              <a:t>https://www.rfc-editor.org/rfc/rfc1945#section-5</a:t>
-            </a:r>
+              <a:t>GET /test HTTP/1.1</a:t>
+            </a:r>
+          </a:p>
+          <a:p>
+            <a:r>
+              <a:rPr lang="en-US" dirty="0"/>
+              <a:t>Host: example.com</a:t>
+            </a:r>
+          </a:p>
+          <a:p>
+            <a:r>
+              <a:rPr lang="en-US" dirty="0"/>
+              <a:t>Accept: */*</a:t>
+            </a:r>
+          </a:p>
+          <a:p>
+            <a:endParaRPr lang="en-US" dirty="0"/>
+          </a:p>
+          <a:p>
+            <a:r>
+              <a:rPr lang="en-US" dirty="0"/>
+              <a:t>{"param"="hello"}</a:t>
+            </a:r>
+          </a:p>
+          <a:p>
+            <a:endParaRPr lang="en-US" dirty="0"/>
+          </a:p>
+          <a:p>
+            <a:endParaRPr lang="en-US" dirty="0"/>
           </a:p>
         </p:txBody>
       </p:sp>
@@ -1695,7 +2138,7 @@
     </p:spTree>
     <p:extLst>
       <p:ext uri="{BB962C8B-B14F-4D97-AF65-F5344CB8AC3E}">
-        <p14:creationId xmlns:p14="http://schemas.microsoft.com/office/powerpoint/2010/main" val="1385179102"/>
+        <p14:creationId xmlns:p14="http://schemas.microsoft.com/office/powerpoint/2010/main" val="1372614856"/>
       </p:ext>
     </p:extLst>
   </p:cSld>
@@ -1751,7 +2194,7 @@
           <a:p>
             <a:r>
               <a:rPr lang="en-US" dirty="0"/>
-              <a:t>Hit an HTTP that returns HTML and one that returns a JSON response</a:t>
+              <a:t>https://www.rfc-editor.org/rfc/rfc1945#section-5</a:t>
             </a:r>
           </a:p>
         </p:txBody>
@@ -1782,7 +2225,7 @@
     </p:spTree>
     <p:extLst>
       <p:ext uri="{BB962C8B-B14F-4D97-AF65-F5344CB8AC3E}">
-        <p14:creationId xmlns:p14="http://schemas.microsoft.com/office/powerpoint/2010/main" val="3942348303"/>
+        <p14:creationId xmlns:p14="http://schemas.microsoft.com/office/powerpoint/2010/main" val="1385179102"/>
       </p:ext>
     </p:extLst>
   </p:cSld>
@@ -1838,7 +2281,7 @@
           <a:p>
             <a:r>
               <a:rPr lang="en-US" dirty="0"/>
-              <a:t>https://base64.dev/articles/what-is-base64</a:t>
+              <a:t>Hit an HTTP that returns HTML and one that returns a JSON response</a:t>
             </a:r>
           </a:p>
         </p:txBody>
@@ -1860,7 +2303,7 @@
           <a:p>
             <a:fld id="{BE457D5F-ED05-449E-97D0-205DAB987247}" type="slidenum">
               <a:rPr lang="en-US" smtClean="0"/>
-              <a:t>11</a:t>
+              <a:t>8</a:t>
             </a:fld>
             <a:endParaRPr lang="en-US"/>
           </a:p>
@@ -1869,7 +2312,7 @@
     </p:spTree>
     <p:extLst>
       <p:ext uri="{BB962C8B-B14F-4D97-AF65-F5344CB8AC3E}">
-        <p14:creationId xmlns:p14="http://schemas.microsoft.com/office/powerpoint/2010/main" val="2920093684"/>
+        <p14:creationId xmlns:p14="http://schemas.microsoft.com/office/powerpoint/2010/main" val="3942348303"/>
       </p:ext>
     </p:extLst>
   </p:cSld>
@@ -1925,13 +2368,7 @@
           <a:p>
             <a:r>
               <a:rPr lang="en-US" dirty="0"/>
-              <a:t>base64.b64encode</a:t>
-            </a:r>
-          </a:p>
-          <a:p>
-            <a:r>
-              <a:rPr lang="en-US" dirty="0"/>
-              <a:t>base64.b64decode</a:t>
+              <a:t>https://base64.dev/articles/what-is-base64</a:t>
             </a:r>
           </a:p>
         </p:txBody>
@@ -1962,7 +2399,7 @@
     </p:spTree>
     <p:extLst>
       <p:ext uri="{BB962C8B-B14F-4D97-AF65-F5344CB8AC3E}">
-        <p14:creationId xmlns:p14="http://schemas.microsoft.com/office/powerpoint/2010/main" val="2843298489"/>
+        <p14:creationId xmlns:p14="http://schemas.microsoft.com/office/powerpoint/2010/main" val="2920093684"/>
       </p:ext>
     </p:extLst>
   </p:cSld>
@@ -1977,13 +2414,7 @@
   <p:cSld>
     <p:spTree>
       <p:nvGrpSpPr>
-        <p:cNvPr id="1" name="">
-          <a:extLst>
-            <a:ext uri="{FF2B5EF4-FFF2-40B4-BE49-F238E27FC236}">
-              <a16:creationId xmlns:a16="http://schemas.microsoft.com/office/drawing/2014/main" id="{536F02DE-DFC8-D451-2546-4F218A2A0898}"/>
-            </a:ext>
-          </a:extLst>
-        </p:cNvPr>
+        <p:cNvPr id="1" name=""/>
         <p:cNvGrpSpPr/>
         <p:nvPr/>
       </p:nvGrpSpPr>
@@ -1997,13 +2428,7 @@
       </p:grpSpPr>
       <p:sp>
         <p:nvSpPr>
-          <p:cNvPr id="2" name="Slide Image Placeholder 1">
-            <a:extLst>
-              <a:ext uri="{FF2B5EF4-FFF2-40B4-BE49-F238E27FC236}">
-                <a16:creationId xmlns:a16="http://schemas.microsoft.com/office/drawing/2014/main" id="{8880FDF5-D189-423F-0586-8EDEC365E844}"/>
-              </a:ext>
-            </a:extLst>
-          </p:cNvPr>
+          <p:cNvPr id="2" name="Slide Image Placeholder 1"/>
           <p:cNvSpPr>
             <a:spLocks noGrp="1" noRot="1" noChangeAspect="1"/>
           </p:cNvSpPr>
@@ -2015,13 +2440,7 @@
       </p:sp>
       <p:sp>
         <p:nvSpPr>
-          <p:cNvPr id="3" name="Notes Placeholder 2">
-            <a:extLst>
-              <a:ext uri="{FF2B5EF4-FFF2-40B4-BE49-F238E27FC236}">
-                <a16:creationId xmlns:a16="http://schemas.microsoft.com/office/drawing/2014/main" id="{2137CF05-2E6F-D07E-AEDC-74BAC8A8C9F8}"/>
-              </a:ext>
-            </a:extLst>
-          </p:cNvPr>
+          <p:cNvPr id="3" name="Notes Placeholder 2"/>
           <p:cNvSpPr>
             <a:spLocks noGrp="1"/>
           </p:cNvSpPr>
@@ -2036,47 +2455,20 @@
           <a:p>
             <a:r>
               <a:rPr lang="en-US" dirty="0"/>
-              <a:t>GET /test HTTP/1.1</a:t>
+              <a:t>base64.b64encode</a:t>
             </a:r>
           </a:p>
           <a:p>
             <a:r>
               <a:rPr lang="en-US" dirty="0"/>
-              <a:t>Host: example.com</a:t>
-            </a:r>
-          </a:p>
-          <a:p>
-            <a:r>
-              <a:rPr lang="en-US" dirty="0"/>
-              <a:t>Accept: */*</a:t>
-            </a:r>
-          </a:p>
-          <a:p>
-            <a:endParaRPr lang="en-US" dirty="0"/>
-          </a:p>
-          <a:p>
-            <a:r>
-              <a:rPr lang="en-US" dirty="0"/>
-              <a:t>{"param"="hello"}</a:t>
-            </a:r>
-          </a:p>
-          <a:p>
-            <a:endParaRPr lang="en-US" dirty="0"/>
-          </a:p>
-          <a:p>
-            <a:endParaRPr lang="en-US" dirty="0"/>
-          </a:p>
-        </p:txBody>
-      </p:sp>
-      <p:sp>
-        <p:nvSpPr>
-          <p:cNvPr id="4" name="Slide Number Placeholder 3">
-            <a:extLst>
-              <a:ext uri="{FF2B5EF4-FFF2-40B4-BE49-F238E27FC236}">
-                <a16:creationId xmlns:a16="http://schemas.microsoft.com/office/drawing/2014/main" id="{9D9E26E9-E2D3-BF05-C6B9-D2B8990F6D7D}"/>
-              </a:ext>
-            </a:extLst>
-          </p:cNvPr>
+              <a:t>base64.b64decode</a:t>
+            </a:r>
+          </a:p>
+        </p:txBody>
+      </p:sp>
+      <p:sp>
+        <p:nvSpPr>
+          <p:cNvPr id="4" name="Slide Number Placeholder 3"/>
           <p:cNvSpPr>
             <a:spLocks noGrp="1"/>
           </p:cNvSpPr>
@@ -2091,7 +2483,7 @@
           <a:p>
             <a:fld id="{BE457D5F-ED05-449E-97D0-205DAB987247}" type="slidenum">
               <a:rPr lang="en-US" smtClean="0"/>
-              <a:t>14</a:t>
+              <a:t>13</a:t>
             </a:fld>
             <a:endParaRPr lang="en-US"/>
           </a:p>
@@ -2100,7 +2492,7 @@
     </p:spTree>
     <p:extLst>
       <p:ext uri="{BB962C8B-B14F-4D97-AF65-F5344CB8AC3E}">
-        <p14:creationId xmlns:p14="http://schemas.microsoft.com/office/powerpoint/2010/main" val="3150115669"/>
+        <p14:creationId xmlns:p14="http://schemas.microsoft.com/office/powerpoint/2010/main" val="2843298489"/>
       </p:ext>
     </p:extLst>
   </p:cSld>
@@ -2158,7 +2550,7 @@
           <a:p>
             <a:fld id="{7A3E0868-4E26-4CDC-8A56-D70E2D8B12FE}" type="datetime3">
               <a:rPr lang="en-US" smtClean="0"/>
-              <a:t>23 June 2026</a:t>
+              <a:t>10 July 2026</a:t>
             </a:fld>
             <a:endParaRPr lang="en-US"/>
           </a:p>
@@ -4737,7 +5129,7 @@
           <a:p>
             <a:fld id="{A7B8021B-6105-4216-96FC-94348F216D0E}" type="datetime3">
               <a:rPr lang="en-US" smtClean="0"/>
-              <a:t>23 June 2026</a:t>
+              <a:t>10 July 2026</a:t>
             </a:fld>
             <a:endParaRPr lang="en-US"/>
           </a:p>
@@ -6458,7 +6850,7 @@
           <a:p>
             <a:fld id="{5D27CFAB-73E6-44A8-B862-B3306344E3F2}" type="datetime3">
               <a:rPr lang="en-US" smtClean="0"/>
-              <a:t>23 June 2026</a:t>
+              <a:t>10 July 2026</a:t>
             </a:fld>
             <a:endParaRPr lang="en-US"/>
           </a:p>
@@ -8272,7 +8664,7 @@
           <a:p>
             <a:fld id="{A9B2E784-A5F5-4301-881B-94AC8DBF9DED}" type="datetime3">
               <a:rPr lang="en-US" smtClean="0"/>
-              <a:t>23 June 2026</a:t>
+              <a:t>10 July 2026</a:t>
             </a:fld>
             <a:endParaRPr lang="en-US"/>
           </a:p>
@@ -8454,7 +8846,7 @@
           <a:p>
             <a:fld id="{18EAB3A5-9E92-4BB9-8F22-9632B4FBEDBA}" type="datetime3">
               <a:rPr lang="en-US" smtClean="0"/>
-              <a:t>23 June 2026</a:t>
+              <a:t>10 July 2026</a:t>
             </a:fld>
             <a:endParaRPr lang="en-US"/>
           </a:p>
@@ -8684,7 +9076,7 @@
           <a:p>
             <a:fld id="{40923810-5FB2-48C9-96CA-1DE2C4773142}" type="datetime3">
               <a:rPr lang="en-US" smtClean="0"/>
-              <a:t>23 June 2026</a:t>
+              <a:t>10 July 2026</a:t>
             </a:fld>
             <a:endParaRPr lang="en-US"/>
           </a:p>
@@ -8983,7 +9375,7 @@
           <a:p>
             <a:fld id="{E50EFF4B-86EB-42FB-93EA-7D8F9CB2466F}" type="datetime3">
               <a:rPr lang="en-US" smtClean="0"/>
-              <a:t>23 June 2026</a:t>
+              <a:t>10 July 2026</a:t>
             </a:fld>
             <a:endParaRPr lang="en-US"/>
           </a:p>
@@ -9613,7 +10005,7 @@
           <a:p>
             <a:fld id="{FB14FC24-E041-45E9-9A72-E5755A86890F}" type="datetime3">
               <a:rPr lang="en-US" smtClean="0"/>
-              <a:t>23 June 2026</a:t>
+              <a:t>10 July 2026</a:t>
             </a:fld>
             <a:endParaRPr lang="en-US"/>
           </a:p>
@@ -10500,7 +10892,7 @@
           <a:p>
             <a:fld id="{98A19125-94A7-4474-858C-FD9C4ABE9DDA}" type="datetime3">
               <a:rPr lang="en-US" smtClean="0"/>
-              <a:t>23 June 2026</a:t>
+              <a:t>10 July 2026</a:t>
             </a:fld>
             <a:endParaRPr lang="en-US"/>
           </a:p>
@@ -11639,7 +12031,7 @@
           <a:p>
             <a:fld id="{3BA0343D-C8D8-43CE-BB79-50DEA219DB07}" type="datetime3">
               <a:rPr lang="en-US" smtClean="0"/>
-              <a:t>23 June 2026</a:t>
+              <a:t>10 July 2026</a:t>
             </a:fld>
             <a:endParaRPr lang="en-US"/>
           </a:p>
@@ -11931,7 +12323,7 @@
           <a:p>
             <a:fld id="{453BD212-0B9F-4987-965F-AC83B2FC354F}" type="datetime3">
               <a:rPr lang="en-US" smtClean="0"/>
-              <a:t>23 June 2026</a:t>
+              <a:t>10 July 2026</a:t>
             </a:fld>
             <a:endParaRPr lang="en-US"/>
           </a:p>
@@ -12176,7 +12568,7 @@
           <a:p>
             <a:fld id="{6DDC931E-8CBE-4A3F-A034-9B6122C6DCDB}" type="datetime3">
               <a:rPr lang="en-US" smtClean="0"/>
-              <a:t>23 June 2026</a:t>
+              <a:t>10 July 2026</a:t>
             </a:fld>
             <a:endParaRPr lang="en-US"/>
           </a:p>
@@ -13954,7 +14346,7 @@
           <a:p>
             <a:fld id="{220AF9C2-5E8A-4308-AE6B-CA9B65007D0E}" type="datetime3">
               <a:rPr lang="en-US" smtClean="0"/>
-              <a:t>23 June 2026</a:t>
+              <a:t>10 July 2026</a:t>
             </a:fld>
             <a:endParaRPr lang="en-US"/>
           </a:p>
@@ -14270,7 +14662,7 @@
           <a:p>
             <a:fld id="{FF31E861-D2AF-431D-860B-DCF67C218052}" type="datetime3">
               <a:rPr lang="en-US" smtClean="0"/>
-              <a:t>23 June 2026</a:t>
+              <a:t>10 July 2026</a:t>
             </a:fld>
             <a:endParaRPr lang="en-US"/>
           </a:p>
@@ -14552,7 +14944,7 @@
           <a:p>
             <a:fld id="{D1DA25B2-AAF1-4C1F-AA38-12D5BFA7D4C8}" type="datetime3">
               <a:rPr lang="en-US" smtClean="0"/>
-              <a:t>23 June 2026</a:t>
+              <a:t>10 July 2026</a:t>
             </a:fld>
             <a:endParaRPr lang="en-US"/>
           </a:p>
@@ -14834,7 +15226,7 @@
           <a:p>
             <a:fld id="{A25C0F39-45D0-48E9-90B3-7FE8FCE561C8}" type="datetime3">
               <a:rPr lang="en-US" smtClean="0"/>
-              <a:t>23 June 2026</a:t>
+              <a:t>10 July 2026</a:t>
             </a:fld>
             <a:endParaRPr lang="en-US"/>
           </a:p>
@@ -15344,7 +15736,7 @@
           <a:p>
             <a:fld id="{9BAF1A3D-92FA-4F24-9781-74AFA516A230}" type="datetime3">
               <a:rPr lang="en-US" smtClean="0"/>
-              <a:t>23 June 2026</a:t>
+              <a:t>10 July 2026</a:t>
             </a:fld>
             <a:endParaRPr lang="en-US"/>
           </a:p>
@@ -15471,7 +15863,7 @@
           <a:p>
             <a:fld id="{5719C672-856D-4617-A693-8FE15749A9B7}" type="datetime3">
               <a:rPr lang="en-US" smtClean="0"/>
-              <a:t>23 June 2026</a:t>
+              <a:t>10 July 2026</a:t>
             </a:fld>
             <a:endParaRPr lang="en-US"/>
           </a:p>
@@ -15606,7 +15998,7 @@
           <a:p>
             <a:fld id="{5F6C764D-A39E-4C03-B161-E0BC66E8883B}" type="datetime3">
               <a:rPr lang="en-US" smtClean="0"/>
-              <a:t>23 June 2026</a:t>
+              <a:t>10 July 2026</a:t>
             </a:fld>
             <a:endParaRPr lang="en-US"/>
           </a:p>
@@ -15848,7 +16240,7 @@
           <a:p>
             <a:fld id="{6E3E33F9-20B7-4995-BE7D-165DBB597850}" type="datetime3">
               <a:rPr lang="en-US" smtClean="0"/>
-              <a:t>23 June 2026</a:t>
+              <a:t>10 July 2026</a:t>
             </a:fld>
             <a:endParaRPr lang="en-US"/>
           </a:p>
@@ -15961,7 +16353,7 @@
           <a:p>
             <a:fld id="{CD41C263-3501-4369-A962-62B6BF915CDE}" type="datetime3">
               <a:rPr lang="en-US" smtClean="0"/>
-              <a:t>23 June 2026</a:t>
+              <a:t>10 July 2026</a:t>
             </a:fld>
             <a:endParaRPr lang="en-US"/>
           </a:p>
@@ -16367,7 +16759,7 @@
           <a:p>
             <a:fld id="{B06F3EBE-B2E8-4992-9F00-9E4B44F057C0}" type="datetime3">
               <a:rPr lang="en-US" smtClean="0"/>
-              <a:t>23 June 2026</a:t>
+              <a:t>10 July 2026</a:t>
             </a:fld>
             <a:endParaRPr lang="en-US"/>
           </a:p>
@@ -16499,7 +16891,7 @@
           <a:p>
             <a:fld id="{D41656AB-D2E1-472E-8B95-0DF5C6E1D623}" type="datetime3">
               <a:rPr lang="en-US" smtClean="0"/>
-              <a:t>23 June 2026</a:t>
+              <a:t>10 July 2026</a:t>
             </a:fld>
             <a:endParaRPr lang="en-US"/>
           </a:p>
@@ -20691,7 +21083,7 @@
           <a:p>
             <a:fld id="{AD3160A9-B1E4-4AE8-B854-46ED2C2068C2}" type="datetimeFigureOut">
               <a:rPr lang="en-US" smtClean="0"/>
-              <a:t>23-Jun-26</a:t>
+              <a:t>7/10/2026</a:t>
             </a:fld>
             <a:endParaRPr lang="en-US"/>
           </a:p>
@@ -21103,7 +21495,7 @@
           <a:p>
             <a:fld id="{AD3160A9-B1E4-4AE8-B854-46ED2C2068C2}" type="datetimeFigureOut">
               <a:rPr lang="en-US" smtClean="0"/>
-              <a:t>23-Jun-26</a:t>
+              <a:t>7/10/2026</a:t>
             </a:fld>
             <a:endParaRPr lang="en-US"/>
           </a:p>
@@ -21378,7 +21770,7 @@
           <a:p>
             <a:fld id="{AD3160A9-B1E4-4AE8-B854-46ED2C2068C2}" type="datetimeFigureOut">
               <a:rPr lang="en-US" smtClean="0"/>
-              <a:t>23-Jun-26</a:t>
+              <a:t>7/10/2026</a:t>
             </a:fld>
             <a:endParaRPr lang="en-US"/>
           </a:p>
@@ -21577,7 +21969,7 @@
           <a:p>
             <a:fld id="{AD622D1A-DF83-41A8-85FF-04D90BF831D3}" type="datetime3">
               <a:rPr lang="en-US" smtClean="0"/>
-              <a:t>23 June 2026</a:t>
+              <a:t>10 July 2026</a:t>
             </a:fld>
             <a:endParaRPr lang="en-US"/>
           </a:p>
@@ -21833,7 +22225,7 @@
           <a:p>
             <a:fld id="{334F72C3-CDF3-44A8-B602-1649B1728485}" type="datetime3">
               <a:rPr lang="en-US" smtClean="0"/>
-              <a:t>23 June 2026</a:t>
+              <a:t>10 July 2026</a:t>
             </a:fld>
             <a:endParaRPr lang="en-US"/>
           </a:p>
@@ -22149,7 +22541,7 @@
           <a:p>
             <a:fld id="{1E0132BA-B5E7-4FFD-AF6C-169169D47D4A}" type="datetime3">
               <a:rPr lang="en-US" smtClean="0"/>
-              <a:t>23 June 2026</a:t>
+              <a:t>10 July 2026</a:t>
             </a:fld>
             <a:endParaRPr lang="en-US"/>
           </a:p>
@@ -22642,7 +23034,7 @@
           <a:p>
             <a:fld id="{81A30091-1C2A-4151-8D3C-D1E47A72615F}" type="datetime3">
               <a:rPr lang="en-US" smtClean="0"/>
-              <a:t>23 June 2026</a:t>
+              <a:t>10 July 2026</a:t>
             </a:fld>
             <a:endParaRPr lang="en-US"/>
           </a:p>
@@ -23303,7 +23695,7 @@
           <a:p>
             <a:fld id="{35D703CE-07B4-4C05-A488-B4566700621F}" type="datetime3">
               <a:rPr lang="en-US" smtClean="0"/>
-              <a:t>23 June 2026</a:t>
+              <a:t>10 July 2026</a:t>
             </a:fld>
             <a:endParaRPr lang="en-US"/>
           </a:p>
@@ -24373,7 +24765,7 @@
           <a:p>
             <a:fld id="{694BD61C-20BA-43AF-A21F-1DAFB3200099}" type="datetime3">
               <a:rPr lang="en-US" smtClean="0"/>
-              <a:t>23 June 2026</a:t>
+              <a:t>10 July 2026</a:t>
             </a:fld>
             <a:endParaRPr lang="en-US"/>
           </a:p>
@@ -24860,7 +25252,7 @@
           <a:p>
             <a:fld id="{CABCB1B0-B6E5-4DD1-BB55-95C076D6C0C8}" type="datetime3">
               <a:rPr lang="en-US" smtClean="0"/>
-              <a:t>23 June 2026</a:t>
+              <a:t>10 July 2026</a:t>
             </a:fld>
             <a:endParaRPr lang="en-US"/>
           </a:p>
@@ -25481,7 +25873,7 @@
           <a:bodyPr/>
           <a:lstStyle/>
           <a:p>
-            <a:endParaRPr lang="en-US"/>
+            <a:endParaRPr lang="en-US" dirty="0"/>
           </a:p>
         </p:txBody>
       </p:sp>
@@ -25506,7 +25898,7 @@
           <a:bodyPr/>
           <a:lstStyle/>
           <a:p>
-            <a:endParaRPr lang="en-US"/>
+            <a:endParaRPr lang="en-US" dirty="0"/>
           </a:p>
         </p:txBody>
       </p:sp>
@@ -25531,7 +25923,7 @@
           <a:bodyPr/>
           <a:lstStyle/>
           <a:p>
-            <a:endParaRPr lang="en-US"/>
+            <a:endParaRPr lang="en-US" dirty="0"/>
           </a:p>
         </p:txBody>
       </p:sp>
@@ -25556,7 +25948,7 @@
           <a:bodyPr/>
           <a:lstStyle/>
           <a:p>
-            <a:endParaRPr lang="en-US"/>
+            <a:endParaRPr lang="en-US" dirty="0"/>
           </a:p>
         </p:txBody>
       </p:sp>
@@ -25606,7 +25998,7 @@
           <a:bodyPr/>
           <a:lstStyle/>
           <a:p>
-            <a:endParaRPr lang="en-US"/>
+            <a:endParaRPr lang="en-US" dirty="0"/>
           </a:p>
         </p:txBody>
       </p:sp>
@@ -25722,7 +26114,7 @@
           <a:bodyPr/>
           <a:lstStyle/>
           <a:p>
-            <a:endParaRPr lang="en-US"/>
+            <a:endParaRPr lang="en-US" dirty="0"/>
           </a:p>
         </p:txBody>
       </p:sp>
@@ -25761,7 +26153,7 @@
           <p:cNvPr id="2" name="Title 1">
             <a:extLst>
               <a:ext uri="{FF2B5EF4-FFF2-40B4-BE49-F238E27FC236}">
-                <a16:creationId xmlns:a16="http://schemas.microsoft.com/office/drawing/2014/main" id="{26D93320-3E63-D43F-8353-454E919E51F8}"/>
+                <a16:creationId xmlns:a16="http://schemas.microsoft.com/office/drawing/2014/main" id="{E84D9E38-6DAD-E4D7-9B8A-2000494494F0}"/>
               </a:ext>
             </a:extLst>
           </p:cNvPr>
@@ -25779,7 +26171,7 @@
           <a:p>
             <a:r>
               <a:rPr lang="en-US" dirty="0"/>
-              <a:t>Encoding Text</a:t>
+              <a:t>More Than Text</a:t>
             </a:r>
           </a:p>
         </p:txBody>
@@ -25789,7 +26181,7 @@
           <p:cNvPr id="3" name="Content Placeholder 2">
             <a:extLst>
               <a:ext uri="{FF2B5EF4-FFF2-40B4-BE49-F238E27FC236}">
-                <a16:creationId xmlns:a16="http://schemas.microsoft.com/office/drawing/2014/main" id="{AA901D3A-6F2F-A254-2420-040EC3411AEA}"/>
+                <a16:creationId xmlns:a16="http://schemas.microsoft.com/office/drawing/2014/main" id="{9A27DC0E-A2EB-AAA5-26E5-80B2C604BDF2}"/>
               </a:ext>
             </a:extLst>
           </p:cNvPr>
@@ -25807,27 +26199,24 @@
           <a:p>
             <a:r>
               <a:rPr lang="en-US" dirty="0"/>
-              <a:t>Remember all data is binary</a:t>
+              <a:t>Have you ever seen an image online?</a:t>
             </a:r>
           </a:p>
           <a:p>
             <a:r>
               <a:rPr lang="en-US" dirty="0"/>
-              <a:t>Computer must represent data consistently</a:t>
+              <a:t>Have you ever seen a video?</a:t>
             </a:r>
           </a:p>
           <a:p>
             <a:r>
               <a:rPr lang="en-US" dirty="0"/>
-              <a:t>An encoding specifies the data representation</a:t>
+              <a:t>Other formats??</a:t>
             </a:r>
           </a:p>
           <a:p>
             <a:endParaRPr lang="en-US" dirty="0"/>
           </a:p>
-          <a:p>
-            <a:endParaRPr lang="en-US" dirty="0"/>
-          </a:p>
         </p:txBody>
       </p:sp>
       <p:sp>
@@ -25835,7 +26224,7 @@
           <p:cNvPr id="4" name="Date Placeholder 3">
             <a:extLst>
               <a:ext uri="{FF2B5EF4-FFF2-40B4-BE49-F238E27FC236}">
-                <a16:creationId xmlns:a16="http://schemas.microsoft.com/office/drawing/2014/main" id="{25A4AFED-28E0-462A-17C6-7EB8DBEC3ED1}"/>
+                <a16:creationId xmlns:a16="http://schemas.microsoft.com/office/drawing/2014/main" id="{BA21DF7F-179D-93A4-A34C-19AFA15CC350}"/>
               </a:ext>
             </a:extLst>
           </p:cNvPr>
@@ -25853,7 +26242,7 @@
           <a:p>
             <a:fld id="{AD622D1A-DF83-41A8-85FF-04D90BF831D3}" type="datetime3">
               <a:rPr lang="en-US" smtClean="0"/>
-              <a:t>23 June 2026</a:t>
+              <a:t>10 July 2026</a:t>
             </a:fld>
             <a:endParaRPr lang="en-US"/>
           </a:p>
@@ -25864,7 +26253,7 @@
           <p:cNvPr id="5" name="Slide Number Placeholder 4">
             <a:extLst>
               <a:ext uri="{FF2B5EF4-FFF2-40B4-BE49-F238E27FC236}">
-                <a16:creationId xmlns:a16="http://schemas.microsoft.com/office/drawing/2014/main" id="{5C026297-B7AE-DE85-62A2-3FA449FB2059}"/>
+                <a16:creationId xmlns:a16="http://schemas.microsoft.com/office/drawing/2014/main" id="{B3F49F5A-5999-7FEE-3F3E-C8FE162C0607}"/>
               </a:ext>
             </a:extLst>
           </p:cNvPr>
@@ -25884,6 +26273,169 @@
               <a:rPr lang="en-US" smtClean="0"/>
               <a:pPr/>
               <a:t>10</a:t>
+            </a:fld>
+            <a:endParaRPr lang="en-US"/>
+          </a:p>
+        </p:txBody>
+      </p:sp>
+    </p:spTree>
+    <p:extLst>
+      <p:ext uri="{BB962C8B-B14F-4D97-AF65-F5344CB8AC3E}">
+        <p14:creationId xmlns:p14="http://schemas.microsoft.com/office/powerpoint/2010/main" val="2622715224"/>
+      </p:ext>
+    </p:extLst>
+  </p:cSld>
+  <p:clrMapOvr>
+    <a:masterClrMapping/>
+  </p:clrMapOvr>
+</p:sld>
+</file>
+
+<file path=ppt/slides/slide11.xml><?xml version="1.0" encoding="utf-8"?>
+<p:sld xmlns:a="http://schemas.openxmlformats.org/drawingml/2006/main" xmlns:r="http://schemas.openxmlformats.org/officeDocument/2006/relationships" xmlns:p="http://schemas.openxmlformats.org/presentationml/2006/main">
+  <p:cSld>
+    <p:spTree>
+      <p:nvGrpSpPr>
+        <p:cNvPr id="1" name=""/>
+        <p:cNvGrpSpPr/>
+        <p:nvPr/>
+      </p:nvGrpSpPr>
+      <p:grpSpPr>
+        <a:xfrm>
+          <a:off x="0" y="0"/>
+          <a:ext cx="0" cy="0"/>
+          <a:chOff x="0" y="0"/>
+          <a:chExt cx="0" cy="0"/>
+        </a:xfrm>
+      </p:grpSpPr>
+      <p:sp>
+        <p:nvSpPr>
+          <p:cNvPr id="2" name="Title 1">
+            <a:extLst>
+              <a:ext uri="{FF2B5EF4-FFF2-40B4-BE49-F238E27FC236}">
+                <a16:creationId xmlns:a16="http://schemas.microsoft.com/office/drawing/2014/main" id="{26D93320-3E63-D43F-8353-454E919E51F8}"/>
+              </a:ext>
+            </a:extLst>
+          </p:cNvPr>
+          <p:cNvSpPr>
+            <a:spLocks noGrp="1"/>
+          </p:cNvSpPr>
+          <p:nvPr>
+            <p:ph type="title"/>
+          </p:nvPr>
+        </p:nvSpPr>
+        <p:spPr/>
+        <p:txBody>
+          <a:bodyPr/>
+          <a:lstStyle/>
+          <a:p>
+            <a:r>
+              <a:rPr lang="en-US" dirty="0"/>
+              <a:t>Encoding Text</a:t>
+            </a:r>
+          </a:p>
+        </p:txBody>
+      </p:sp>
+      <p:sp>
+        <p:nvSpPr>
+          <p:cNvPr id="3" name="Content Placeholder 2">
+            <a:extLst>
+              <a:ext uri="{FF2B5EF4-FFF2-40B4-BE49-F238E27FC236}">
+                <a16:creationId xmlns:a16="http://schemas.microsoft.com/office/drawing/2014/main" id="{AA901D3A-6F2F-A254-2420-040EC3411AEA}"/>
+              </a:ext>
+            </a:extLst>
+          </p:cNvPr>
+          <p:cNvSpPr>
+            <a:spLocks noGrp="1"/>
+          </p:cNvSpPr>
+          <p:nvPr>
+            <p:ph idx="1"/>
+          </p:nvPr>
+        </p:nvSpPr>
+        <p:spPr/>
+        <p:txBody>
+          <a:bodyPr/>
+          <a:lstStyle/>
+          <a:p>
+            <a:r>
+              <a:rPr lang="en-US" dirty="0"/>
+              <a:t>Remember all data is binary</a:t>
+            </a:r>
+          </a:p>
+          <a:p>
+            <a:r>
+              <a:rPr lang="en-US" dirty="0"/>
+              <a:t>Computer must represent data consistently</a:t>
+            </a:r>
+          </a:p>
+          <a:p>
+            <a:r>
+              <a:rPr lang="en-US" dirty="0"/>
+              <a:t>An encoding specifies the data representation</a:t>
+            </a:r>
+          </a:p>
+          <a:p>
+            <a:endParaRPr lang="en-US" dirty="0"/>
+          </a:p>
+          <a:p>
+            <a:endParaRPr lang="en-US" dirty="0"/>
+          </a:p>
+        </p:txBody>
+      </p:sp>
+      <p:sp>
+        <p:nvSpPr>
+          <p:cNvPr id="4" name="Date Placeholder 3">
+            <a:extLst>
+              <a:ext uri="{FF2B5EF4-FFF2-40B4-BE49-F238E27FC236}">
+                <a16:creationId xmlns:a16="http://schemas.microsoft.com/office/drawing/2014/main" id="{25A4AFED-28E0-462A-17C6-7EB8DBEC3ED1}"/>
+              </a:ext>
+            </a:extLst>
+          </p:cNvPr>
+          <p:cNvSpPr>
+            <a:spLocks noGrp="1"/>
+          </p:cNvSpPr>
+          <p:nvPr>
+            <p:ph type="dt" sz="half" idx="10"/>
+          </p:nvPr>
+        </p:nvSpPr>
+        <p:spPr/>
+        <p:txBody>
+          <a:bodyPr/>
+          <a:lstStyle/>
+          <a:p>
+            <a:fld id="{AD622D1A-DF83-41A8-85FF-04D90BF831D3}" type="datetime3">
+              <a:rPr lang="en-US" smtClean="0"/>
+              <a:t>10 July 2026</a:t>
+            </a:fld>
+            <a:endParaRPr lang="en-US"/>
+          </a:p>
+        </p:txBody>
+      </p:sp>
+      <p:sp>
+        <p:nvSpPr>
+          <p:cNvPr id="5" name="Slide Number Placeholder 4">
+            <a:extLst>
+              <a:ext uri="{FF2B5EF4-FFF2-40B4-BE49-F238E27FC236}">
+                <a16:creationId xmlns:a16="http://schemas.microsoft.com/office/drawing/2014/main" id="{5C026297-B7AE-DE85-62A2-3FA449FB2059}"/>
+              </a:ext>
+            </a:extLst>
+          </p:cNvPr>
+          <p:cNvSpPr>
+            <a:spLocks noGrp="1"/>
+          </p:cNvSpPr>
+          <p:nvPr>
+            <p:ph type="sldNum" sz="quarter" idx="11"/>
+          </p:nvPr>
+        </p:nvSpPr>
+        <p:spPr/>
+        <p:txBody>
+          <a:bodyPr/>
+          <a:lstStyle/>
+          <a:p>
+            <a:fld id="{64E5BE4B-2FBF-4174-9E62-85FAD1CB43A6}" type="slidenum">
+              <a:rPr lang="en-US" smtClean="0"/>
+              <a:pPr/>
+              <a:t>11</a:t>
             </a:fld>
             <a:endParaRPr lang="en-US"/>
           </a:p>
@@ -26393,198 +26945,6 @@
 </p:sld>
 </file>
 
-<file path=ppt/slides/slide11.xml><?xml version="1.0" encoding="utf-8"?>
-<p:sld xmlns:a="http://schemas.openxmlformats.org/drawingml/2006/main" xmlns:r="http://schemas.openxmlformats.org/officeDocument/2006/relationships" xmlns:p="http://schemas.openxmlformats.org/presentationml/2006/main">
-  <p:cSld>
-    <p:spTree>
-      <p:nvGrpSpPr>
-        <p:cNvPr id="1" name=""/>
-        <p:cNvGrpSpPr/>
-        <p:nvPr/>
-      </p:nvGrpSpPr>
-      <p:grpSpPr>
-        <a:xfrm>
-          <a:off x="0" y="0"/>
-          <a:ext cx="0" cy="0"/>
-          <a:chOff x="0" y="0"/>
-          <a:chExt cx="0" cy="0"/>
-        </a:xfrm>
-      </p:grpSpPr>
-      <p:sp>
-        <p:nvSpPr>
-          <p:cNvPr id="2" name="Title 1">
-            <a:extLst>
-              <a:ext uri="{FF2B5EF4-FFF2-40B4-BE49-F238E27FC236}">
-                <a16:creationId xmlns:a16="http://schemas.microsoft.com/office/drawing/2014/main" id="{EB4F08CA-D795-8DD2-5A17-357D299D6CE4}"/>
-              </a:ext>
-            </a:extLst>
-          </p:cNvPr>
-          <p:cNvSpPr>
-            <a:spLocks noGrp="1"/>
-          </p:cNvSpPr>
-          <p:nvPr>
-            <p:ph type="title"/>
-          </p:nvPr>
-        </p:nvSpPr>
-        <p:spPr/>
-        <p:txBody>
-          <a:bodyPr/>
-          <a:lstStyle/>
-          <a:p>
-            <a:r>
-              <a:rPr lang="en-US" dirty="0"/>
-              <a:t>Base64 Encoding</a:t>
-            </a:r>
-          </a:p>
-        </p:txBody>
-      </p:sp>
-      <p:sp>
-        <p:nvSpPr>
-          <p:cNvPr id="3" name="Content Placeholder 2">
-            <a:extLst>
-              <a:ext uri="{FF2B5EF4-FFF2-40B4-BE49-F238E27FC236}">
-                <a16:creationId xmlns:a16="http://schemas.microsoft.com/office/drawing/2014/main" id="{4EFF6918-E014-7E4F-ADD7-66181B6A7BBC}"/>
-              </a:ext>
-            </a:extLst>
-          </p:cNvPr>
-          <p:cNvSpPr>
-            <a:spLocks noGrp="1"/>
-          </p:cNvSpPr>
-          <p:nvPr>
-            <p:ph idx="1"/>
-          </p:nvPr>
-        </p:nvSpPr>
-        <p:spPr/>
-        <p:txBody>
-          <a:bodyPr/>
-          <a:lstStyle/>
-          <a:p>
-            <a:r>
-              <a:rPr lang="en-US" dirty="0"/>
-              <a:t>Common HTTP encoding type</a:t>
-            </a:r>
-          </a:p>
-          <a:p>
-            <a:r>
-              <a:rPr lang="en-US" dirty="0"/>
-              <a:t>Converts every 6 bits into a character (2^6 options…)</a:t>
-            </a:r>
-          </a:p>
-          <a:p>
-            <a:pPr lvl="1"/>
-            <a:r>
-              <a:rPr lang="en-US" dirty="0"/>
-              <a:t>A-Z</a:t>
-            </a:r>
-          </a:p>
-          <a:p>
-            <a:pPr lvl="1"/>
-            <a:r>
-              <a:rPr lang="en-US" dirty="0"/>
-              <a:t>a-z</a:t>
-            </a:r>
-          </a:p>
-          <a:p>
-            <a:pPr lvl="1"/>
-            <a:r>
-              <a:rPr lang="en-US" dirty="0"/>
-              <a:t>0-9</a:t>
-            </a:r>
-          </a:p>
-          <a:p>
-            <a:pPr lvl="1"/>
-            <a:r>
-              <a:rPr lang="en-US" dirty="0"/>
-              <a:t>/+</a:t>
-            </a:r>
-          </a:p>
-          <a:p>
-            <a:r>
-              <a:rPr lang="en-US" dirty="0"/>
-              <a:t>Every 3 bytes </a:t>
-            </a:r>
-            <a:r>
-              <a:rPr lang="en-US" dirty="0">
-                <a:sym typeface="Wingdings" panose="05000000000000000000" pitchFamily="2" charset="2"/>
-              </a:rPr>
-              <a:t> 4 characters</a:t>
-            </a:r>
-            <a:endParaRPr lang="en-US" dirty="0"/>
-          </a:p>
-        </p:txBody>
-      </p:sp>
-      <p:sp>
-        <p:nvSpPr>
-          <p:cNvPr id="4" name="Date Placeholder 3">
-            <a:extLst>
-              <a:ext uri="{FF2B5EF4-FFF2-40B4-BE49-F238E27FC236}">
-                <a16:creationId xmlns:a16="http://schemas.microsoft.com/office/drawing/2014/main" id="{5739DEC8-5A35-75D5-9638-F56804F12339}"/>
-              </a:ext>
-            </a:extLst>
-          </p:cNvPr>
-          <p:cNvSpPr>
-            <a:spLocks noGrp="1"/>
-          </p:cNvSpPr>
-          <p:nvPr>
-            <p:ph type="dt" sz="half" idx="10"/>
-          </p:nvPr>
-        </p:nvSpPr>
-        <p:spPr/>
-        <p:txBody>
-          <a:bodyPr/>
-          <a:lstStyle/>
-          <a:p>
-            <a:fld id="{AD622D1A-DF83-41A8-85FF-04D90BF831D3}" type="datetime3">
-              <a:rPr lang="en-US" smtClean="0"/>
-              <a:t>23 June 2026</a:t>
-            </a:fld>
-            <a:endParaRPr lang="en-US"/>
-          </a:p>
-        </p:txBody>
-      </p:sp>
-      <p:sp>
-        <p:nvSpPr>
-          <p:cNvPr id="5" name="Slide Number Placeholder 4">
-            <a:extLst>
-              <a:ext uri="{FF2B5EF4-FFF2-40B4-BE49-F238E27FC236}">
-                <a16:creationId xmlns:a16="http://schemas.microsoft.com/office/drawing/2014/main" id="{CE6EEC28-5E34-E95E-9F52-6396E99760B3}"/>
-              </a:ext>
-            </a:extLst>
-          </p:cNvPr>
-          <p:cNvSpPr>
-            <a:spLocks noGrp="1"/>
-          </p:cNvSpPr>
-          <p:nvPr>
-            <p:ph type="sldNum" sz="quarter" idx="11"/>
-          </p:nvPr>
-        </p:nvSpPr>
-        <p:spPr/>
-        <p:txBody>
-          <a:bodyPr/>
-          <a:lstStyle/>
-          <a:p>
-            <a:fld id="{64E5BE4B-2FBF-4174-9E62-85FAD1CB43A6}" type="slidenum">
-              <a:rPr lang="en-US" smtClean="0"/>
-              <a:pPr/>
-              <a:t>11</a:t>
-            </a:fld>
-            <a:endParaRPr lang="en-US"/>
-          </a:p>
-        </p:txBody>
-      </p:sp>
-    </p:spTree>
-    <p:extLst>
-      <p:ext uri="{BB962C8B-B14F-4D97-AF65-F5344CB8AC3E}">
-        <p14:creationId xmlns:p14="http://schemas.microsoft.com/office/powerpoint/2010/main" val="3166557799"/>
-      </p:ext>
-    </p:extLst>
-  </p:cSld>
-  <p:clrMapOvr>
-    <a:masterClrMapping/>
-  </p:clrMapOvr>
-</p:sld>
-</file>
-
 <file path=ppt/slides/slide12.xml><?xml version="1.0" encoding="utf-8"?>
 <p:sld xmlns:a="http://schemas.openxmlformats.org/drawingml/2006/main" xmlns:r="http://schemas.openxmlformats.org/officeDocument/2006/relationships" xmlns:p="http://schemas.openxmlformats.org/presentationml/2006/main">
   <p:cSld>
@@ -26607,7 +26967,7 @@
           <p:cNvPr id="2" name="Title 1">
             <a:extLst>
               <a:ext uri="{FF2B5EF4-FFF2-40B4-BE49-F238E27FC236}">
-                <a16:creationId xmlns:a16="http://schemas.microsoft.com/office/drawing/2014/main" id="{6916FF68-343E-F5F9-5A0C-85A025592E37}"/>
+                <a16:creationId xmlns:a16="http://schemas.microsoft.com/office/drawing/2014/main" id="{EB4F08CA-D795-8DD2-5A17-357D299D6CE4}"/>
               </a:ext>
             </a:extLst>
           </p:cNvPr>
@@ -26625,7 +26985,7 @@
           <a:p>
             <a:r>
               <a:rPr lang="en-US" dirty="0"/>
-              <a:t>Python Base64</a:t>
+              <a:t>Base64 Encoding</a:t>
             </a:r>
           </a:p>
         </p:txBody>
@@ -26635,7 +26995,7 @@
           <p:cNvPr id="3" name="Content Placeholder 2">
             <a:extLst>
               <a:ext uri="{FF2B5EF4-FFF2-40B4-BE49-F238E27FC236}">
-                <a16:creationId xmlns:a16="http://schemas.microsoft.com/office/drawing/2014/main" id="{3F545E95-C6A3-0E44-4BBF-21D1BEBD1591}"/>
+                <a16:creationId xmlns:a16="http://schemas.microsoft.com/office/drawing/2014/main" id="{4EFF6918-E014-7E4F-ADD7-66181B6A7BBC}"/>
               </a:ext>
             </a:extLst>
           </p:cNvPr>
@@ -26646,15 +27006,67 @@
             <p:ph idx="1"/>
           </p:nvPr>
         </p:nvSpPr>
-        <p:spPr/>
+        <p:spPr>
+          <a:xfrm>
+            <a:off x="548641" y="1600199"/>
+            <a:ext cx="5679440" cy="4572000"/>
+          </a:xfrm>
+        </p:spPr>
         <p:txBody>
           <a:bodyPr/>
           <a:lstStyle/>
           <a:p>
             <a:r>
               <a:rPr lang="en-US" dirty="0"/>
-              <a:t>Demo converting an image and some text</a:t>
-            </a:r>
+              <a:t>Common HTTP encoding type</a:t>
+            </a:r>
+          </a:p>
+          <a:p>
+            <a:r>
+              <a:rPr lang="en-US" dirty="0"/>
+              <a:t>Converts every 6 bits into a character (2^6 options…)</a:t>
+            </a:r>
+          </a:p>
+          <a:p>
+            <a:pPr lvl="1"/>
+            <a:r>
+              <a:rPr lang="en-US" dirty="0"/>
+              <a:t>A-Z</a:t>
+            </a:r>
+          </a:p>
+          <a:p>
+            <a:pPr lvl="1"/>
+            <a:r>
+              <a:rPr lang="en-US" dirty="0"/>
+              <a:t>a-z</a:t>
+            </a:r>
+          </a:p>
+          <a:p>
+            <a:pPr lvl="1"/>
+            <a:r>
+              <a:rPr lang="en-US" dirty="0"/>
+              <a:t>0-9</a:t>
+            </a:r>
+          </a:p>
+          <a:p>
+            <a:pPr lvl="1"/>
+            <a:r>
+              <a:rPr lang="en-US" dirty="0"/>
+              <a:t>/+</a:t>
+            </a:r>
+          </a:p>
+          <a:p>
+            <a:r>
+              <a:rPr lang="en-US" dirty="0"/>
+              <a:t>Every 3 bytes </a:t>
+            </a:r>
+            <a:r>
+              <a:rPr lang="en-US" dirty="0">
+                <a:sym typeface="Wingdings" panose="05000000000000000000" pitchFamily="2" charset="2"/>
+              </a:rPr>
+              <a:t> 4 characters</a:t>
+            </a:r>
+            <a:endParaRPr lang="en-US" dirty="0"/>
           </a:p>
         </p:txBody>
       </p:sp>
@@ -26663,7 +27075,7 @@
           <p:cNvPr id="4" name="Date Placeholder 3">
             <a:extLst>
               <a:ext uri="{FF2B5EF4-FFF2-40B4-BE49-F238E27FC236}">
-                <a16:creationId xmlns:a16="http://schemas.microsoft.com/office/drawing/2014/main" id="{E72DAAB4-2CBE-DFF4-64DD-920615A57A26}"/>
+                <a16:creationId xmlns:a16="http://schemas.microsoft.com/office/drawing/2014/main" id="{5739DEC8-5A35-75D5-9638-F56804F12339}"/>
               </a:ext>
             </a:extLst>
           </p:cNvPr>
@@ -26681,7 +27093,7 @@
           <a:p>
             <a:fld id="{AD622D1A-DF83-41A8-85FF-04D90BF831D3}" type="datetime3">
               <a:rPr lang="en-US" smtClean="0"/>
-              <a:t>23 June 2026</a:t>
+              <a:t>10 July 2026</a:t>
             </a:fld>
             <a:endParaRPr lang="en-US"/>
           </a:p>
@@ -26692,7 +27104,7 @@
           <p:cNvPr id="5" name="Slide Number Placeholder 4">
             <a:extLst>
               <a:ext uri="{FF2B5EF4-FFF2-40B4-BE49-F238E27FC236}">
-                <a16:creationId xmlns:a16="http://schemas.microsoft.com/office/drawing/2014/main" id="{7C0D0253-A895-1EE1-2013-EFC76909B4BD}"/>
+                <a16:creationId xmlns:a16="http://schemas.microsoft.com/office/drawing/2014/main" id="{CE6EEC28-5E34-E95E-9F52-6396E99760B3}"/>
               </a:ext>
             </a:extLst>
           </p:cNvPr>
@@ -26717,10 +27129,40 @@
           </a:p>
         </p:txBody>
       </p:sp>
+      <p:pic>
+        <p:nvPicPr>
+          <p:cNvPr id="7" name="Picture 6">
+            <a:extLst>
+              <a:ext uri="{FF2B5EF4-FFF2-40B4-BE49-F238E27FC236}">
+                <a16:creationId xmlns:a16="http://schemas.microsoft.com/office/drawing/2014/main" id="{AEF19680-EFD5-86E3-BA8C-255B19E7592C}"/>
+              </a:ext>
+            </a:extLst>
+          </p:cNvPr>
+          <p:cNvPicPr>
+            <a:picLocks noChangeAspect="1"/>
+          </p:cNvPicPr>
+          <p:nvPr/>
+        </p:nvPicPr>
+        <p:blipFill>
+          <a:blip r:embed="rId3"/>
+          <a:stretch>
+            <a:fillRect/>
+          </a:stretch>
+        </p:blipFill>
+        <p:spPr>
+          <a:xfrm>
+            <a:off x="6827520" y="1142997"/>
+            <a:ext cx="5130994" cy="5571727"/>
+          </a:xfrm>
+          <a:prstGeom prst="rect">
+            <a:avLst/>
+          </a:prstGeom>
+        </p:spPr>
+      </p:pic>
     </p:spTree>
     <p:extLst>
       <p:ext uri="{BB962C8B-B14F-4D97-AF65-F5344CB8AC3E}">
-        <p14:creationId xmlns:p14="http://schemas.microsoft.com/office/powerpoint/2010/main" val="2626205550"/>
+        <p14:creationId xmlns:p14="http://schemas.microsoft.com/office/powerpoint/2010/main" val="3166557799"/>
       </p:ext>
     </p:extLst>
   </p:cSld>
@@ -26749,10 +27191,10 @@
       </p:grpSpPr>
       <p:sp>
         <p:nvSpPr>
-          <p:cNvPr id="6" name="Title 5">
-            <a:extLst>
-              <a:ext uri="{FF2B5EF4-FFF2-40B4-BE49-F238E27FC236}">
-                <a16:creationId xmlns:a16="http://schemas.microsoft.com/office/drawing/2014/main" id="{28906434-F997-27C3-919F-CE7837F349C1}"/>
+          <p:cNvPr id="2" name="Title 1">
+            <a:extLst>
+              <a:ext uri="{FF2B5EF4-FFF2-40B4-BE49-F238E27FC236}">
+                <a16:creationId xmlns:a16="http://schemas.microsoft.com/office/drawing/2014/main" id="{6916FF68-343E-F5F9-5A0C-85A025592E37}"/>
               </a:ext>
             </a:extLst>
           </p:cNvPr>
@@ -26770,25 +27212,25 @@
           <a:p>
             <a:r>
               <a:rPr lang="en-US" dirty="0"/>
-              <a:t>Hands-On #1</a:t>
-            </a:r>
-          </a:p>
-        </p:txBody>
-      </p:sp>
-      <p:sp>
-        <p:nvSpPr>
-          <p:cNvPr id="7" name="Text Placeholder 6">
-            <a:extLst>
-              <a:ext uri="{FF2B5EF4-FFF2-40B4-BE49-F238E27FC236}">
-                <a16:creationId xmlns:a16="http://schemas.microsoft.com/office/drawing/2014/main" id="{BAC52DAE-CBD8-631B-0394-8D79FD504D44}"/>
-              </a:ext>
-            </a:extLst>
-          </p:cNvPr>
-          <p:cNvSpPr>
-            <a:spLocks noGrp="1"/>
-          </p:cNvSpPr>
-          <p:nvPr>
-            <p:ph type="body" idx="1"/>
+              <a:t>Python Base64</a:t>
+            </a:r>
+          </a:p>
+        </p:txBody>
+      </p:sp>
+      <p:sp>
+        <p:nvSpPr>
+          <p:cNvPr id="3" name="Content Placeholder 2">
+            <a:extLst>
+              <a:ext uri="{FF2B5EF4-FFF2-40B4-BE49-F238E27FC236}">
+                <a16:creationId xmlns:a16="http://schemas.microsoft.com/office/drawing/2014/main" id="{3F545E95-C6A3-0E44-4BBF-21D1BEBD1591}"/>
+              </a:ext>
+            </a:extLst>
+          </p:cNvPr>
+          <p:cNvSpPr>
+            <a:spLocks noGrp="1"/>
+          </p:cNvSpPr>
+          <p:nvPr>
+            <p:ph idx="1"/>
           </p:nvPr>
         </p:nvSpPr>
         <p:spPr/>
@@ -26796,7 +27238,10 @@
           <a:bodyPr/>
           <a:lstStyle/>
           <a:p>
-            <a:endParaRPr lang="en-US"/>
+            <a:r>
+              <a:rPr lang="en-US" dirty="0"/>
+              <a:t>Demo converting an image and some text</a:t>
+            </a:r>
           </a:p>
         </p:txBody>
       </p:sp>
@@ -26805,7 +27250,7 @@
           <p:cNvPr id="4" name="Date Placeholder 3">
             <a:extLst>
               <a:ext uri="{FF2B5EF4-FFF2-40B4-BE49-F238E27FC236}">
-                <a16:creationId xmlns:a16="http://schemas.microsoft.com/office/drawing/2014/main" id="{D09924F4-6F02-D811-576D-4B2CB7D71CDF}"/>
+                <a16:creationId xmlns:a16="http://schemas.microsoft.com/office/drawing/2014/main" id="{E72DAAB4-2CBE-DFF4-64DD-920615A57A26}"/>
               </a:ext>
             </a:extLst>
           </p:cNvPr>
@@ -26823,7 +27268,7 @@
           <a:p>
             <a:fld id="{AD622D1A-DF83-41A8-85FF-04D90BF831D3}" type="datetime3">
               <a:rPr lang="en-US" smtClean="0"/>
-              <a:t>23 June 2026</a:t>
+              <a:t>10 July 2026</a:t>
             </a:fld>
             <a:endParaRPr lang="en-US"/>
           </a:p>
@@ -26834,15 +27279,15 @@
           <p:cNvPr id="5" name="Slide Number Placeholder 4">
             <a:extLst>
               <a:ext uri="{FF2B5EF4-FFF2-40B4-BE49-F238E27FC236}">
-                <a16:creationId xmlns:a16="http://schemas.microsoft.com/office/drawing/2014/main" id="{CA5BB809-B6F6-9BC1-E54D-7C07B20D75D3}"/>
-              </a:ext>
-            </a:extLst>
-          </p:cNvPr>
-          <p:cNvSpPr>
-            <a:spLocks noGrp="1"/>
-          </p:cNvSpPr>
-          <p:nvPr>
-            <p:ph type="sldNum" sz="quarter" idx="12"/>
+                <a16:creationId xmlns:a16="http://schemas.microsoft.com/office/drawing/2014/main" id="{7C0D0253-A895-1EE1-2013-EFC76909B4BD}"/>
+              </a:ext>
+            </a:extLst>
+          </p:cNvPr>
+          <p:cNvSpPr>
+            <a:spLocks noGrp="1"/>
+          </p:cNvSpPr>
+          <p:nvPr>
+            <p:ph type="sldNum" sz="quarter" idx="11"/>
           </p:nvPr>
         </p:nvSpPr>
         <p:spPr/>
@@ -26854,6 +27299,148 @@
               <a:rPr lang="en-US" smtClean="0"/>
               <a:pPr/>
               <a:t>13</a:t>
+            </a:fld>
+            <a:endParaRPr lang="en-US"/>
+          </a:p>
+        </p:txBody>
+      </p:sp>
+    </p:spTree>
+    <p:extLst>
+      <p:ext uri="{BB962C8B-B14F-4D97-AF65-F5344CB8AC3E}">
+        <p14:creationId xmlns:p14="http://schemas.microsoft.com/office/powerpoint/2010/main" val="2626205550"/>
+      </p:ext>
+    </p:extLst>
+  </p:cSld>
+  <p:clrMapOvr>
+    <a:masterClrMapping/>
+  </p:clrMapOvr>
+</p:sld>
+</file>
+
+<file path=ppt/slides/slide14.xml><?xml version="1.0" encoding="utf-8"?>
+<p:sld xmlns:a="http://schemas.openxmlformats.org/drawingml/2006/main" xmlns:r="http://schemas.openxmlformats.org/officeDocument/2006/relationships" xmlns:p="http://schemas.openxmlformats.org/presentationml/2006/main">
+  <p:cSld>
+    <p:spTree>
+      <p:nvGrpSpPr>
+        <p:cNvPr id="1" name=""/>
+        <p:cNvGrpSpPr/>
+        <p:nvPr/>
+      </p:nvGrpSpPr>
+      <p:grpSpPr>
+        <a:xfrm>
+          <a:off x="0" y="0"/>
+          <a:ext cx="0" cy="0"/>
+          <a:chOff x="0" y="0"/>
+          <a:chExt cx="0" cy="0"/>
+        </a:xfrm>
+      </p:grpSpPr>
+      <p:sp>
+        <p:nvSpPr>
+          <p:cNvPr id="6" name="Title 5">
+            <a:extLst>
+              <a:ext uri="{FF2B5EF4-FFF2-40B4-BE49-F238E27FC236}">
+                <a16:creationId xmlns:a16="http://schemas.microsoft.com/office/drawing/2014/main" id="{28906434-F997-27C3-919F-CE7837F349C1}"/>
+              </a:ext>
+            </a:extLst>
+          </p:cNvPr>
+          <p:cNvSpPr>
+            <a:spLocks noGrp="1"/>
+          </p:cNvSpPr>
+          <p:nvPr>
+            <p:ph type="title"/>
+          </p:nvPr>
+        </p:nvSpPr>
+        <p:spPr/>
+        <p:txBody>
+          <a:bodyPr/>
+          <a:lstStyle/>
+          <a:p>
+            <a:r>
+              <a:rPr lang="en-US" dirty="0"/>
+              <a:t>Hands-On #1</a:t>
+            </a:r>
+          </a:p>
+        </p:txBody>
+      </p:sp>
+      <p:sp>
+        <p:nvSpPr>
+          <p:cNvPr id="7" name="Text Placeholder 6">
+            <a:extLst>
+              <a:ext uri="{FF2B5EF4-FFF2-40B4-BE49-F238E27FC236}">
+                <a16:creationId xmlns:a16="http://schemas.microsoft.com/office/drawing/2014/main" id="{BAC52DAE-CBD8-631B-0394-8D79FD504D44}"/>
+              </a:ext>
+            </a:extLst>
+          </p:cNvPr>
+          <p:cNvSpPr>
+            <a:spLocks noGrp="1"/>
+          </p:cNvSpPr>
+          <p:nvPr>
+            <p:ph type="body" idx="1"/>
+          </p:nvPr>
+        </p:nvSpPr>
+        <p:spPr/>
+        <p:txBody>
+          <a:bodyPr/>
+          <a:lstStyle/>
+          <a:p>
+            <a:endParaRPr lang="en-US"/>
+          </a:p>
+        </p:txBody>
+      </p:sp>
+      <p:sp>
+        <p:nvSpPr>
+          <p:cNvPr id="4" name="Date Placeholder 3">
+            <a:extLst>
+              <a:ext uri="{FF2B5EF4-FFF2-40B4-BE49-F238E27FC236}">
+                <a16:creationId xmlns:a16="http://schemas.microsoft.com/office/drawing/2014/main" id="{D09924F4-6F02-D811-576D-4B2CB7D71CDF}"/>
+              </a:ext>
+            </a:extLst>
+          </p:cNvPr>
+          <p:cNvSpPr>
+            <a:spLocks noGrp="1"/>
+          </p:cNvSpPr>
+          <p:nvPr>
+            <p:ph type="dt" sz="half" idx="10"/>
+          </p:nvPr>
+        </p:nvSpPr>
+        <p:spPr/>
+        <p:txBody>
+          <a:bodyPr/>
+          <a:lstStyle/>
+          <a:p>
+            <a:fld id="{AD622D1A-DF83-41A8-85FF-04D90BF831D3}" type="datetime3">
+              <a:rPr lang="en-US" smtClean="0"/>
+              <a:t>10 July 2026</a:t>
+            </a:fld>
+            <a:endParaRPr lang="en-US"/>
+          </a:p>
+        </p:txBody>
+      </p:sp>
+      <p:sp>
+        <p:nvSpPr>
+          <p:cNvPr id="5" name="Slide Number Placeholder 4">
+            <a:extLst>
+              <a:ext uri="{FF2B5EF4-FFF2-40B4-BE49-F238E27FC236}">
+                <a16:creationId xmlns:a16="http://schemas.microsoft.com/office/drawing/2014/main" id="{CA5BB809-B6F6-9BC1-E54D-7C07B20D75D3}"/>
+              </a:ext>
+            </a:extLst>
+          </p:cNvPr>
+          <p:cNvSpPr>
+            <a:spLocks noGrp="1"/>
+          </p:cNvSpPr>
+          <p:nvPr>
+            <p:ph type="sldNum" sz="quarter" idx="12"/>
+          </p:nvPr>
+        </p:nvSpPr>
+        <p:spPr/>
+        <p:txBody>
+          <a:bodyPr/>
+          <a:lstStyle/>
+          <a:p>
+            <a:fld id="{64E5BE4B-2FBF-4174-9E62-85FAD1CB43A6}" type="slidenum">
+              <a:rPr lang="en-US" smtClean="0"/>
+              <a:pPr/>
+              <a:t>14</a:t>
             </a:fld>
             <a:endParaRPr lang="en-US"/>
           </a:p>
@@ -26872,7 +27459,7 @@
 </p:sld>
 </file>
 
-<file path=ppt/slides/slide14.xml><?xml version="1.0" encoding="utf-8"?>
+<file path=ppt/slides/slide15.xml><?xml version="1.0" encoding="utf-8"?>
 <p:sld xmlns:a="http://schemas.openxmlformats.org/drawingml/2006/main" xmlns:r="http://schemas.openxmlformats.org/officeDocument/2006/relationships" xmlns:p="http://schemas.openxmlformats.org/presentationml/2006/main">
   <p:cSld>
     <p:spTree>
@@ -26913,6 +27500,669 @@
         </p:nvSpPr>
         <p:spPr>
           <a:xfrm>
+            <a:off x="839788" y="365126"/>
+            <a:ext cx="10515600" cy="1231818"/>
+          </a:xfrm>
+        </p:spPr>
+        <p:txBody>
+          <a:bodyPr/>
+          <a:lstStyle/>
+          <a:p>
+            <a:r>
+              <a:rPr lang="en-US" dirty="0"/>
+              <a:t>APPLICATION PROGRAMMING INTERFACE</a:t>
+            </a:r>
+            <a:br>
+              <a:rPr lang="en-US" dirty="0"/>
+            </a:br>
+            <a:r>
+              <a:rPr lang="en-US" dirty="0"/>
+              <a:t>(API)</a:t>
+            </a:r>
+          </a:p>
+        </p:txBody>
+      </p:sp>
+      <p:sp>
+        <p:nvSpPr>
+          <p:cNvPr id="13" name="Content Placeholder 2">
+            <a:extLst>
+              <a:ext uri="{FF2B5EF4-FFF2-40B4-BE49-F238E27FC236}">
+                <a16:creationId xmlns:a16="http://schemas.microsoft.com/office/drawing/2014/main" id="{87B272D5-96CB-30F8-8E36-82AAEEAD08B1}"/>
+              </a:ext>
+            </a:extLst>
+          </p:cNvPr>
+          <p:cNvSpPr txBox="1">
+            <a:spLocks/>
+          </p:cNvSpPr>
+          <p:nvPr/>
+        </p:nvSpPr>
+        <p:spPr>
+          <a:xfrm>
+            <a:off x="548640" y="1600199"/>
+            <a:ext cx="11024925" cy="4572000"/>
+          </a:xfrm>
+          <a:prstGeom prst="rect">
+            <a:avLst/>
+          </a:prstGeom>
+        </p:spPr>
+        <p:txBody>
+          <a:bodyPr vert="horz" lIns="0" tIns="0" rIns="0" bIns="0" spcCol="365760" rtlCol="0" anchor="t">
+            <a:noAutofit/>
+          </a:bodyPr>
+          <a:lstStyle>
+            <a:lvl1pPr marL="0" indent="0" algn="l" defTabSz="914377" rtl="0" eaLnBrk="1" latinLnBrk="0" hangingPunct="1">
+              <a:lnSpc>
+                <a:spcPct val="95000"/>
+              </a:lnSpc>
+              <a:spcBef>
+                <a:spcPts val="1000"/>
+              </a:spcBef>
+              <a:buFont typeface="Arial" panose="020B0604020202020204" pitchFamily="34" charset="0"/>
+              <a:buNone/>
+              <a:defRPr sz="2400" b="1" kern="1200">
+                <a:solidFill>
+                  <a:schemeClr val="tx1"/>
+                </a:solidFill>
+                <a:latin typeface="+mn-lt"/>
+                <a:ea typeface="+mn-ea"/>
+                <a:cs typeface="+mn-cs"/>
+              </a:defRPr>
+            </a:lvl1pPr>
+            <a:lvl2pPr marL="457200" indent="0" algn="l" defTabSz="914377" rtl="0" eaLnBrk="1" latinLnBrk="0" hangingPunct="1">
+              <a:lnSpc>
+                <a:spcPct val="95000"/>
+              </a:lnSpc>
+              <a:spcBef>
+                <a:spcPts val="500"/>
+              </a:spcBef>
+              <a:buFont typeface="Arial" panose="020B0604020202020204" pitchFamily="34" charset="0"/>
+              <a:buNone/>
+              <a:defRPr sz="2000" b="1" kern="1200">
+                <a:solidFill>
+                  <a:schemeClr val="tx1"/>
+                </a:solidFill>
+                <a:latin typeface="+mn-lt"/>
+                <a:ea typeface="+mn-ea"/>
+                <a:cs typeface="+mn-cs"/>
+              </a:defRPr>
+            </a:lvl2pPr>
+            <a:lvl3pPr marL="914400" indent="0" algn="l" defTabSz="914377" rtl="0" eaLnBrk="1" latinLnBrk="0" hangingPunct="1">
+              <a:lnSpc>
+                <a:spcPct val="95000"/>
+              </a:lnSpc>
+              <a:spcBef>
+                <a:spcPts val="500"/>
+              </a:spcBef>
+              <a:buFont typeface="Arial" panose="020B0604020202020204" pitchFamily="34" charset="0"/>
+              <a:buNone/>
+              <a:defRPr sz="1800" b="1" kern="1200">
+                <a:solidFill>
+                  <a:schemeClr val="tx1"/>
+                </a:solidFill>
+                <a:latin typeface="+mn-lt"/>
+                <a:ea typeface="+mn-ea"/>
+                <a:cs typeface="+mn-cs"/>
+              </a:defRPr>
+            </a:lvl3pPr>
+            <a:lvl4pPr marL="1371600" indent="0" algn="l" defTabSz="914377" rtl="0" eaLnBrk="1" latinLnBrk="0" hangingPunct="1">
+              <a:lnSpc>
+                <a:spcPct val="95000"/>
+              </a:lnSpc>
+              <a:spcBef>
+                <a:spcPts val="500"/>
+              </a:spcBef>
+              <a:buFont typeface="Arial" panose="020B0604020202020204" pitchFamily="34" charset="0"/>
+              <a:buNone/>
+              <a:defRPr sz="1600" b="1" kern="1200">
+                <a:solidFill>
+                  <a:schemeClr val="tx1"/>
+                </a:solidFill>
+                <a:latin typeface="+mn-lt"/>
+                <a:ea typeface="+mn-ea"/>
+                <a:cs typeface="+mn-cs"/>
+              </a:defRPr>
+            </a:lvl4pPr>
+            <a:lvl5pPr marL="1828800" indent="0" algn="l" defTabSz="914377" rtl="0" eaLnBrk="1" latinLnBrk="0" hangingPunct="1">
+              <a:lnSpc>
+                <a:spcPct val="95000"/>
+              </a:lnSpc>
+              <a:spcBef>
+                <a:spcPts val="500"/>
+              </a:spcBef>
+              <a:buFont typeface="Arial" panose="020B0604020202020204" pitchFamily="34" charset="0"/>
+              <a:buNone/>
+              <a:defRPr sz="1600" b="1" kern="1200">
+                <a:solidFill>
+                  <a:schemeClr val="tx1"/>
+                </a:solidFill>
+                <a:latin typeface="+mn-lt"/>
+                <a:ea typeface="+mn-ea"/>
+                <a:cs typeface="+mn-cs"/>
+              </a:defRPr>
+            </a:lvl5pPr>
+            <a:lvl6pPr marL="2286000" indent="0" algn="l" defTabSz="914377" rtl="0" eaLnBrk="1" latinLnBrk="0" hangingPunct="1">
+              <a:lnSpc>
+                <a:spcPct val="95000"/>
+              </a:lnSpc>
+              <a:spcBef>
+                <a:spcPts val="500"/>
+              </a:spcBef>
+              <a:buFont typeface="Arial" panose="020B0604020202020204" pitchFamily="34" charset="0"/>
+              <a:buNone/>
+              <a:defRPr sz="1600" b="1" kern="1200">
+                <a:solidFill>
+                  <a:schemeClr val="tx1"/>
+                </a:solidFill>
+                <a:latin typeface="+mn-lt"/>
+                <a:ea typeface="+mn-ea"/>
+                <a:cs typeface="+mn-cs"/>
+              </a:defRPr>
+            </a:lvl6pPr>
+            <a:lvl7pPr marL="2743200" indent="0" algn="l" defTabSz="914377" rtl="0" eaLnBrk="1" latinLnBrk="0" hangingPunct="1">
+              <a:lnSpc>
+                <a:spcPct val="95000"/>
+              </a:lnSpc>
+              <a:spcBef>
+                <a:spcPts val="500"/>
+              </a:spcBef>
+              <a:buFont typeface="Arial" panose="020B0604020202020204" pitchFamily="34" charset="0"/>
+              <a:buNone/>
+              <a:defRPr sz="1600" b="1" kern="1200">
+                <a:solidFill>
+                  <a:schemeClr val="tx1"/>
+                </a:solidFill>
+                <a:latin typeface="+mn-lt"/>
+                <a:ea typeface="+mn-ea"/>
+                <a:cs typeface="+mn-cs"/>
+              </a:defRPr>
+            </a:lvl7pPr>
+            <a:lvl8pPr marL="3200400" indent="0" algn="l" defTabSz="914377" rtl="0" eaLnBrk="1" latinLnBrk="0" hangingPunct="1">
+              <a:lnSpc>
+                <a:spcPct val="95000"/>
+              </a:lnSpc>
+              <a:spcBef>
+                <a:spcPts val="500"/>
+              </a:spcBef>
+              <a:buFont typeface="Arial" panose="020B0604020202020204" pitchFamily="34" charset="0"/>
+              <a:buNone/>
+              <a:defRPr sz="1600" b="1" kern="1200">
+                <a:solidFill>
+                  <a:schemeClr val="tx1"/>
+                </a:solidFill>
+                <a:latin typeface="+mn-lt"/>
+                <a:ea typeface="+mn-ea"/>
+                <a:cs typeface="+mn-cs"/>
+              </a:defRPr>
+            </a:lvl8pPr>
+            <a:lvl9pPr marL="3657600" indent="0" algn="l" defTabSz="914377" rtl="0" eaLnBrk="1" latinLnBrk="0" hangingPunct="1">
+              <a:lnSpc>
+                <a:spcPct val="95000"/>
+              </a:lnSpc>
+              <a:spcBef>
+                <a:spcPts val="500"/>
+              </a:spcBef>
+              <a:buFont typeface="Arial" panose="020B0604020202020204" pitchFamily="34" charset="0"/>
+              <a:buNone/>
+              <a:defRPr sz="1600" b="1" kern="1200">
+                <a:solidFill>
+                  <a:schemeClr val="tx1"/>
+                </a:solidFill>
+                <a:latin typeface="+mn-lt"/>
+                <a:ea typeface="+mn-ea"/>
+                <a:cs typeface="+mn-cs"/>
+              </a:defRPr>
+            </a:lvl9pPr>
+          </a:lstStyle>
+          <a:p>
+            <a:r>
+              <a:rPr lang="en-US" dirty="0"/>
+              <a:t>An API is a set of rules and protocols that allows different software applications to talk to each other and share data seamlessly.</a:t>
+            </a:r>
+          </a:p>
+          <a:p>
+            <a:endParaRPr lang="en-US" b="0" dirty="0"/>
+          </a:p>
+          <a:p>
+            <a:r>
+              <a:rPr lang="en-US" b="0" dirty="0"/>
+              <a:t>Analogy:</a:t>
+            </a:r>
+          </a:p>
+          <a:p>
+            <a:pPr marL="342900" indent="-342900">
+              <a:buFont typeface="Arial" panose="020B0604020202020204" pitchFamily="34" charset="0"/>
+              <a:buChar char="•"/>
+            </a:pPr>
+            <a:r>
+              <a:rPr lang="en-US" b="0" dirty="0"/>
+              <a:t>You (</a:t>
+            </a:r>
+            <a:r>
+              <a:rPr lang="en-US" dirty="0"/>
+              <a:t>client</a:t>
+            </a:r>
+            <a:r>
+              <a:rPr lang="en-US" b="0" dirty="0"/>
+              <a:t>) are at a restaurant</a:t>
+            </a:r>
+          </a:p>
+          <a:p>
+            <a:pPr marL="342900" indent="-342900">
+              <a:buFont typeface="Arial" panose="020B0604020202020204" pitchFamily="34" charset="0"/>
+              <a:buChar char="•"/>
+            </a:pPr>
+            <a:r>
+              <a:rPr lang="en-US" b="0" dirty="0"/>
+              <a:t>The kitchen (</a:t>
+            </a:r>
+            <a:r>
+              <a:rPr lang="en-US" dirty="0"/>
+              <a:t>server/database</a:t>
+            </a:r>
+            <a:r>
+              <a:rPr lang="en-US" b="0" dirty="0"/>
+              <a:t>) preps the food</a:t>
+            </a:r>
+          </a:p>
+          <a:p>
+            <a:pPr marL="342900" indent="-342900">
+              <a:buFont typeface="Arial" panose="020B0604020202020204" pitchFamily="34" charset="0"/>
+              <a:buChar char="•"/>
+            </a:pPr>
+            <a:r>
+              <a:rPr lang="en-US" b="0" dirty="0"/>
+              <a:t>The waiter (</a:t>
+            </a:r>
+            <a:r>
+              <a:rPr lang="en-US" dirty="0"/>
+              <a:t>API</a:t>
+            </a:r>
+            <a:r>
+              <a:rPr lang="en-US" b="0" dirty="0"/>
+              <a:t>) takes your order, delivers it to the kitchen, and brings the food back to you.</a:t>
+            </a:r>
+          </a:p>
+        </p:txBody>
+      </p:sp>
+    </p:spTree>
+    <p:extLst>
+      <p:ext uri="{BB962C8B-B14F-4D97-AF65-F5344CB8AC3E}">
+        <p14:creationId xmlns:p14="http://schemas.microsoft.com/office/powerpoint/2010/main" val="2914651355"/>
+      </p:ext>
+    </p:extLst>
+  </p:cSld>
+  <p:clrMapOvr>
+    <a:masterClrMapping/>
+  </p:clrMapOvr>
+</p:sld>
+</file>
+
+<file path=ppt/slides/slide16.xml><?xml version="1.0" encoding="utf-8"?>
+<p:sld xmlns:a="http://schemas.openxmlformats.org/drawingml/2006/main" xmlns:r="http://schemas.openxmlformats.org/officeDocument/2006/relationships" xmlns:p="http://schemas.openxmlformats.org/presentationml/2006/main">
+  <p:cSld>
+    <p:spTree>
+      <p:nvGrpSpPr>
+        <p:cNvPr id="1" name="">
+          <a:extLst>
+            <a:ext uri="{FF2B5EF4-FFF2-40B4-BE49-F238E27FC236}">
+              <a16:creationId xmlns:a16="http://schemas.microsoft.com/office/drawing/2014/main" id="{5F85A8AC-8D90-4A86-685A-349D7203DBA1}"/>
+            </a:ext>
+          </a:extLst>
+        </p:cNvPr>
+        <p:cNvGrpSpPr/>
+        <p:nvPr/>
+      </p:nvGrpSpPr>
+      <p:grpSpPr>
+        <a:xfrm>
+          <a:off x="0" y="0"/>
+          <a:ext cx="0" cy="0"/>
+          <a:chOff x="0" y="0"/>
+          <a:chExt cx="0" cy="0"/>
+        </a:xfrm>
+      </p:grpSpPr>
+      <p:sp>
+        <p:nvSpPr>
+          <p:cNvPr id="2" name="Title 1">
+            <a:extLst>
+              <a:ext uri="{FF2B5EF4-FFF2-40B4-BE49-F238E27FC236}">
+                <a16:creationId xmlns:a16="http://schemas.microsoft.com/office/drawing/2014/main" id="{156961A9-959A-F96E-EDFA-59FA637CE1B2}"/>
+              </a:ext>
+            </a:extLst>
+          </p:cNvPr>
+          <p:cNvSpPr>
+            <a:spLocks noGrp="1"/>
+          </p:cNvSpPr>
+          <p:nvPr>
+            <p:ph type="title"/>
+          </p:nvPr>
+        </p:nvSpPr>
+        <p:spPr>
+          <a:xfrm>
+            <a:off x="839788" y="365126"/>
+            <a:ext cx="10515600" cy="1231818"/>
+          </a:xfrm>
+        </p:spPr>
+        <p:txBody>
+          <a:bodyPr/>
+          <a:lstStyle/>
+          <a:p>
+            <a:r>
+              <a:rPr lang="en-US" dirty="0"/>
+              <a:t>APPLICATION PROGRAMMING INTERFACE</a:t>
+            </a:r>
+            <a:br>
+              <a:rPr lang="en-US" dirty="0"/>
+            </a:br>
+            <a:r>
+              <a:rPr lang="en-US" dirty="0"/>
+              <a:t>(API)</a:t>
+            </a:r>
+          </a:p>
+        </p:txBody>
+      </p:sp>
+      <p:sp>
+        <p:nvSpPr>
+          <p:cNvPr id="13" name="Content Placeholder 2">
+            <a:extLst>
+              <a:ext uri="{FF2B5EF4-FFF2-40B4-BE49-F238E27FC236}">
+                <a16:creationId xmlns:a16="http://schemas.microsoft.com/office/drawing/2014/main" id="{989B67D4-18D0-578D-6801-6B69F7A6551A}"/>
+              </a:ext>
+            </a:extLst>
+          </p:cNvPr>
+          <p:cNvSpPr txBox="1">
+            <a:spLocks/>
+          </p:cNvSpPr>
+          <p:nvPr/>
+        </p:nvSpPr>
+        <p:spPr>
+          <a:xfrm>
+            <a:off x="548640" y="1600199"/>
+            <a:ext cx="11024925" cy="4572000"/>
+          </a:xfrm>
+          <a:prstGeom prst="rect">
+            <a:avLst/>
+          </a:prstGeom>
+        </p:spPr>
+        <p:txBody>
+          <a:bodyPr vert="horz" lIns="0" tIns="0" rIns="0" bIns="0" spcCol="365760" rtlCol="0" anchor="t">
+            <a:noAutofit/>
+          </a:bodyPr>
+          <a:lstStyle>
+            <a:lvl1pPr marL="0" indent="0" algn="l" defTabSz="914377" rtl="0" eaLnBrk="1" latinLnBrk="0" hangingPunct="1">
+              <a:lnSpc>
+                <a:spcPct val="95000"/>
+              </a:lnSpc>
+              <a:spcBef>
+                <a:spcPts val="1000"/>
+              </a:spcBef>
+              <a:buFont typeface="Arial" panose="020B0604020202020204" pitchFamily="34" charset="0"/>
+              <a:buNone/>
+              <a:defRPr sz="2400" b="1" kern="1200">
+                <a:solidFill>
+                  <a:schemeClr val="tx1"/>
+                </a:solidFill>
+                <a:latin typeface="+mn-lt"/>
+                <a:ea typeface="+mn-ea"/>
+                <a:cs typeface="+mn-cs"/>
+              </a:defRPr>
+            </a:lvl1pPr>
+            <a:lvl2pPr marL="457200" indent="0" algn="l" defTabSz="914377" rtl="0" eaLnBrk="1" latinLnBrk="0" hangingPunct="1">
+              <a:lnSpc>
+                <a:spcPct val="95000"/>
+              </a:lnSpc>
+              <a:spcBef>
+                <a:spcPts val="500"/>
+              </a:spcBef>
+              <a:buFont typeface="Arial" panose="020B0604020202020204" pitchFamily="34" charset="0"/>
+              <a:buNone/>
+              <a:defRPr sz="2000" b="1" kern="1200">
+                <a:solidFill>
+                  <a:schemeClr val="tx1"/>
+                </a:solidFill>
+                <a:latin typeface="+mn-lt"/>
+                <a:ea typeface="+mn-ea"/>
+                <a:cs typeface="+mn-cs"/>
+              </a:defRPr>
+            </a:lvl2pPr>
+            <a:lvl3pPr marL="914400" indent="0" algn="l" defTabSz="914377" rtl="0" eaLnBrk="1" latinLnBrk="0" hangingPunct="1">
+              <a:lnSpc>
+                <a:spcPct val="95000"/>
+              </a:lnSpc>
+              <a:spcBef>
+                <a:spcPts val="500"/>
+              </a:spcBef>
+              <a:buFont typeface="Arial" panose="020B0604020202020204" pitchFamily="34" charset="0"/>
+              <a:buNone/>
+              <a:defRPr sz="1800" b="1" kern="1200">
+                <a:solidFill>
+                  <a:schemeClr val="tx1"/>
+                </a:solidFill>
+                <a:latin typeface="+mn-lt"/>
+                <a:ea typeface="+mn-ea"/>
+                <a:cs typeface="+mn-cs"/>
+              </a:defRPr>
+            </a:lvl3pPr>
+            <a:lvl4pPr marL="1371600" indent="0" algn="l" defTabSz="914377" rtl="0" eaLnBrk="1" latinLnBrk="0" hangingPunct="1">
+              <a:lnSpc>
+                <a:spcPct val="95000"/>
+              </a:lnSpc>
+              <a:spcBef>
+                <a:spcPts val="500"/>
+              </a:spcBef>
+              <a:buFont typeface="Arial" panose="020B0604020202020204" pitchFamily="34" charset="0"/>
+              <a:buNone/>
+              <a:defRPr sz="1600" b="1" kern="1200">
+                <a:solidFill>
+                  <a:schemeClr val="tx1"/>
+                </a:solidFill>
+                <a:latin typeface="+mn-lt"/>
+                <a:ea typeface="+mn-ea"/>
+                <a:cs typeface="+mn-cs"/>
+              </a:defRPr>
+            </a:lvl4pPr>
+            <a:lvl5pPr marL="1828800" indent="0" algn="l" defTabSz="914377" rtl="0" eaLnBrk="1" latinLnBrk="0" hangingPunct="1">
+              <a:lnSpc>
+                <a:spcPct val="95000"/>
+              </a:lnSpc>
+              <a:spcBef>
+                <a:spcPts val="500"/>
+              </a:spcBef>
+              <a:buFont typeface="Arial" panose="020B0604020202020204" pitchFamily="34" charset="0"/>
+              <a:buNone/>
+              <a:defRPr sz="1600" b="1" kern="1200">
+                <a:solidFill>
+                  <a:schemeClr val="tx1"/>
+                </a:solidFill>
+                <a:latin typeface="+mn-lt"/>
+                <a:ea typeface="+mn-ea"/>
+                <a:cs typeface="+mn-cs"/>
+              </a:defRPr>
+            </a:lvl5pPr>
+            <a:lvl6pPr marL="2286000" indent="0" algn="l" defTabSz="914377" rtl="0" eaLnBrk="1" latinLnBrk="0" hangingPunct="1">
+              <a:lnSpc>
+                <a:spcPct val="95000"/>
+              </a:lnSpc>
+              <a:spcBef>
+                <a:spcPts val="500"/>
+              </a:spcBef>
+              <a:buFont typeface="Arial" panose="020B0604020202020204" pitchFamily="34" charset="0"/>
+              <a:buNone/>
+              <a:defRPr sz="1600" b="1" kern="1200">
+                <a:solidFill>
+                  <a:schemeClr val="tx1"/>
+                </a:solidFill>
+                <a:latin typeface="+mn-lt"/>
+                <a:ea typeface="+mn-ea"/>
+                <a:cs typeface="+mn-cs"/>
+              </a:defRPr>
+            </a:lvl6pPr>
+            <a:lvl7pPr marL="2743200" indent="0" algn="l" defTabSz="914377" rtl="0" eaLnBrk="1" latinLnBrk="0" hangingPunct="1">
+              <a:lnSpc>
+                <a:spcPct val="95000"/>
+              </a:lnSpc>
+              <a:spcBef>
+                <a:spcPts val="500"/>
+              </a:spcBef>
+              <a:buFont typeface="Arial" panose="020B0604020202020204" pitchFamily="34" charset="0"/>
+              <a:buNone/>
+              <a:defRPr sz="1600" b="1" kern="1200">
+                <a:solidFill>
+                  <a:schemeClr val="tx1"/>
+                </a:solidFill>
+                <a:latin typeface="+mn-lt"/>
+                <a:ea typeface="+mn-ea"/>
+                <a:cs typeface="+mn-cs"/>
+              </a:defRPr>
+            </a:lvl7pPr>
+            <a:lvl8pPr marL="3200400" indent="0" algn="l" defTabSz="914377" rtl="0" eaLnBrk="1" latinLnBrk="0" hangingPunct="1">
+              <a:lnSpc>
+                <a:spcPct val="95000"/>
+              </a:lnSpc>
+              <a:spcBef>
+                <a:spcPts val="500"/>
+              </a:spcBef>
+              <a:buFont typeface="Arial" panose="020B0604020202020204" pitchFamily="34" charset="0"/>
+              <a:buNone/>
+              <a:defRPr sz="1600" b="1" kern="1200">
+                <a:solidFill>
+                  <a:schemeClr val="tx1"/>
+                </a:solidFill>
+                <a:latin typeface="+mn-lt"/>
+                <a:ea typeface="+mn-ea"/>
+                <a:cs typeface="+mn-cs"/>
+              </a:defRPr>
+            </a:lvl8pPr>
+            <a:lvl9pPr marL="3657600" indent="0" algn="l" defTabSz="914377" rtl="0" eaLnBrk="1" latinLnBrk="0" hangingPunct="1">
+              <a:lnSpc>
+                <a:spcPct val="95000"/>
+              </a:lnSpc>
+              <a:spcBef>
+                <a:spcPts val="500"/>
+              </a:spcBef>
+              <a:buFont typeface="Arial" panose="020B0604020202020204" pitchFamily="34" charset="0"/>
+              <a:buNone/>
+              <a:defRPr sz="1600" b="1" kern="1200">
+                <a:solidFill>
+                  <a:schemeClr val="tx1"/>
+                </a:solidFill>
+                <a:latin typeface="+mn-lt"/>
+                <a:ea typeface="+mn-ea"/>
+                <a:cs typeface="+mn-cs"/>
+              </a:defRPr>
+            </a:lvl9pPr>
+          </a:lstStyle>
+          <a:p>
+            <a:pPr marL="342900" indent="-342900">
+              <a:buFont typeface="Arial" panose="020B0604020202020204" pitchFamily="34" charset="0"/>
+              <a:buChar char="•"/>
+            </a:pPr>
+            <a:r>
+              <a:rPr lang="en-US" dirty="0"/>
+              <a:t>Efficiency</a:t>
+            </a:r>
+            <a:r>
+              <a:rPr lang="en-US" b="0" dirty="0"/>
+              <a:t>: Don’t reinvent the wheel. Instead of building a payment system or mapping tool from scratch, developers can plug in an existing API.</a:t>
+            </a:r>
+          </a:p>
+          <a:p>
+            <a:pPr marL="342900" indent="-342900">
+              <a:buFont typeface="Arial" panose="020B0604020202020204" pitchFamily="34" charset="0"/>
+              <a:buChar char="•"/>
+            </a:pPr>
+            <a:r>
+              <a:rPr lang="en-US" dirty="0"/>
+              <a:t>Automation</a:t>
+            </a:r>
+            <a:r>
+              <a:rPr lang="en-US" b="0" dirty="0"/>
+              <a:t>: They allow computers to pass information back and forth automatically, eliminating manual data entry.</a:t>
+            </a:r>
+          </a:p>
+          <a:p>
+            <a:pPr marL="342900" indent="-342900">
+              <a:buFont typeface="Arial" panose="020B0604020202020204" pitchFamily="34" charset="0"/>
+              <a:buChar char="•"/>
+            </a:pPr>
+            <a:r>
+              <a:rPr lang="en-US" dirty="0"/>
+              <a:t>Security</a:t>
+            </a:r>
+            <a:r>
+              <a:rPr lang="en-US" b="0" dirty="0"/>
+              <a:t>: APIs only share the specific data requested, keeping the rest of the server's database hidden and secure.</a:t>
+            </a:r>
+          </a:p>
+          <a:p>
+            <a:pPr marL="342900" indent="-342900">
+              <a:buFont typeface="Arial" panose="020B0604020202020204" pitchFamily="34" charset="0"/>
+              <a:buChar char="•"/>
+            </a:pPr>
+            <a:r>
+              <a:rPr lang="en-US" dirty="0"/>
+              <a:t>Scalability</a:t>
+            </a:r>
+            <a:r>
+              <a:rPr lang="en-US" b="0" dirty="0"/>
+              <a:t>: They make it easy to connect new features, platforms, and services as a business grows.</a:t>
+            </a:r>
+          </a:p>
+        </p:txBody>
+      </p:sp>
+    </p:spTree>
+    <p:extLst>
+      <p:ext uri="{BB962C8B-B14F-4D97-AF65-F5344CB8AC3E}">
+        <p14:creationId xmlns:p14="http://schemas.microsoft.com/office/powerpoint/2010/main" val="4087570126"/>
+      </p:ext>
+    </p:extLst>
+  </p:cSld>
+  <p:clrMapOvr>
+    <a:masterClrMapping/>
+  </p:clrMapOvr>
+</p:sld>
+</file>
+
+<file path=ppt/slides/slide17.xml><?xml version="1.0" encoding="utf-8"?>
+<p:sld xmlns:a="http://schemas.openxmlformats.org/drawingml/2006/main" xmlns:r="http://schemas.openxmlformats.org/officeDocument/2006/relationships" xmlns:p="http://schemas.openxmlformats.org/presentationml/2006/main">
+  <p:cSld>
+    <p:spTree>
+      <p:nvGrpSpPr>
+        <p:cNvPr id="1" name="">
+          <a:extLst>
+            <a:ext uri="{FF2B5EF4-FFF2-40B4-BE49-F238E27FC236}">
+              <a16:creationId xmlns:a16="http://schemas.microsoft.com/office/drawing/2014/main" id="{4371546C-9845-93FB-6A72-A22BCC33C83F}"/>
+            </a:ext>
+          </a:extLst>
+        </p:cNvPr>
+        <p:cNvGrpSpPr/>
+        <p:nvPr/>
+      </p:nvGrpSpPr>
+      <p:grpSpPr>
+        <a:xfrm>
+          <a:off x="0" y="0"/>
+          <a:ext cx="0" cy="0"/>
+          <a:chOff x="0" y="0"/>
+          <a:chExt cx="0" cy="0"/>
+        </a:xfrm>
+      </p:grpSpPr>
+      <p:sp>
+        <p:nvSpPr>
+          <p:cNvPr id="2" name="Title 1">
+            <a:extLst>
+              <a:ext uri="{FF2B5EF4-FFF2-40B4-BE49-F238E27FC236}">
+                <a16:creationId xmlns:a16="http://schemas.microsoft.com/office/drawing/2014/main" id="{896324EB-3EEB-6089-2596-7CB363CDCB01}"/>
+              </a:ext>
+            </a:extLst>
+          </p:cNvPr>
+          <p:cNvSpPr>
+            <a:spLocks noGrp="1"/>
+          </p:cNvSpPr>
+          <p:nvPr>
+            <p:ph type="title"/>
+          </p:nvPr>
+        </p:nvSpPr>
+        <p:spPr>
+          <a:xfrm>
             <a:off x="839788" y="365125"/>
             <a:ext cx="10515600" cy="1325563"/>
           </a:xfrm>
@@ -26933,7 +28183,7 @@
           <p:cNvPr id="5" name="Text Placeholder 4">
             <a:extLst>
               <a:ext uri="{FF2B5EF4-FFF2-40B4-BE49-F238E27FC236}">
-                <a16:creationId xmlns:a16="http://schemas.microsoft.com/office/drawing/2014/main" id="{6F7A2A1E-639A-3D2A-DC66-A1A2DABA83D1}"/>
+                <a16:creationId xmlns:a16="http://schemas.microsoft.com/office/drawing/2014/main" id="{1F9E7410-8077-8A80-1D55-E3170972E84E}"/>
               </a:ext>
             </a:extLst>
           </p:cNvPr>
@@ -26966,7 +28216,7 @@
           <p:cNvPr id="6" name="Content Placeholder 5">
             <a:extLst>
               <a:ext uri="{FF2B5EF4-FFF2-40B4-BE49-F238E27FC236}">
-                <a16:creationId xmlns:a16="http://schemas.microsoft.com/office/drawing/2014/main" id="{0A6FD7DB-0070-9216-4EC2-A41C584EA58A}"/>
+                <a16:creationId xmlns:a16="http://schemas.microsoft.com/office/drawing/2014/main" id="{C6D2A7DC-D741-B968-D0E7-49E25B398C31}"/>
               </a:ext>
             </a:extLst>
           </p:cNvPr>
@@ -27081,7 +28331,7 @@
           <p:cNvPr id="9" name="Rectangle 8">
             <a:extLst>
               <a:ext uri="{FF2B5EF4-FFF2-40B4-BE49-F238E27FC236}">
-                <a16:creationId xmlns:a16="http://schemas.microsoft.com/office/drawing/2014/main" id="{454316F9-3DCB-C2BB-D196-DF20A41BC0C8}"/>
+                <a16:creationId xmlns:a16="http://schemas.microsoft.com/office/drawing/2014/main" id="{04E78EA0-AA15-0752-17CA-3A1B3DABD959}"/>
               </a:ext>
             </a:extLst>
           </p:cNvPr>
@@ -27133,7 +28383,7 @@
           <p:cNvPr id="11" name="TextBox 10">
             <a:extLst>
               <a:ext uri="{FF2B5EF4-FFF2-40B4-BE49-F238E27FC236}">
-                <a16:creationId xmlns:a16="http://schemas.microsoft.com/office/drawing/2014/main" id="{0DDAB313-61F8-F1E1-0943-0A5CBD95E544}"/>
+                <a16:creationId xmlns:a16="http://schemas.microsoft.com/office/drawing/2014/main" id="{E50E4215-CC83-8F02-88FE-59C885E8D216}"/>
               </a:ext>
             </a:extLst>
           </p:cNvPr>
@@ -27192,7 +28442,7 @@
           <p:cNvPr id="12" name="Rectangle 11">
             <a:extLst>
               <a:ext uri="{FF2B5EF4-FFF2-40B4-BE49-F238E27FC236}">
-                <a16:creationId xmlns:a16="http://schemas.microsoft.com/office/drawing/2014/main" id="{16AA6916-796C-D3A1-77CC-0554582087C7}"/>
+                <a16:creationId xmlns:a16="http://schemas.microsoft.com/office/drawing/2014/main" id="{0C78B5A9-E084-5B63-52D0-56E339CF3E08}"/>
               </a:ext>
             </a:extLst>
           </p:cNvPr>
@@ -27244,7 +28494,7 @@
           <p:cNvPr id="14" name="Rectangle 13">
             <a:extLst>
               <a:ext uri="{FF2B5EF4-FFF2-40B4-BE49-F238E27FC236}">
-                <a16:creationId xmlns:a16="http://schemas.microsoft.com/office/drawing/2014/main" id="{146990E5-ED21-D729-4E7B-12F8F55A8DAB}"/>
+                <a16:creationId xmlns:a16="http://schemas.microsoft.com/office/drawing/2014/main" id="{EC8483AE-D765-0E14-0D18-C18E8523BF90}"/>
               </a:ext>
             </a:extLst>
           </p:cNvPr>
@@ -27294,7 +28544,7 @@
     </p:spTree>
     <p:extLst>
       <p:ext uri="{BB962C8B-B14F-4D97-AF65-F5344CB8AC3E}">
-        <p14:creationId xmlns:p14="http://schemas.microsoft.com/office/powerpoint/2010/main" val="2914651355"/>
+        <p14:creationId xmlns:p14="http://schemas.microsoft.com/office/powerpoint/2010/main" val="2553809707"/>
       </p:ext>
     </p:extLst>
   </p:cSld>
@@ -27466,7 +28716,7 @@
 </p:sld>
 </file>
 
-<file path=ppt/slides/slide15.xml><?xml version="1.0" encoding="utf-8"?>
+<file path=ppt/slides/slide18.xml><?xml version="1.0" encoding="utf-8"?>
 <p:sld xmlns:a="http://schemas.openxmlformats.org/drawingml/2006/main" xmlns:r="http://schemas.openxmlformats.org/officeDocument/2006/relationships" xmlns:p="http://schemas.openxmlformats.org/presentationml/2006/main">
   <p:cSld>
     <p:spTree>
@@ -27539,8 +28789,14 @@
           <a:lstStyle/>
           <a:p>
             <a:r>
-              <a:rPr lang="en-US" dirty="0"/>
-              <a:t>PayPal example</a:t>
+              <a:rPr lang="en-US" sz="3600" dirty="0">
+                <a:hlinkClick r:id="rId2"/>
+              </a:rPr>
+              <a:t>PayPal</a:t>
+            </a:r>
+            <a:r>
+              <a:rPr lang="en-US" sz="3600" dirty="0"/>
+              <a:t> </a:t>
             </a:r>
           </a:p>
         </p:txBody>
@@ -27568,7 +28824,7 @@
           <a:p>
             <a:fld id="{AD622D1A-DF83-41A8-85FF-04D90BF831D3}" type="datetime3">
               <a:rPr lang="en-US" smtClean="0"/>
-              <a:t>23 June 2026</a:t>
+              <a:t>10 July 2026</a:t>
             </a:fld>
             <a:endParaRPr lang="en-US"/>
           </a:p>
@@ -27598,7 +28854,7 @@
             <a:fld id="{64E5BE4B-2FBF-4174-9E62-85FAD1CB43A6}" type="slidenum">
               <a:rPr lang="en-US" smtClean="0"/>
               <a:pPr/>
-              <a:t>15</a:t>
+              <a:t>18</a:t>
             </a:fld>
             <a:endParaRPr lang="en-US"/>
           </a:p>
@@ -27617,7 +28873,7 @@
 </p:sld>
 </file>
 
-<file path=ppt/slides/slide16.xml><?xml version="1.0" encoding="utf-8"?>
+<file path=ppt/slides/slide19.xml><?xml version="1.0" encoding="utf-8"?>
 <p:sld xmlns:a="http://schemas.openxmlformats.org/drawingml/2006/main" xmlns:r="http://schemas.openxmlformats.org/officeDocument/2006/relationships" xmlns:p="http://schemas.openxmlformats.org/presentationml/2006/main">
   <p:cSld>
     <p:spTree>
@@ -27692,6 +28948,43 @@
             <a:pPr lvl="1"/>
             <a:r>
               <a:rPr lang="en-US" dirty="0"/>
+              <a:t>Compare two commits in GitHub</a:t>
+            </a:r>
+          </a:p>
+          <a:p>
+            <a:pPr lvl="1"/>
+            <a:r>
+              <a:rPr lang="en-US" dirty="0"/>
+              <a:t>Plan a route using Google Maps</a:t>
+            </a:r>
+          </a:p>
+          <a:p>
+            <a:pPr lvl="1"/>
+            <a:r>
+              <a:rPr lang="en-US" dirty="0"/>
+              <a:t>See my abandoned carts in Shopify</a:t>
+            </a:r>
+          </a:p>
+          <a:p>
+            <a:pPr lvl="1"/>
+            <a:r>
+              <a:rPr lang="en-US" dirty="0"/>
+              <a:t>Create a new Spotify playlist</a:t>
+            </a:r>
+          </a:p>
+          <a:p>
+            <a:endParaRPr lang="en-US" dirty="0"/>
+          </a:p>
+          <a:p>
+            <a:r>
+              <a:rPr lang="en-US" dirty="0"/>
+              <a:t>Per task, identify the following:</a:t>
+            </a:r>
+          </a:p>
+          <a:p>
+            <a:pPr lvl="1"/>
+            <a:r>
+              <a:rPr lang="en-US" dirty="0"/>
               <a:t>Endpoint, e.g. </a:t>
             </a:r>
             <a:r>
@@ -27724,40 +29017,6 @@
             </a:r>
           </a:p>
           <a:p>
-            <a:r>
-              <a:rPr lang="en-US" dirty="0"/>
-              <a:t>Groups:</a:t>
-            </a:r>
-          </a:p>
-          <a:p>
-            <a:pPr lvl="1"/>
-            <a:r>
-              <a:rPr lang="en-US" dirty="0"/>
-              <a:t>Compare two commits in GitHub</a:t>
-            </a:r>
-          </a:p>
-          <a:p>
-            <a:pPr lvl="1"/>
-            <a:r>
-              <a:rPr lang="en-US" dirty="0"/>
-              <a:t>Plan a route using Google Maps</a:t>
-            </a:r>
-          </a:p>
-          <a:p>
-            <a:pPr lvl="1"/>
-            <a:r>
-              <a:rPr lang="en-US" dirty="0"/>
-              <a:t>See my abandoned carts in Shopify</a:t>
-            </a:r>
-          </a:p>
-          <a:p>
-            <a:pPr lvl="1"/>
-            <a:r>
-              <a:rPr lang="en-US" dirty="0"/>
-              <a:t>Create a new Spotify playlist</a:t>
-            </a:r>
-          </a:p>
-          <a:p>
             <a:pPr lvl="1"/>
             <a:endParaRPr lang="en-US" dirty="0"/>
           </a:p>
@@ -27786,7 +29045,7 @@
           <a:p>
             <a:fld id="{AD622D1A-DF83-41A8-85FF-04D90BF831D3}" type="datetime3">
               <a:rPr lang="en-US" smtClean="0"/>
-              <a:t>23 June 2026</a:t>
+              <a:t>10 July 2026</a:t>
             </a:fld>
             <a:endParaRPr lang="en-US"/>
           </a:p>
@@ -27816,7 +29075,7 @@
             <a:fld id="{64E5BE4B-2FBF-4174-9E62-85FAD1CB43A6}" type="slidenum">
               <a:rPr lang="en-US" smtClean="0"/>
               <a:pPr/>
-              <a:t>16</a:t>
+              <a:t>19</a:t>
             </a:fld>
             <a:endParaRPr lang="en-US"/>
           </a:p>
@@ -27835,7 +29094,162 @@
 </p:sld>
 </file>
 
-<file path=ppt/slides/slide17.xml><?xml version="1.0" encoding="utf-8"?>
+<file path=ppt/slides/slide2.xml><?xml version="1.0" encoding="utf-8"?>
+<p:sld xmlns:a="http://schemas.openxmlformats.org/drawingml/2006/main" xmlns:r="http://schemas.openxmlformats.org/officeDocument/2006/relationships" xmlns:p="http://schemas.openxmlformats.org/presentationml/2006/main">
+  <p:cSld>
+    <p:spTree>
+      <p:nvGrpSpPr>
+        <p:cNvPr id="1" name="">
+          <a:extLst>
+            <a:ext uri="{FF2B5EF4-FFF2-40B4-BE49-F238E27FC236}">
+              <a16:creationId xmlns:a16="http://schemas.microsoft.com/office/drawing/2014/main" id="{372D87CF-5E92-D709-ADC1-CD5AB2C3F775}"/>
+            </a:ext>
+          </a:extLst>
+        </p:cNvPr>
+        <p:cNvGrpSpPr/>
+        <p:nvPr/>
+      </p:nvGrpSpPr>
+      <p:grpSpPr>
+        <a:xfrm>
+          <a:off x="0" y="0"/>
+          <a:ext cx="0" cy="0"/>
+          <a:chOff x="0" y="0"/>
+          <a:chExt cx="0" cy="0"/>
+        </a:xfrm>
+      </p:grpSpPr>
+      <p:sp>
+        <p:nvSpPr>
+          <p:cNvPr id="2" name="Title 1">
+            <a:extLst>
+              <a:ext uri="{FF2B5EF4-FFF2-40B4-BE49-F238E27FC236}">
+                <a16:creationId xmlns:a16="http://schemas.microsoft.com/office/drawing/2014/main" id="{2AEBB9CF-99E0-34C2-13BD-CE711791B329}"/>
+              </a:ext>
+            </a:extLst>
+          </p:cNvPr>
+          <p:cNvSpPr>
+            <a:spLocks noGrp="1"/>
+          </p:cNvSpPr>
+          <p:nvPr>
+            <p:ph type="title"/>
+          </p:nvPr>
+        </p:nvSpPr>
+        <p:spPr/>
+        <p:txBody>
+          <a:bodyPr/>
+          <a:lstStyle/>
+          <a:p>
+            <a:br>
+              <a:rPr lang="en-US" dirty="0"/>
+            </a:br>
+            <a:r>
+              <a:rPr lang="en-US" dirty="0"/>
+              <a:t>Course Schedule</a:t>
+            </a:r>
+          </a:p>
+        </p:txBody>
+      </p:sp>
+      <p:pic>
+        <p:nvPicPr>
+          <p:cNvPr id="7" name="Content Placeholder 6">
+            <a:extLst>
+              <a:ext uri="{FF2B5EF4-FFF2-40B4-BE49-F238E27FC236}">
+                <a16:creationId xmlns:a16="http://schemas.microsoft.com/office/drawing/2014/main" id="{D6C03BA8-C242-A7E3-06B9-2FDDD142A3E2}"/>
+              </a:ext>
+            </a:extLst>
+          </p:cNvPr>
+          <p:cNvPicPr>
+            <a:picLocks noGrp="1" noChangeAspect="1"/>
+          </p:cNvPicPr>
+          <p:nvPr>
+            <p:ph idx="1"/>
+          </p:nvPr>
+        </p:nvPicPr>
+        <p:blipFill>
+          <a:blip r:embed="rId3"/>
+          <a:stretch>
+            <a:fillRect/>
+          </a:stretch>
+        </p:blipFill>
+        <p:spPr>
+          <a:xfrm>
+            <a:off x="508000" y="1318800"/>
+            <a:ext cx="11176000" cy="4955141"/>
+          </a:xfrm>
+          <a:prstGeom prst="rect">
+            <a:avLst/>
+          </a:prstGeom>
+          <a:noFill/>
+          <a:ln>
+            <a:noFill/>
+          </a:ln>
+        </p:spPr>
+      </p:pic>
+      <p:sp>
+        <p:nvSpPr>
+          <p:cNvPr id="8" name="Rectangle 7">
+            <a:extLst>
+              <a:ext uri="{FF2B5EF4-FFF2-40B4-BE49-F238E27FC236}">
+                <a16:creationId xmlns:a16="http://schemas.microsoft.com/office/drawing/2014/main" id="{0C366FE1-DAFA-E7EC-025F-E1D1E8686851}"/>
+              </a:ext>
+            </a:extLst>
+          </p:cNvPr>
+          <p:cNvSpPr/>
+          <p:nvPr/>
+        </p:nvSpPr>
+        <p:spPr>
+          <a:xfrm>
+            <a:off x="508000" y="4345259"/>
+            <a:ext cx="5852160" cy="206421"/>
+          </a:xfrm>
+          <a:prstGeom prst="rect">
+            <a:avLst/>
+          </a:prstGeom>
+          <a:noFill/>
+          <a:ln w="38100">
+            <a:solidFill>
+              <a:srgbClr val="FF0000"/>
+            </a:solidFill>
+          </a:ln>
+        </p:spPr>
+        <p:style>
+          <a:lnRef idx="2">
+            <a:schemeClr val="accent1">
+              <a:shade val="15000"/>
+            </a:schemeClr>
+          </a:lnRef>
+          <a:fillRef idx="1">
+            <a:schemeClr val="accent1"/>
+          </a:fillRef>
+          <a:effectRef idx="0">
+            <a:schemeClr val="accent1"/>
+          </a:effectRef>
+          <a:fontRef idx="minor">
+            <a:schemeClr val="lt1"/>
+          </a:fontRef>
+        </p:style>
+        <p:txBody>
+          <a:bodyPr rtlCol="0" anchor="ctr"/>
+          <a:lstStyle/>
+          <a:p>
+            <a:pPr algn="ctr"/>
+            <a:endParaRPr lang="en-US" sz="2400"/>
+          </a:p>
+        </p:txBody>
+      </p:sp>
+    </p:spTree>
+    <p:extLst>
+      <p:ext uri="{BB962C8B-B14F-4D97-AF65-F5344CB8AC3E}">
+        <p14:creationId xmlns:p14="http://schemas.microsoft.com/office/powerpoint/2010/main" val="1919185427"/>
+      </p:ext>
+    </p:extLst>
+  </p:cSld>
+  <p:clrMapOvr>
+    <a:masterClrMapping/>
+  </p:clrMapOvr>
+</p:sld>
+</file>
+
+<file path=ppt/slides/slide20.xml><?xml version="1.0" encoding="utf-8"?>
 <p:sld xmlns:a="http://schemas.openxmlformats.org/drawingml/2006/main" xmlns:r="http://schemas.openxmlformats.org/officeDocument/2006/relationships" xmlns:p="http://schemas.openxmlformats.org/presentationml/2006/main">
   <p:cSld>
     <p:spTree>
@@ -27943,7 +29357,7 @@
 </p:sld>
 </file>
 
-<file path=ppt/slides/slide18.xml><?xml version="1.0" encoding="utf-8"?>
+<file path=ppt/slides/slide21.xml><?xml version="1.0" encoding="utf-8"?>
 <p:sld xmlns:a="http://schemas.openxmlformats.org/drawingml/2006/main" xmlns:r="http://schemas.openxmlformats.org/officeDocument/2006/relationships" xmlns:p="http://schemas.openxmlformats.org/presentationml/2006/main">
   <p:cSld>
     <p:spTree>
@@ -28011,7 +29425,7 @@
           <a:p>
             <a:fld id="{AD622D1A-DF83-41A8-85FF-04D90BF831D3}" type="datetime3">
               <a:rPr lang="en-US" smtClean="0"/>
-              <a:t>23 June 2026</a:t>
+              <a:t>10 July 2026</a:t>
             </a:fld>
             <a:endParaRPr lang="en-US"/>
           </a:p>
@@ -28041,7 +29455,7 @@
             <a:fld id="{64E5BE4B-2FBF-4174-9E62-85FAD1CB43A6}" type="slidenum">
               <a:rPr lang="en-US" smtClean="0"/>
               <a:pPr/>
-              <a:t>18</a:t>
+              <a:t>21</a:t>
             </a:fld>
             <a:endParaRPr lang="en-US"/>
           </a:p>
@@ -28432,7 +29846,7 @@
 </p:sld>
 </file>
 
-<file path=ppt/slides/slide19.xml><?xml version="1.0" encoding="utf-8"?>
+<file path=ppt/slides/slide22.xml><?xml version="1.0" encoding="utf-8"?>
 <p:sld xmlns:a="http://schemas.openxmlformats.org/drawingml/2006/main" xmlns:r="http://schemas.openxmlformats.org/officeDocument/2006/relationships" xmlns:p="http://schemas.openxmlformats.org/presentationml/2006/main">
   <p:cSld>
     <p:spTree>
@@ -28533,7 +29947,7 @@
           <a:p>
             <a:fld id="{AD622D1A-DF83-41A8-85FF-04D90BF831D3}" type="datetime3">
               <a:rPr lang="en-US" smtClean="0"/>
-              <a:t>23 June 2026</a:t>
+              <a:t>10 July 2026</a:t>
             </a:fld>
             <a:endParaRPr lang="en-US"/>
           </a:p>
@@ -28563,7 +29977,7 @@
             <a:fld id="{64E5BE4B-2FBF-4174-9E62-85FAD1CB43A6}" type="slidenum">
               <a:rPr lang="en-US" smtClean="0"/>
               <a:pPr/>
-              <a:t>19</a:t>
+              <a:t>22</a:t>
             </a:fld>
             <a:endParaRPr lang="en-US"/>
           </a:p>
@@ -28582,111 +29996,7 @@
 </p:sld>
 </file>
 
-<file path=ppt/slides/slide2.xml><?xml version="1.0" encoding="utf-8"?>
-<p:sld xmlns:a="http://schemas.openxmlformats.org/drawingml/2006/main" xmlns:r="http://schemas.openxmlformats.org/officeDocument/2006/relationships" xmlns:p="http://schemas.openxmlformats.org/presentationml/2006/main">
-  <p:cSld>
-    <p:spTree>
-      <p:nvGrpSpPr>
-        <p:cNvPr id="1" name="">
-          <a:extLst>
-            <a:ext uri="{FF2B5EF4-FFF2-40B4-BE49-F238E27FC236}">
-              <a16:creationId xmlns:a16="http://schemas.microsoft.com/office/drawing/2014/main" id="{9FADB369-AE4D-CA21-B4DF-EE99F4ACBA20}"/>
-            </a:ext>
-          </a:extLst>
-        </p:cNvPr>
-        <p:cNvGrpSpPr/>
-        <p:nvPr/>
-      </p:nvGrpSpPr>
-      <p:grpSpPr>
-        <a:xfrm>
-          <a:off x="0" y="0"/>
-          <a:ext cx="0" cy="0"/>
-          <a:chOff x="0" y="0"/>
-          <a:chExt cx="0" cy="0"/>
-        </a:xfrm>
-      </p:grpSpPr>
-      <p:sp>
-        <p:nvSpPr>
-          <p:cNvPr id="2" name="Title 1">
-            <a:extLst>
-              <a:ext uri="{FF2B5EF4-FFF2-40B4-BE49-F238E27FC236}">
-                <a16:creationId xmlns:a16="http://schemas.microsoft.com/office/drawing/2014/main" id="{9D57334B-DBC0-D986-2C7B-E768BF7FF8D6}"/>
-              </a:ext>
-            </a:extLst>
-          </p:cNvPr>
-          <p:cNvSpPr>
-            <a:spLocks noGrp="1"/>
-          </p:cNvSpPr>
-          <p:nvPr>
-            <p:ph type="title"/>
-          </p:nvPr>
-        </p:nvSpPr>
-        <p:spPr/>
-        <p:txBody>
-          <a:bodyPr/>
-          <a:lstStyle/>
-          <a:p>
-            <a:r>
-              <a:rPr lang="en-US" dirty="0"/>
-              <a:t>Lesson Objectives</a:t>
-            </a:r>
-          </a:p>
-        </p:txBody>
-      </p:sp>
-      <p:sp>
-        <p:nvSpPr>
-          <p:cNvPr id="4" name="Content Placeholder 3">
-            <a:extLst>
-              <a:ext uri="{FF2B5EF4-FFF2-40B4-BE49-F238E27FC236}">
-                <a16:creationId xmlns:a16="http://schemas.microsoft.com/office/drawing/2014/main" id="{C5FCC889-09CB-91DA-8886-1B474E084665}"/>
-              </a:ext>
-            </a:extLst>
-          </p:cNvPr>
-          <p:cNvSpPr>
-            <a:spLocks noGrp="1"/>
-          </p:cNvSpPr>
-          <p:nvPr>
-            <p:ph idx="1"/>
-          </p:nvPr>
-        </p:nvSpPr>
-        <p:spPr/>
-        <p:txBody>
-          <a:bodyPr>
-            <a:normAutofit/>
-          </a:bodyPr>
-          <a:lstStyle/>
-          <a:p>
-            <a:r>
-              <a:rPr lang="en-US" dirty="0"/>
-              <a:t>Implement HTTP request handling</a:t>
-            </a:r>
-          </a:p>
-          <a:p>
-            <a:r>
-              <a:rPr lang="en-US"/>
-              <a:t>Understand </a:t>
-            </a:r>
-            <a:r>
-              <a:rPr lang="en-US" dirty="0"/>
-              <a:t>HTTP authentication schemes</a:t>
-            </a:r>
-          </a:p>
-        </p:txBody>
-      </p:sp>
-    </p:spTree>
-    <p:extLst>
-      <p:ext uri="{BB962C8B-B14F-4D97-AF65-F5344CB8AC3E}">
-        <p14:creationId xmlns:p14="http://schemas.microsoft.com/office/powerpoint/2010/main" val="889373920"/>
-      </p:ext>
-    </p:extLst>
-  </p:cSld>
-  <p:clrMapOvr>
-    <a:masterClrMapping/>
-  </p:clrMapOvr>
-</p:sld>
-</file>
-
-<file path=ppt/slides/slide20.xml><?xml version="1.0" encoding="utf-8"?>
+<file path=ppt/slides/slide23.xml><?xml version="1.0" encoding="utf-8"?>
 <p:sld xmlns:a="http://schemas.openxmlformats.org/drawingml/2006/main" xmlns:r="http://schemas.openxmlformats.org/officeDocument/2006/relationships" xmlns:p="http://schemas.openxmlformats.org/presentationml/2006/main">
   <p:cSld>
     <p:spTree>
@@ -28786,7 +30096,7 @@
           <a:p>
             <a:fld id="{AD622D1A-DF83-41A8-85FF-04D90BF831D3}" type="datetime3">
               <a:rPr lang="en-US" smtClean="0"/>
-              <a:t>23 June 2026</a:t>
+              <a:t>10 July 2026</a:t>
             </a:fld>
             <a:endParaRPr lang="en-US"/>
           </a:p>
@@ -28816,7 +30126,7 @@
             <a:fld id="{64E5BE4B-2FBF-4174-9E62-85FAD1CB43A6}" type="slidenum">
               <a:rPr lang="en-US" smtClean="0"/>
               <a:pPr/>
-              <a:t>20</a:t>
+              <a:t>23</a:t>
             </a:fld>
             <a:endParaRPr lang="en-US"/>
           </a:p>
@@ -28835,7 +30145,7 @@
 </p:sld>
 </file>
 
-<file path=ppt/slides/slide21.xml><?xml version="1.0" encoding="utf-8"?>
+<file path=ppt/slides/slide24.xml><?xml version="1.0" encoding="utf-8"?>
 <p:sld xmlns:a="http://schemas.openxmlformats.org/drawingml/2006/main" xmlns:r="http://schemas.openxmlformats.org/officeDocument/2006/relationships" xmlns:p="http://schemas.openxmlformats.org/presentationml/2006/main">
   <p:cSld>
     <p:spTree>
@@ -28903,7 +30213,7 @@
           <a:p>
             <a:fld id="{AD622D1A-DF83-41A8-85FF-04D90BF831D3}" type="datetime3">
               <a:rPr lang="en-US" smtClean="0"/>
-              <a:t>23 June 2026</a:t>
+              <a:t>10 July 2026</a:t>
             </a:fld>
             <a:endParaRPr lang="en-US"/>
           </a:p>
@@ -28933,7 +30243,7 @@
             <a:fld id="{64E5BE4B-2FBF-4174-9E62-85FAD1CB43A6}" type="slidenum">
               <a:rPr lang="en-US" smtClean="0"/>
               <a:pPr/>
-              <a:t>21</a:t>
+              <a:t>24</a:t>
             </a:fld>
             <a:endParaRPr lang="en-US"/>
           </a:p>
@@ -28984,7 +30294,7 @@
 </p:sld>
 </file>
 
-<file path=ppt/slides/slide22.xml><?xml version="1.0" encoding="utf-8"?>
+<file path=ppt/slides/slide25.xml><?xml version="1.0" encoding="utf-8"?>
 <p:sld xmlns:a="http://schemas.openxmlformats.org/drawingml/2006/main" xmlns:r="http://schemas.openxmlformats.org/officeDocument/2006/relationships" xmlns:p="http://schemas.openxmlformats.org/presentationml/2006/main">
   <p:cSld>
     <p:spTree>
@@ -29104,7 +30414,7 @@
           <a:p>
             <a:fld id="{AD622D1A-DF83-41A8-85FF-04D90BF831D3}" type="datetime3">
               <a:rPr lang="en-US" smtClean="0"/>
-              <a:t>23 June 2026</a:t>
+              <a:t>10 July 2026</a:t>
             </a:fld>
             <a:endParaRPr lang="en-US"/>
           </a:p>
@@ -29134,7 +30444,7 @@
             <a:fld id="{64E5BE4B-2FBF-4174-9E62-85FAD1CB43A6}" type="slidenum">
               <a:rPr lang="en-US" smtClean="0"/>
               <a:pPr/>
-              <a:t>22</a:t>
+              <a:t>25</a:t>
             </a:fld>
             <a:endParaRPr lang="en-US"/>
           </a:p>
@@ -29183,7 +30493,7 @@
 </p:sld>
 </file>
 
-<file path=ppt/slides/slide23.xml><?xml version="1.0" encoding="utf-8"?>
+<file path=ppt/slides/slide26.xml><?xml version="1.0" encoding="utf-8"?>
 <p:sld xmlns:a="http://schemas.openxmlformats.org/drawingml/2006/main" xmlns:r="http://schemas.openxmlformats.org/officeDocument/2006/relationships" xmlns:p="http://schemas.openxmlformats.org/presentationml/2006/main">
   <p:cSld>
     <p:spTree>
@@ -29282,7 +30592,7 @@
           <a:p>
             <a:fld id="{AD622D1A-DF83-41A8-85FF-04D90BF831D3}" type="datetime3">
               <a:rPr lang="en-US" smtClean="0"/>
-              <a:t>23 June 2026</a:t>
+              <a:t>10 July 2026</a:t>
             </a:fld>
             <a:endParaRPr lang="en-US"/>
           </a:p>
@@ -29312,7 +30622,7 @@
             <a:fld id="{64E5BE4B-2FBF-4174-9E62-85FAD1CB43A6}" type="slidenum">
               <a:rPr lang="en-US" smtClean="0"/>
               <a:pPr/>
-              <a:t>23</a:t>
+              <a:t>26</a:t>
             </a:fld>
             <a:endParaRPr lang="en-US"/>
           </a:p>
@@ -29331,7 +30641,7 @@
 </p:sld>
 </file>
 
-<file path=ppt/slides/slide24.xml><?xml version="1.0" encoding="utf-8"?>
+<file path=ppt/slides/slide27.xml><?xml version="1.0" encoding="utf-8"?>
 <p:sld xmlns:a="http://schemas.openxmlformats.org/drawingml/2006/main" xmlns:r="http://schemas.openxmlformats.org/officeDocument/2006/relationships" xmlns:p="http://schemas.openxmlformats.org/presentationml/2006/main">
   <p:cSld>
     <p:spTree>
@@ -29424,7 +30734,13 @@
   <p:cSld>
     <p:spTree>
       <p:nvGrpSpPr>
-        <p:cNvPr id="1" name=""/>
+        <p:cNvPr id="1" name="">
+          <a:extLst>
+            <a:ext uri="{FF2B5EF4-FFF2-40B4-BE49-F238E27FC236}">
+              <a16:creationId xmlns:a16="http://schemas.microsoft.com/office/drawing/2014/main" id="{9FADB369-AE4D-CA21-B4DF-EE99F4ACBA20}"/>
+            </a:ext>
+          </a:extLst>
+        </p:cNvPr>
         <p:cNvGrpSpPr/>
         <p:nvPr/>
       </p:nvGrpSpPr>
@@ -29441,7 +30757,7 @@
           <p:cNvPr id="2" name="Title 1">
             <a:extLst>
               <a:ext uri="{FF2B5EF4-FFF2-40B4-BE49-F238E27FC236}">
-                <a16:creationId xmlns:a16="http://schemas.microsoft.com/office/drawing/2014/main" id="{FCCE610B-6F88-D983-B674-135072AE0D00}"/>
+                <a16:creationId xmlns:a16="http://schemas.microsoft.com/office/drawing/2014/main" id="{9D57334B-DBC0-D986-2C7B-E768BF7FF8D6}"/>
               </a:ext>
             </a:extLst>
           </p:cNvPr>
@@ -29458,12 +30774,8 @@
           <a:lstStyle/>
           <a:p>
             <a:r>
-              <a:rPr lang="en-US" dirty="0" err="1"/>
-              <a:t>HyperText</a:t>
-            </a:r>
-            <a:r>
               <a:rPr lang="en-US" dirty="0"/>
-              <a:t> Transfer Protocol</a:t>
+              <a:t>Lesson Objectives</a:t>
             </a:r>
           </a:p>
         </p:txBody>
@@ -29473,7 +30785,7 @@
           <p:cNvPr id="4" name="Content Placeholder 3">
             <a:extLst>
               <a:ext uri="{FF2B5EF4-FFF2-40B4-BE49-F238E27FC236}">
-                <a16:creationId xmlns:a16="http://schemas.microsoft.com/office/drawing/2014/main" id="{86702865-14F7-75BA-971C-7F030292EED0}"/>
+                <a16:creationId xmlns:a16="http://schemas.microsoft.com/office/drawing/2014/main" id="{C5FCC889-09CB-91DA-8886-1B474E084665}"/>
               </a:ext>
             </a:extLst>
           </p:cNvPr>
@@ -29493,39 +30805,30 @@
           <a:p>
             <a:r>
               <a:rPr lang="en-US" dirty="0"/>
-              <a:t>Specified in RFC 1945 (May 1996!)</a:t>
+              <a:t>Implement HTTP request handling</a:t>
             </a:r>
           </a:p>
           <a:p>
             <a:r>
               <a:rPr lang="en-US" dirty="0"/>
-              <a:t>Consists of clients, servers, requests, and responses</a:t>
+              <a:t>Understand and implement API calls</a:t>
             </a:r>
           </a:p>
           <a:p>
             <a:r>
               <a:rPr lang="en-US" dirty="0"/>
-              <a:t>"The language of the web"</a:t>
+              <a:t>Understand HTTP authentication schemes</a:t>
             </a:r>
           </a:p>
           <a:p>
             <a:endParaRPr lang="en-US" dirty="0"/>
-          </a:p>
-          <a:p>
-            <a:endParaRPr lang="en-US" dirty="0"/>
-          </a:p>
-          <a:p>
-            <a:r>
-              <a:rPr lang="en-US" dirty="0"/>
-              <a:t>Improvements and modifications over time</a:t>
-            </a:r>
           </a:p>
         </p:txBody>
       </p:sp>
     </p:spTree>
     <p:extLst>
       <p:ext uri="{BB962C8B-B14F-4D97-AF65-F5344CB8AC3E}">
-        <p14:creationId xmlns:p14="http://schemas.microsoft.com/office/powerpoint/2010/main" val="3708550872"/>
+        <p14:creationId xmlns:p14="http://schemas.microsoft.com/office/powerpoint/2010/main" val="889373920"/>
       </p:ext>
     </p:extLst>
   </p:cSld>
@@ -29557,6 +30860,123 @@
           <p:cNvPr id="2" name="Title 1">
             <a:extLst>
               <a:ext uri="{FF2B5EF4-FFF2-40B4-BE49-F238E27FC236}">
+                <a16:creationId xmlns:a16="http://schemas.microsoft.com/office/drawing/2014/main" id="{FCCE610B-6F88-D983-B674-135072AE0D00}"/>
+              </a:ext>
+            </a:extLst>
+          </p:cNvPr>
+          <p:cNvSpPr>
+            <a:spLocks noGrp="1"/>
+          </p:cNvSpPr>
+          <p:nvPr>
+            <p:ph type="title"/>
+          </p:nvPr>
+        </p:nvSpPr>
+        <p:spPr/>
+        <p:txBody>
+          <a:bodyPr/>
+          <a:lstStyle/>
+          <a:p>
+            <a:r>
+              <a:rPr lang="en-US" dirty="0" err="1"/>
+              <a:t>HyperText</a:t>
+            </a:r>
+            <a:r>
+              <a:rPr lang="en-US" dirty="0"/>
+              <a:t> Transfer Protocol</a:t>
+            </a:r>
+            <a:br>
+              <a:rPr lang="en-US" dirty="0"/>
+            </a:br>
+            <a:r>
+              <a:rPr lang="en-US" dirty="0"/>
+              <a:t>(HTTP)</a:t>
+            </a:r>
+          </a:p>
+        </p:txBody>
+      </p:sp>
+      <p:sp>
+        <p:nvSpPr>
+          <p:cNvPr id="4" name="Content Placeholder 3">
+            <a:extLst>
+              <a:ext uri="{FF2B5EF4-FFF2-40B4-BE49-F238E27FC236}">
+                <a16:creationId xmlns:a16="http://schemas.microsoft.com/office/drawing/2014/main" id="{86702865-14F7-75BA-971C-7F030292EED0}"/>
+              </a:ext>
+            </a:extLst>
+          </p:cNvPr>
+          <p:cNvSpPr>
+            <a:spLocks noGrp="1"/>
+          </p:cNvSpPr>
+          <p:nvPr>
+            <p:ph idx="1"/>
+          </p:nvPr>
+        </p:nvSpPr>
+        <p:spPr/>
+        <p:txBody>
+          <a:bodyPr>
+            <a:normAutofit/>
+          </a:bodyPr>
+          <a:lstStyle/>
+          <a:p>
+            <a:r>
+              <a:rPr lang="en-US" dirty="0"/>
+              <a:t>Specified in RFC 1945 (May 1996!)</a:t>
+            </a:r>
+          </a:p>
+          <a:p>
+            <a:r>
+              <a:rPr lang="en-US" dirty="0"/>
+              <a:t>Consists of clients, servers, requests, and responses</a:t>
+            </a:r>
+          </a:p>
+          <a:p>
+            <a:r>
+              <a:rPr lang="en-US" dirty="0"/>
+              <a:t>"The language of the web"</a:t>
+            </a:r>
+          </a:p>
+          <a:p>
+            <a:r>
+              <a:rPr lang="en-US" dirty="0"/>
+              <a:t>Improvements and modifications over time</a:t>
+            </a:r>
+          </a:p>
+        </p:txBody>
+      </p:sp>
+    </p:spTree>
+    <p:extLst>
+      <p:ext uri="{BB962C8B-B14F-4D97-AF65-F5344CB8AC3E}">
+        <p14:creationId xmlns:p14="http://schemas.microsoft.com/office/powerpoint/2010/main" val="3708550872"/>
+      </p:ext>
+    </p:extLst>
+  </p:cSld>
+  <p:clrMapOvr>
+    <a:masterClrMapping/>
+  </p:clrMapOvr>
+</p:sld>
+</file>
+
+<file path=ppt/slides/slide5.xml><?xml version="1.0" encoding="utf-8"?>
+<p:sld xmlns:a="http://schemas.openxmlformats.org/drawingml/2006/main" xmlns:r="http://schemas.openxmlformats.org/officeDocument/2006/relationships" xmlns:p="http://schemas.openxmlformats.org/presentationml/2006/main">
+  <p:cSld>
+    <p:spTree>
+      <p:nvGrpSpPr>
+        <p:cNvPr id="1" name=""/>
+        <p:cNvGrpSpPr/>
+        <p:nvPr/>
+      </p:nvGrpSpPr>
+      <p:grpSpPr>
+        <a:xfrm>
+          <a:off x="0" y="0"/>
+          <a:ext cx="0" cy="0"/>
+          <a:chOff x="0" y="0"/>
+          <a:chExt cx="0" cy="0"/>
+        </a:xfrm>
+      </p:grpSpPr>
+      <p:sp>
+        <p:nvSpPr>
+          <p:cNvPr id="2" name="Title 1">
+            <a:extLst>
+              <a:ext uri="{FF2B5EF4-FFF2-40B4-BE49-F238E27FC236}">
                 <a16:creationId xmlns:a16="http://schemas.microsoft.com/office/drawing/2014/main" id="{A93DFBA4-0899-E93F-4542-EB3DD0EC6E77}"/>
               </a:ext>
             </a:extLst>
@@ -29732,7 +31152,7 @@
             <a:fld id="{BE432D27-6A75-4E94-935C-DB475393A8B5}" type="slidenum">
               <a:rPr lang="en-US" smtClean="0"/>
               <a:pPr/>
-              <a:t>4</a:t>
+              <a:t>5</a:t>
             </a:fld>
             <a:endParaRPr lang="en-US"/>
           </a:p>
@@ -29751,7 +31171,7 @@
 </p:sld>
 </file>
 
-<file path=ppt/slides/slide5.xml><?xml version="1.0" encoding="utf-8"?>
+<file path=ppt/slides/slide6.xml><?xml version="1.0" encoding="utf-8"?>
 <p:sld xmlns:a="http://schemas.openxmlformats.org/drawingml/2006/main" xmlns:r="http://schemas.openxmlformats.org/officeDocument/2006/relationships" xmlns:p="http://schemas.openxmlformats.org/presentationml/2006/main">
   <p:cSld>
     <p:spTree>
@@ -30663,408 +32083,6 @@
 </p:sld>
 </file>
 
-<file path=ppt/slides/slide6.xml><?xml version="1.0" encoding="utf-8"?>
-<p:sld xmlns:a="http://schemas.openxmlformats.org/drawingml/2006/main" xmlns:r="http://schemas.openxmlformats.org/officeDocument/2006/relationships" xmlns:p="http://schemas.openxmlformats.org/presentationml/2006/main">
-  <p:cSld>
-    <p:spTree>
-      <p:nvGrpSpPr>
-        <p:cNvPr id="1" name=""/>
-        <p:cNvGrpSpPr/>
-        <p:nvPr/>
-      </p:nvGrpSpPr>
-      <p:grpSpPr>
-        <a:xfrm>
-          <a:off x="0" y="0"/>
-          <a:ext cx="0" cy="0"/>
-          <a:chOff x="0" y="0"/>
-          <a:chExt cx="0" cy="0"/>
-        </a:xfrm>
-      </p:grpSpPr>
-      <p:sp>
-        <p:nvSpPr>
-          <p:cNvPr id="2" name="Title 1">
-            <a:extLst>
-              <a:ext uri="{FF2B5EF4-FFF2-40B4-BE49-F238E27FC236}">
-                <a16:creationId xmlns:a16="http://schemas.microsoft.com/office/drawing/2014/main" id="{446CACA3-FE80-8946-CC46-CB715FEB115C}"/>
-              </a:ext>
-            </a:extLst>
-          </p:cNvPr>
-          <p:cNvSpPr>
-            <a:spLocks noGrp="1"/>
-          </p:cNvSpPr>
-          <p:nvPr>
-            <p:ph type="title"/>
-          </p:nvPr>
-        </p:nvSpPr>
-        <p:spPr>
-          <a:xfrm>
-            <a:off x="839788" y="365125"/>
-            <a:ext cx="10515600" cy="1325563"/>
-          </a:xfrm>
-        </p:spPr>
-        <p:txBody>
-          <a:bodyPr/>
-          <a:lstStyle/>
-          <a:p>
-            <a:r>
-              <a:rPr lang="en-US" dirty="0"/>
-              <a:t>Methods and Codes</a:t>
-            </a:r>
-          </a:p>
-        </p:txBody>
-      </p:sp>
-      <p:sp>
-        <p:nvSpPr>
-          <p:cNvPr id="3" name="Text Placeholder 2">
-            <a:extLst>
-              <a:ext uri="{FF2B5EF4-FFF2-40B4-BE49-F238E27FC236}">
-                <a16:creationId xmlns:a16="http://schemas.microsoft.com/office/drawing/2014/main" id="{0141AB30-5A23-E470-BA58-A56B1EDB6387}"/>
-              </a:ext>
-            </a:extLst>
-          </p:cNvPr>
-          <p:cNvSpPr>
-            <a:spLocks noGrp="1"/>
-          </p:cNvSpPr>
-          <p:nvPr>
-            <p:ph type="body" idx="1"/>
-          </p:nvPr>
-        </p:nvSpPr>
-        <p:spPr>
-          <a:xfrm>
-            <a:off x="839787" y="449468"/>
-            <a:ext cx="5157787" cy="823912"/>
-          </a:xfrm>
-        </p:spPr>
-        <p:txBody>
-          <a:bodyPr/>
-          <a:lstStyle/>
-          <a:p>
-            <a:r>
-              <a:rPr lang="en-US" dirty="0"/>
-              <a:t>Request Methods</a:t>
-            </a:r>
-          </a:p>
-        </p:txBody>
-      </p:sp>
-      <p:sp>
-        <p:nvSpPr>
-          <p:cNvPr id="4" name="Content Placeholder 3">
-            <a:extLst>
-              <a:ext uri="{FF2B5EF4-FFF2-40B4-BE49-F238E27FC236}">
-                <a16:creationId xmlns:a16="http://schemas.microsoft.com/office/drawing/2014/main" id="{AD089FC8-7D5F-E8E5-C510-EF80D54B5BA4}"/>
-              </a:ext>
-            </a:extLst>
-          </p:cNvPr>
-          <p:cNvSpPr>
-            <a:spLocks noGrp="1"/>
-          </p:cNvSpPr>
-          <p:nvPr>
-            <p:ph sz="half" idx="2"/>
-          </p:nvPr>
-        </p:nvSpPr>
-        <p:spPr>
-          <a:xfrm>
-            <a:off x="836612" y="1364354"/>
-            <a:ext cx="5157787" cy="3684588"/>
-          </a:xfrm>
-        </p:spPr>
-        <p:txBody>
-          <a:bodyPr>
-            <a:normAutofit/>
-          </a:bodyPr>
-          <a:lstStyle/>
-          <a:p>
-            <a:pPr marL="0" indent="0">
-              <a:buNone/>
-            </a:pPr>
-            <a:r>
-              <a:rPr lang="en-US" sz="2000" dirty="0"/>
-              <a:t> Method  = "GET”;</a:t>
-            </a:r>
-          </a:p>
-          <a:p>
-            <a:pPr marL="0" indent="0">
-              <a:buNone/>
-            </a:pPr>
-            <a:r>
-              <a:rPr lang="en-US" sz="2000" dirty="0"/>
-              <a:t>                | "HEAD";</a:t>
-            </a:r>
-          </a:p>
-          <a:p>
-            <a:pPr marL="0" indent="0">
-              <a:buNone/>
-            </a:pPr>
-            <a:r>
-              <a:rPr lang="en-US" sz="2000" dirty="0"/>
-              <a:t>                | "POST"; </a:t>
-            </a:r>
-          </a:p>
-          <a:p>
-            <a:pPr marL="0" indent="0">
-              <a:buNone/>
-            </a:pPr>
-            <a:r>
-              <a:rPr lang="en-US" sz="2000" dirty="0"/>
-              <a:t>                | extension-method</a:t>
-            </a:r>
-          </a:p>
-        </p:txBody>
-      </p:sp>
-      <p:sp>
-        <p:nvSpPr>
-          <p:cNvPr id="5" name="Text Placeholder 4">
-            <a:extLst>
-              <a:ext uri="{FF2B5EF4-FFF2-40B4-BE49-F238E27FC236}">
-                <a16:creationId xmlns:a16="http://schemas.microsoft.com/office/drawing/2014/main" id="{D46D43BE-7077-09FB-350A-CAED42AE5D9E}"/>
-              </a:ext>
-            </a:extLst>
-          </p:cNvPr>
-          <p:cNvSpPr>
-            <a:spLocks noGrp="1"/>
-          </p:cNvSpPr>
-          <p:nvPr>
-            <p:ph type="body" sz="quarter" idx="3"/>
-          </p:nvPr>
-        </p:nvSpPr>
-        <p:spPr>
-          <a:xfrm>
-            <a:off x="6169024" y="456817"/>
-            <a:ext cx="5183188" cy="823912"/>
-          </a:xfrm>
-        </p:spPr>
-        <p:txBody>
-          <a:bodyPr/>
-          <a:lstStyle/>
-          <a:p>
-            <a:r>
-              <a:rPr lang="en-US" dirty="0"/>
-              <a:t>Response Status Code</a:t>
-            </a:r>
-          </a:p>
-        </p:txBody>
-      </p:sp>
-      <p:sp>
-        <p:nvSpPr>
-          <p:cNvPr id="6" name="Content Placeholder 5">
-            <a:extLst>
-              <a:ext uri="{FF2B5EF4-FFF2-40B4-BE49-F238E27FC236}">
-                <a16:creationId xmlns:a16="http://schemas.microsoft.com/office/drawing/2014/main" id="{3146DB02-E8A2-2CCF-D3F0-29E5A2395ACE}"/>
-              </a:ext>
-            </a:extLst>
-          </p:cNvPr>
-          <p:cNvSpPr>
-            <a:spLocks noGrp="1"/>
-          </p:cNvSpPr>
-          <p:nvPr>
-            <p:ph sz="quarter" idx="4"/>
-          </p:nvPr>
-        </p:nvSpPr>
-        <p:spPr>
-          <a:xfrm>
-            <a:off x="6169024" y="1359570"/>
-            <a:ext cx="6198822" cy="5367802"/>
-          </a:xfrm>
-        </p:spPr>
-        <p:txBody>
-          <a:bodyPr>
-            <a:normAutofit/>
-          </a:bodyPr>
-          <a:lstStyle/>
-          <a:p>
-            <a:pPr marL="0" indent="0">
-              <a:buNone/>
-            </a:pPr>
-            <a:r>
-              <a:rPr lang="en-US" sz="1400" dirty="0"/>
-              <a:t> Status-Code= "200"   ; OK</a:t>
-            </a:r>
-          </a:p>
-          <a:p>
-            <a:pPr marL="0" indent="0">
-              <a:buNone/>
-            </a:pPr>
-            <a:r>
-              <a:rPr lang="en-US" sz="1400" dirty="0"/>
-              <a:t>                      | "201"   ; Created</a:t>
-            </a:r>
-          </a:p>
-          <a:p>
-            <a:pPr marL="0" indent="0">
-              <a:buNone/>
-            </a:pPr>
-            <a:r>
-              <a:rPr lang="en-US" sz="1400" dirty="0"/>
-              <a:t>                      | "202"   ; Accepted</a:t>
-            </a:r>
-          </a:p>
-          <a:p>
-            <a:pPr marL="0" indent="0">
-              <a:buNone/>
-            </a:pPr>
-            <a:r>
-              <a:rPr lang="en-US" sz="1400" dirty="0"/>
-              <a:t>                      | "204"   ; No Content</a:t>
-            </a:r>
-          </a:p>
-          <a:p>
-            <a:pPr marL="0" indent="0">
-              <a:buNone/>
-            </a:pPr>
-            <a:r>
-              <a:rPr lang="en-US" sz="1400" dirty="0"/>
-              <a:t>                      | "301"   ; Moved Permanently</a:t>
-            </a:r>
-          </a:p>
-          <a:p>
-            <a:pPr marL="0" indent="0">
-              <a:buNone/>
-            </a:pPr>
-            <a:r>
-              <a:rPr lang="en-US" sz="1400" dirty="0"/>
-              <a:t>                      | "302"   ; Moved Temporarily</a:t>
-            </a:r>
-          </a:p>
-          <a:p>
-            <a:pPr marL="0" indent="0">
-              <a:buNone/>
-            </a:pPr>
-            <a:r>
-              <a:rPr lang="en-US" sz="1400" dirty="0"/>
-              <a:t>                      | "304"   ; Not Modified</a:t>
-            </a:r>
-          </a:p>
-          <a:p>
-            <a:pPr marL="0" indent="0">
-              <a:buNone/>
-            </a:pPr>
-            <a:r>
-              <a:rPr lang="en-US" sz="1400" dirty="0"/>
-              <a:t>                      | "400"   ; Bad Request</a:t>
-            </a:r>
-          </a:p>
-          <a:p>
-            <a:pPr marL="0" indent="0">
-              <a:buNone/>
-            </a:pPr>
-            <a:r>
-              <a:rPr lang="en-US" sz="1400" dirty="0"/>
-              <a:t>                      | "401"   ; Unauthorized</a:t>
-            </a:r>
-          </a:p>
-          <a:p>
-            <a:pPr marL="0" indent="0">
-              <a:buNone/>
-            </a:pPr>
-            <a:r>
-              <a:rPr lang="en-US" sz="1400" dirty="0"/>
-              <a:t>                      | "403"   ; Forbidden</a:t>
-            </a:r>
-          </a:p>
-          <a:p>
-            <a:pPr marL="0" indent="0">
-              <a:buNone/>
-            </a:pPr>
-            <a:r>
-              <a:rPr lang="en-US" sz="1400" dirty="0"/>
-              <a:t>                      | "404"   ; Not Found</a:t>
-            </a:r>
-          </a:p>
-          <a:p>
-            <a:pPr marL="0" indent="0">
-              <a:buNone/>
-            </a:pPr>
-            <a:r>
-              <a:rPr lang="en-US" sz="1400" dirty="0"/>
-              <a:t>                      | "500"   ; Internal Server Error</a:t>
-            </a:r>
-          </a:p>
-          <a:p>
-            <a:pPr marL="0" indent="0">
-              <a:buNone/>
-            </a:pPr>
-            <a:r>
-              <a:rPr lang="en-US" sz="1400" dirty="0"/>
-              <a:t>                      | "501"   ; Not Implemented</a:t>
-            </a:r>
-          </a:p>
-          <a:p>
-            <a:pPr marL="0" indent="0">
-              <a:buNone/>
-            </a:pPr>
-            <a:r>
-              <a:rPr lang="en-US" sz="1400" dirty="0"/>
-              <a:t>                      | "502"   ; Bad Gateway</a:t>
-            </a:r>
-          </a:p>
-          <a:p>
-            <a:pPr marL="0" indent="0">
-              <a:buNone/>
-            </a:pPr>
-            <a:r>
-              <a:rPr lang="en-US" sz="1400" dirty="0"/>
-              <a:t>                      | "503"   ; Service Unavailable</a:t>
-            </a:r>
-          </a:p>
-          <a:p>
-            <a:pPr marL="0" indent="0">
-              <a:buNone/>
-            </a:pPr>
-            <a:r>
-              <a:rPr lang="en-US" sz="1400" dirty="0"/>
-              <a:t>                      | extension-code</a:t>
-            </a:r>
-          </a:p>
-        </p:txBody>
-      </p:sp>
-      <p:sp>
-        <p:nvSpPr>
-          <p:cNvPr id="8" name="TextBox 7">
-            <a:extLst>
-              <a:ext uri="{FF2B5EF4-FFF2-40B4-BE49-F238E27FC236}">
-                <a16:creationId xmlns:a16="http://schemas.microsoft.com/office/drawing/2014/main" id="{FE9412AF-9C6E-C04B-8587-D9201265E2A3}"/>
-              </a:ext>
-            </a:extLst>
-          </p:cNvPr>
-          <p:cNvSpPr txBox="1"/>
-          <p:nvPr/>
-        </p:nvSpPr>
-        <p:spPr>
-          <a:xfrm>
-            <a:off x="473868" y="6358040"/>
-            <a:ext cx="11047412" cy="369332"/>
-          </a:xfrm>
-          <a:prstGeom prst="rect">
-            <a:avLst/>
-          </a:prstGeom>
-          <a:noFill/>
-        </p:spPr>
-        <p:txBody>
-          <a:bodyPr wrap="square" rtlCol="0">
-            <a:spAutoFit/>
-          </a:bodyPr>
-          <a:lstStyle/>
-          <a:p>
-            <a:r>
-              <a:rPr lang="en-US" dirty="0"/>
-              <a:t>https://developer.mozilla.org/en-US/docs/Web/HTTP/Reference/Status</a:t>
-            </a:r>
-          </a:p>
-        </p:txBody>
-      </p:sp>
-    </p:spTree>
-    <p:extLst>
-      <p:ext uri="{BB962C8B-B14F-4D97-AF65-F5344CB8AC3E}">
-        <p14:creationId xmlns:p14="http://schemas.microsoft.com/office/powerpoint/2010/main" val="1543073849"/>
-      </p:ext>
-    </p:extLst>
-  </p:cSld>
-  <p:clrMapOvr>
-    <a:masterClrMapping/>
-  </p:clrMapOvr>
-</p:sld>
-</file>
-
 <file path=ppt/slides/slide7.xml><?xml version="1.0" encoding="utf-8"?>
 <p:sld xmlns:a="http://schemas.openxmlformats.org/drawingml/2006/main" xmlns:r="http://schemas.openxmlformats.org/officeDocument/2006/relationships" xmlns:p="http://schemas.openxmlformats.org/presentationml/2006/main">
   <p:cSld>
@@ -31087,7 +32105,7 @@
           <p:cNvPr id="2" name="Title 1">
             <a:extLst>
               <a:ext uri="{FF2B5EF4-FFF2-40B4-BE49-F238E27FC236}">
-                <a16:creationId xmlns:a16="http://schemas.microsoft.com/office/drawing/2014/main" id="{45E46C3C-2508-617F-DFFD-69D8C1A562D3}"/>
+                <a16:creationId xmlns:a16="http://schemas.microsoft.com/office/drawing/2014/main" id="{446CACA3-FE80-8946-CC46-CB715FEB115C}"/>
               </a:ext>
             </a:extLst>
           </p:cNvPr>
@@ -31100,8 +32118,8 @@
         </p:nvSpPr>
         <p:spPr>
           <a:xfrm>
-            <a:off x="548640" y="411481"/>
-            <a:ext cx="8231293" cy="914400"/>
+            <a:off x="839788" y="365125"/>
+            <a:ext cx="10515600" cy="1325563"/>
           </a:xfrm>
         </p:spPr>
         <p:txBody>
@@ -31110,31 +32128,64 @@
           <a:p>
             <a:r>
               <a:rPr lang="en-US" dirty="0"/>
-              <a:t>HTTP Tools</a:t>
-            </a:r>
-          </a:p>
-        </p:txBody>
-      </p:sp>
-      <p:sp>
-        <p:nvSpPr>
-          <p:cNvPr id="3" name="Content Placeholder 2">
-            <a:extLst>
-              <a:ext uri="{FF2B5EF4-FFF2-40B4-BE49-F238E27FC236}">
-                <a16:creationId xmlns:a16="http://schemas.microsoft.com/office/drawing/2014/main" id="{ABEE76AF-6801-3ED8-C63E-EF4D8270B203}"/>
-              </a:ext>
-            </a:extLst>
-          </p:cNvPr>
-          <p:cNvSpPr>
-            <a:spLocks noGrp="1"/>
-          </p:cNvSpPr>
-          <p:nvPr>
-            <p:ph idx="1"/>
+              <a:t>Methods and Codes</a:t>
+            </a:r>
+          </a:p>
+        </p:txBody>
+      </p:sp>
+      <p:sp>
+        <p:nvSpPr>
+          <p:cNvPr id="3" name="Text Placeholder 2">
+            <a:extLst>
+              <a:ext uri="{FF2B5EF4-FFF2-40B4-BE49-F238E27FC236}">
+                <a16:creationId xmlns:a16="http://schemas.microsoft.com/office/drawing/2014/main" id="{0141AB30-5A23-E470-BA58-A56B1EDB6387}"/>
+              </a:ext>
+            </a:extLst>
+          </p:cNvPr>
+          <p:cNvSpPr>
+            <a:spLocks noGrp="1"/>
+          </p:cNvSpPr>
+          <p:nvPr>
+            <p:ph type="body" idx="1"/>
           </p:nvPr>
         </p:nvSpPr>
         <p:spPr>
           <a:xfrm>
-            <a:off x="548640" y="1600199"/>
-            <a:ext cx="11024925" cy="4572000"/>
+            <a:off x="839787" y="449468"/>
+            <a:ext cx="5157787" cy="823912"/>
+          </a:xfrm>
+        </p:spPr>
+        <p:txBody>
+          <a:bodyPr/>
+          <a:lstStyle/>
+          <a:p>
+            <a:r>
+              <a:rPr lang="en-US" dirty="0"/>
+              <a:t>Core Request Methods</a:t>
+            </a:r>
+          </a:p>
+        </p:txBody>
+      </p:sp>
+      <p:sp>
+        <p:nvSpPr>
+          <p:cNvPr id="4" name="Content Placeholder 3">
+            <a:extLst>
+              <a:ext uri="{FF2B5EF4-FFF2-40B4-BE49-F238E27FC236}">
+                <a16:creationId xmlns:a16="http://schemas.microsoft.com/office/drawing/2014/main" id="{AD089FC8-7D5F-E8E5-C510-EF80D54B5BA4}"/>
+              </a:ext>
+            </a:extLst>
+          </p:cNvPr>
+          <p:cNvSpPr>
+            <a:spLocks noGrp="1"/>
+          </p:cNvSpPr>
+          <p:nvPr>
+            <p:ph sz="half" idx="2"/>
+          </p:nvPr>
+        </p:nvSpPr>
+        <p:spPr>
+          <a:xfrm>
+            <a:off x="836613" y="1364354"/>
+            <a:ext cx="4924108" cy="1929463"/>
           </a:xfrm>
         </p:spPr>
         <p:txBody>
@@ -31144,54 +32195,889 @@
           <a:lstStyle/>
           <a:p>
             <a:r>
+              <a:rPr lang="en-US" sz="2000" dirty="0"/>
+              <a:t>GET – request data from server</a:t>
+            </a:r>
+          </a:p>
+          <a:p>
+            <a:r>
+              <a:rPr lang="en-US" sz="2000" dirty="0"/>
+              <a:t>POST – submit data to the server</a:t>
+            </a:r>
+          </a:p>
+          <a:p>
+            <a:r>
+              <a:rPr lang="en-US" sz="2000" dirty="0"/>
+              <a:t>PUT – replace data in the server</a:t>
+            </a:r>
+          </a:p>
+          <a:p>
+            <a:r>
+              <a:rPr lang="en-US" sz="2000" dirty="0"/>
+              <a:t>DELETE – remove specified resource from the server</a:t>
+            </a:r>
+          </a:p>
+        </p:txBody>
+      </p:sp>
+      <p:sp>
+        <p:nvSpPr>
+          <p:cNvPr id="5" name="Text Placeholder 4">
+            <a:extLst>
+              <a:ext uri="{FF2B5EF4-FFF2-40B4-BE49-F238E27FC236}">
+                <a16:creationId xmlns:a16="http://schemas.microsoft.com/office/drawing/2014/main" id="{D46D43BE-7077-09FB-350A-CAED42AE5D9E}"/>
+              </a:ext>
+            </a:extLst>
+          </p:cNvPr>
+          <p:cNvSpPr>
+            <a:spLocks noGrp="1"/>
+          </p:cNvSpPr>
+          <p:nvPr>
+            <p:ph type="body" sz="quarter" idx="3"/>
+          </p:nvPr>
+        </p:nvSpPr>
+        <p:spPr>
+          <a:xfrm>
+            <a:off x="6169024" y="456817"/>
+            <a:ext cx="5183188" cy="823912"/>
+          </a:xfrm>
+        </p:spPr>
+        <p:txBody>
+          <a:bodyPr/>
+          <a:lstStyle/>
+          <a:p>
+            <a:r>
               <a:rPr lang="en-US" dirty="0"/>
-              <a:t>telnet</a:t>
-            </a:r>
-          </a:p>
-          <a:p>
-            <a:r>
-              <a:rPr lang="en-US" dirty="0" err="1"/>
-              <a:t>wget</a:t>
-            </a:r>
-            <a:endParaRPr lang="en-US" dirty="0"/>
-          </a:p>
+              <a:t>Response Status Code</a:t>
+            </a:r>
+          </a:p>
+        </p:txBody>
+      </p:sp>
+      <p:sp>
+        <p:nvSpPr>
+          <p:cNvPr id="6" name="Content Placeholder 5">
+            <a:extLst>
+              <a:ext uri="{FF2B5EF4-FFF2-40B4-BE49-F238E27FC236}">
+                <a16:creationId xmlns:a16="http://schemas.microsoft.com/office/drawing/2014/main" id="{3146DB02-E8A2-2CCF-D3F0-29E5A2395ACE}"/>
+              </a:ext>
+            </a:extLst>
+          </p:cNvPr>
+          <p:cNvSpPr>
+            <a:spLocks noGrp="1"/>
+          </p:cNvSpPr>
+          <p:nvPr>
+            <p:ph sz="quarter" idx="4"/>
+          </p:nvPr>
+        </p:nvSpPr>
+        <p:spPr>
+          <a:xfrm>
+            <a:off x="6169024" y="1359570"/>
+            <a:ext cx="6198822" cy="5367802"/>
+          </a:xfrm>
+        </p:spPr>
+        <p:txBody>
+          <a:bodyPr>
+            <a:normAutofit/>
+          </a:bodyPr>
+          <a:lstStyle/>
+          <a:p>
+            <a:pPr marL="0" indent="0">
+              <a:buNone/>
+            </a:pPr>
+            <a:r>
+              <a:rPr lang="en-US" sz="1400" dirty="0"/>
+              <a:t> Status-Code= "200"   ; OK</a:t>
+            </a:r>
+          </a:p>
+          <a:p>
+            <a:pPr marL="0" indent="0">
+              <a:buNone/>
+            </a:pPr>
+            <a:r>
+              <a:rPr lang="en-US" sz="1400" dirty="0"/>
+              <a:t>                      | "201"   ; Created</a:t>
+            </a:r>
+          </a:p>
+          <a:p>
+            <a:pPr marL="0" indent="0">
+              <a:buNone/>
+            </a:pPr>
+            <a:r>
+              <a:rPr lang="en-US" sz="1400" dirty="0"/>
+              <a:t>                      | "202"   ; Accepted</a:t>
+            </a:r>
+          </a:p>
+          <a:p>
+            <a:pPr marL="0" indent="0">
+              <a:buNone/>
+            </a:pPr>
+            <a:r>
+              <a:rPr lang="en-US" sz="1400" dirty="0"/>
+              <a:t>                      | "204"   ; No Content</a:t>
+            </a:r>
+          </a:p>
+          <a:p>
+            <a:pPr marL="0" indent="0">
+              <a:buNone/>
+            </a:pPr>
+            <a:r>
+              <a:rPr lang="en-US" sz="1400" dirty="0"/>
+              <a:t>                      | "301"   ; Moved Permanently</a:t>
+            </a:r>
+          </a:p>
+          <a:p>
+            <a:pPr marL="0" indent="0">
+              <a:buNone/>
+            </a:pPr>
+            <a:r>
+              <a:rPr lang="en-US" sz="1400" dirty="0"/>
+              <a:t>                      | "302"   ; Moved Temporarily</a:t>
+            </a:r>
+          </a:p>
+          <a:p>
+            <a:pPr marL="0" indent="0">
+              <a:buNone/>
+            </a:pPr>
+            <a:r>
+              <a:rPr lang="en-US" sz="1400" dirty="0"/>
+              <a:t>                      | "304"   ; Not Modified</a:t>
+            </a:r>
+          </a:p>
+          <a:p>
+            <a:pPr marL="0" indent="0">
+              <a:buNone/>
+            </a:pPr>
+            <a:r>
+              <a:rPr lang="en-US" sz="1400" dirty="0"/>
+              <a:t>                      | "400"   ; Bad Request</a:t>
+            </a:r>
+          </a:p>
+          <a:p>
+            <a:pPr marL="0" indent="0">
+              <a:buNone/>
+            </a:pPr>
+            <a:r>
+              <a:rPr lang="en-US" sz="1400" dirty="0"/>
+              <a:t>                      | "401"   ; Unauthorized</a:t>
+            </a:r>
+          </a:p>
+          <a:p>
+            <a:pPr marL="0" indent="0">
+              <a:buNone/>
+            </a:pPr>
+            <a:r>
+              <a:rPr lang="en-US" sz="1400" dirty="0"/>
+              <a:t>                      | "403"   ; Forbidden</a:t>
+            </a:r>
+          </a:p>
+          <a:p>
+            <a:pPr marL="0" indent="0">
+              <a:buNone/>
+            </a:pPr>
+            <a:r>
+              <a:rPr lang="en-US" sz="1400" dirty="0"/>
+              <a:t>                      | "404"   ; Not Found</a:t>
+            </a:r>
+          </a:p>
+          <a:p>
+            <a:pPr marL="0" indent="0">
+              <a:buNone/>
+            </a:pPr>
+            <a:r>
+              <a:rPr lang="en-US" sz="1400" dirty="0"/>
+              <a:t>                      | "500"   ; Internal Server Error</a:t>
+            </a:r>
+          </a:p>
+          <a:p>
+            <a:pPr marL="0" indent="0">
+              <a:buNone/>
+            </a:pPr>
+            <a:r>
+              <a:rPr lang="en-US" sz="1400" dirty="0"/>
+              <a:t>                      | "501"   ; Not Implemented</a:t>
+            </a:r>
+          </a:p>
+          <a:p>
+            <a:pPr marL="0" indent="0">
+              <a:buNone/>
+            </a:pPr>
+            <a:r>
+              <a:rPr lang="en-US" sz="1400" dirty="0"/>
+              <a:t>                      | "502"   ; Bad Gateway</a:t>
+            </a:r>
+          </a:p>
+          <a:p>
+            <a:pPr marL="0" indent="0">
+              <a:buNone/>
+            </a:pPr>
+            <a:r>
+              <a:rPr lang="en-US" sz="1400" dirty="0"/>
+              <a:t>                      | "503"   ; Service Unavailable</a:t>
+            </a:r>
+          </a:p>
+          <a:p>
+            <a:pPr marL="0" indent="0">
+              <a:buNone/>
+            </a:pPr>
+            <a:r>
+              <a:rPr lang="en-US" sz="1400" dirty="0"/>
+              <a:t>                      | extension-code</a:t>
+            </a:r>
+          </a:p>
+        </p:txBody>
+      </p:sp>
+      <p:sp>
+        <p:nvSpPr>
+          <p:cNvPr id="8" name="TextBox 7">
+            <a:extLst>
+              <a:ext uri="{FF2B5EF4-FFF2-40B4-BE49-F238E27FC236}">
+                <a16:creationId xmlns:a16="http://schemas.microsoft.com/office/drawing/2014/main" id="{FE9412AF-9C6E-C04B-8587-D9201265E2A3}"/>
+              </a:ext>
+            </a:extLst>
+          </p:cNvPr>
+          <p:cNvSpPr txBox="1"/>
+          <p:nvPr/>
+        </p:nvSpPr>
+        <p:spPr>
+          <a:xfrm>
+            <a:off x="473868" y="6358040"/>
+            <a:ext cx="11047412" cy="307777"/>
+          </a:xfrm>
+          <a:prstGeom prst="rect">
+            <a:avLst/>
+          </a:prstGeom>
+          <a:noFill/>
+        </p:spPr>
+        <p:txBody>
+          <a:bodyPr wrap="square" rtlCol="0">
+            <a:spAutoFit/>
+          </a:bodyPr>
+          <a:lstStyle/>
+          <a:p>
+            <a:r>
+              <a:rPr lang="en-US" sz="1400" dirty="0"/>
+              <a:t>https://developer.mozilla.org/en-US/docs/Web/HTTP/Reference/Status</a:t>
+            </a:r>
+          </a:p>
+        </p:txBody>
+      </p:sp>
+      <p:sp>
+        <p:nvSpPr>
+          <p:cNvPr id="7" name="Left Brace 6">
+            <a:extLst>
+              <a:ext uri="{FF2B5EF4-FFF2-40B4-BE49-F238E27FC236}">
+                <a16:creationId xmlns:a16="http://schemas.microsoft.com/office/drawing/2014/main" id="{6F6A88D1-044D-E108-038F-DCE81C6223DD}"/>
+              </a:ext>
+            </a:extLst>
+          </p:cNvPr>
+          <p:cNvSpPr/>
+          <p:nvPr/>
+        </p:nvSpPr>
+        <p:spPr>
+          <a:xfrm>
+            <a:off x="6898640" y="1690688"/>
+            <a:ext cx="350519" cy="899139"/>
+          </a:xfrm>
+          <a:prstGeom prst="leftBrace">
+            <a:avLst/>
+          </a:prstGeom>
+          <a:ln w="12700" cap="flat">
+            <a:miter/>
+          </a:ln>
+        </p:spPr>
+        <p:style>
+          <a:lnRef idx="1">
+            <a:schemeClr val="accent1"/>
+          </a:lnRef>
+          <a:fillRef idx="0">
+            <a:schemeClr val="accent1"/>
+          </a:fillRef>
+          <a:effectRef idx="0">
+            <a:srgbClr val="000000"/>
+          </a:effectRef>
+          <a:fontRef idx="minor">
+            <a:srgbClr val="FFFFFF"/>
+          </a:fontRef>
+        </p:style>
+        <p:txBody>
+          <a:bodyPr rtlCol="0" anchor="ctr"/>
+          <a:lstStyle/>
+          <a:p>
+            <a:pPr algn="ctr"/>
+            <a:endParaRPr lang="en-US"/>
+          </a:p>
+        </p:txBody>
+      </p:sp>
+      <p:sp>
+        <p:nvSpPr>
+          <p:cNvPr id="9" name="TextBox 8">
+            <a:extLst>
+              <a:ext uri="{FF2B5EF4-FFF2-40B4-BE49-F238E27FC236}">
+                <a16:creationId xmlns:a16="http://schemas.microsoft.com/office/drawing/2014/main" id="{FC569EF5-3CEC-48F8-711E-51147D4D948E}"/>
+              </a:ext>
+            </a:extLst>
+          </p:cNvPr>
+          <p:cNvSpPr txBox="1"/>
+          <p:nvPr/>
+        </p:nvSpPr>
+        <p:spPr>
+          <a:xfrm>
+            <a:off x="5760720" y="1890475"/>
+            <a:ext cx="1137920" cy="453854"/>
+          </a:xfrm>
+          <a:prstGeom prst="rect">
+            <a:avLst/>
+          </a:prstGeom>
+          <a:noFill/>
+        </p:spPr>
+        <p:txBody>
+          <a:bodyPr wrap="square" lIns="0" tIns="0" rIns="0" bIns="0" rtlCol="0">
+            <a:noAutofit/>
+          </a:bodyPr>
+          <a:lstStyle/>
+          <a:p>
+            <a:pPr algn="ctr">
+              <a:lnSpc>
+                <a:spcPct val="95000"/>
+              </a:lnSpc>
+              <a:spcBef>
+                <a:spcPts val="1000"/>
+              </a:spcBef>
+              <a:buSzPct val="100000"/>
+            </a:pPr>
+            <a:r>
+              <a:rPr lang="en-US" sz="1600" dirty="0"/>
+              <a:t>Successful Connection</a:t>
+            </a:r>
+          </a:p>
+        </p:txBody>
+      </p:sp>
+      <p:sp>
+        <p:nvSpPr>
+          <p:cNvPr id="11" name="Left Brace 10">
+            <a:extLst>
+              <a:ext uri="{FF2B5EF4-FFF2-40B4-BE49-F238E27FC236}">
+                <a16:creationId xmlns:a16="http://schemas.microsoft.com/office/drawing/2014/main" id="{DF1837EB-AFF1-5E10-4265-BF722E24285C}"/>
+              </a:ext>
+            </a:extLst>
+          </p:cNvPr>
+          <p:cNvSpPr/>
+          <p:nvPr/>
+        </p:nvSpPr>
+        <p:spPr>
+          <a:xfrm>
+            <a:off x="6898640" y="2666791"/>
+            <a:ext cx="350519" cy="899139"/>
+          </a:xfrm>
+          <a:prstGeom prst="leftBrace">
+            <a:avLst/>
+          </a:prstGeom>
+          <a:ln w="12700" cap="flat">
+            <a:miter/>
+          </a:ln>
+        </p:spPr>
+        <p:style>
+          <a:lnRef idx="1">
+            <a:schemeClr val="accent1"/>
+          </a:lnRef>
+          <a:fillRef idx="0">
+            <a:schemeClr val="accent1"/>
+          </a:fillRef>
+          <a:effectRef idx="0">
+            <a:srgbClr val="000000"/>
+          </a:effectRef>
+          <a:fontRef idx="minor">
+            <a:srgbClr val="FFFFFF"/>
+          </a:fontRef>
+        </p:style>
+        <p:txBody>
+          <a:bodyPr rtlCol="0" anchor="ctr"/>
+          <a:lstStyle/>
+          <a:p>
+            <a:pPr algn="ctr"/>
+            <a:endParaRPr lang="en-US"/>
+          </a:p>
+        </p:txBody>
+      </p:sp>
+      <p:sp>
+        <p:nvSpPr>
+          <p:cNvPr id="13" name="TextBox 12">
+            <a:extLst>
+              <a:ext uri="{FF2B5EF4-FFF2-40B4-BE49-F238E27FC236}">
+                <a16:creationId xmlns:a16="http://schemas.microsoft.com/office/drawing/2014/main" id="{4AA697AD-DEF5-F727-A8B3-F393C7A2E9A6}"/>
+              </a:ext>
+            </a:extLst>
+          </p:cNvPr>
+          <p:cNvSpPr txBox="1"/>
+          <p:nvPr/>
+        </p:nvSpPr>
+        <p:spPr>
+          <a:xfrm>
+            <a:off x="5760720" y="2962256"/>
+            <a:ext cx="1137920" cy="331561"/>
+          </a:xfrm>
+          <a:prstGeom prst="rect">
+            <a:avLst/>
+          </a:prstGeom>
+          <a:noFill/>
+        </p:spPr>
+        <p:txBody>
+          <a:bodyPr wrap="square" lIns="0" tIns="0" rIns="0" bIns="0" rtlCol="0">
+            <a:noAutofit/>
+          </a:bodyPr>
+          <a:lstStyle/>
+          <a:p>
+            <a:pPr algn="ctr">
+              <a:lnSpc>
+                <a:spcPct val="95000"/>
+              </a:lnSpc>
+              <a:spcBef>
+                <a:spcPts val="1000"/>
+              </a:spcBef>
+              <a:buSzPct val="100000"/>
+            </a:pPr>
+            <a:r>
+              <a:rPr lang="en-US" sz="1600" dirty="0"/>
+              <a:t>Redirection</a:t>
+            </a:r>
+          </a:p>
+        </p:txBody>
+      </p:sp>
+      <p:sp>
+        <p:nvSpPr>
+          <p:cNvPr id="15" name="Left Brace 14">
+            <a:extLst>
+              <a:ext uri="{FF2B5EF4-FFF2-40B4-BE49-F238E27FC236}">
+                <a16:creationId xmlns:a16="http://schemas.microsoft.com/office/drawing/2014/main" id="{CEAF2E8F-E8EA-7900-8B56-244EF6912C32}"/>
+              </a:ext>
+            </a:extLst>
+          </p:cNvPr>
+          <p:cNvSpPr/>
+          <p:nvPr/>
+        </p:nvSpPr>
+        <p:spPr>
+          <a:xfrm>
+            <a:off x="6898640" y="3642894"/>
+            <a:ext cx="350519" cy="1232134"/>
+          </a:xfrm>
+          <a:prstGeom prst="leftBrace">
+            <a:avLst/>
+          </a:prstGeom>
+          <a:ln w="12700" cap="flat">
+            <a:miter/>
+          </a:ln>
+        </p:spPr>
+        <p:style>
+          <a:lnRef idx="1">
+            <a:schemeClr val="accent1"/>
+          </a:lnRef>
+          <a:fillRef idx="0">
+            <a:schemeClr val="accent1"/>
+          </a:fillRef>
+          <a:effectRef idx="0">
+            <a:srgbClr val="000000"/>
+          </a:effectRef>
+          <a:fontRef idx="minor">
+            <a:srgbClr val="FFFFFF"/>
+          </a:fontRef>
+        </p:style>
+        <p:txBody>
+          <a:bodyPr rtlCol="0" anchor="ctr"/>
+          <a:lstStyle/>
+          <a:p>
+            <a:pPr algn="ctr"/>
+            <a:endParaRPr lang="en-US"/>
+          </a:p>
+        </p:txBody>
+      </p:sp>
+      <p:sp>
+        <p:nvSpPr>
+          <p:cNvPr id="17" name="TextBox 16">
+            <a:extLst>
+              <a:ext uri="{FF2B5EF4-FFF2-40B4-BE49-F238E27FC236}">
+                <a16:creationId xmlns:a16="http://schemas.microsoft.com/office/drawing/2014/main" id="{6C047838-A363-B1B3-2CCF-1DFD2B397954}"/>
+              </a:ext>
+            </a:extLst>
+          </p:cNvPr>
+          <p:cNvSpPr txBox="1"/>
+          <p:nvPr/>
+        </p:nvSpPr>
+        <p:spPr>
+          <a:xfrm>
+            <a:off x="5760720" y="4035323"/>
+            <a:ext cx="1137920" cy="454355"/>
+          </a:xfrm>
+          <a:prstGeom prst="rect">
+            <a:avLst/>
+          </a:prstGeom>
+          <a:noFill/>
+        </p:spPr>
+        <p:txBody>
+          <a:bodyPr wrap="square" lIns="0" tIns="0" rIns="0" bIns="0" rtlCol="0">
+            <a:noAutofit/>
+          </a:bodyPr>
+          <a:lstStyle/>
+          <a:p>
+            <a:pPr algn="ctr">
+              <a:lnSpc>
+                <a:spcPct val="95000"/>
+              </a:lnSpc>
+              <a:spcBef>
+                <a:spcPts val="1000"/>
+              </a:spcBef>
+              <a:buSzPct val="100000"/>
+            </a:pPr>
+            <a:r>
+              <a:rPr lang="en-US" sz="1600" dirty="0"/>
+              <a:t>Client Error (you)</a:t>
+            </a:r>
+          </a:p>
+        </p:txBody>
+      </p:sp>
+      <p:sp>
+        <p:nvSpPr>
+          <p:cNvPr id="19" name="Left Brace 18">
+            <a:extLst>
+              <a:ext uri="{FF2B5EF4-FFF2-40B4-BE49-F238E27FC236}">
+                <a16:creationId xmlns:a16="http://schemas.microsoft.com/office/drawing/2014/main" id="{55AEF595-E991-4552-AEAB-8C0CBBE035ED}"/>
+              </a:ext>
+            </a:extLst>
+          </p:cNvPr>
+          <p:cNvSpPr/>
+          <p:nvPr/>
+        </p:nvSpPr>
+        <p:spPr>
+          <a:xfrm>
+            <a:off x="6898640" y="4951992"/>
+            <a:ext cx="350519" cy="1327207"/>
+          </a:xfrm>
+          <a:prstGeom prst="leftBrace">
+            <a:avLst/>
+          </a:prstGeom>
+          <a:ln w="12700" cap="flat">
+            <a:miter/>
+          </a:ln>
+        </p:spPr>
+        <p:style>
+          <a:lnRef idx="1">
+            <a:schemeClr val="accent1"/>
+          </a:lnRef>
+          <a:fillRef idx="0">
+            <a:schemeClr val="accent1"/>
+          </a:fillRef>
+          <a:effectRef idx="0">
+            <a:srgbClr val="000000"/>
+          </a:effectRef>
+          <a:fontRef idx="minor">
+            <a:srgbClr val="FFFFFF"/>
+          </a:fontRef>
+        </p:style>
+        <p:txBody>
+          <a:bodyPr rtlCol="0" anchor="ctr"/>
+          <a:lstStyle/>
+          <a:p>
+            <a:pPr algn="ctr"/>
+            <a:endParaRPr lang="en-US"/>
+          </a:p>
+        </p:txBody>
+      </p:sp>
+      <p:sp>
+        <p:nvSpPr>
+          <p:cNvPr id="21" name="TextBox 20">
+            <a:extLst>
+              <a:ext uri="{FF2B5EF4-FFF2-40B4-BE49-F238E27FC236}">
+                <a16:creationId xmlns:a16="http://schemas.microsoft.com/office/drawing/2014/main" id="{307C35D5-A292-82B5-7861-3DB91660466F}"/>
+              </a:ext>
+            </a:extLst>
+          </p:cNvPr>
+          <p:cNvSpPr txBox="1"/>
+          <p:nvPr/>
+        </p:nvSpPr>
+        <p:spPr>
+          <a:xfrm>
+            <a:off x="5760720" y="5371404"/>
+            <a:ext cx="1137920" cy="489413"/>
+          </a:xfrm>
+          <a:prstGeom prst="rect">
+            <a:avLst/>
+          </a:prstGeom>
+          <a:noFill/>
+        </p:spPr>
+        <p:txBody>
+          <a:bodyPr wrap="square" lIns="0" tIns="0" rIns="0" bIns="0" rtlCol="0">
+            <a:noAutofit/>
+          </a:bodyPr>
+          <a:lstStyle/>
+          <a:p>
+            <a:pPr algn="ctr">
+              <a:lnSpc>
+                <a:spcPct val="95000"/>
+              </a:lnSpc>
+              <a:spcBef>
+                <a:spcPts val="1000"/>
+              </a:spcBef>
+              <a:buSzPct val="100000"/>
+            </a:pPr>
+            <a:r>
+              <a:rPr lang="en-US" sz="1600" dirty="0"/>
+              <a:t>Server Error (them)</a:t>
+            </a:r>
+          </a:p>
+        </p:txBody>
+      </p:sp>
+      <p:sp>
+        <p:nvSpPr>
+          <p:cNvPr id="23" name="TextBox 22">
+            <a:extLst>
+              <a:ext uri="{FF2B5EF4-FFF2-40B4-BE49-F238E27FC236}">
+                <a16:creationId xmlns:a16="http://schemas.microsoft.com/office/drawing/2014/main" id="{28E79591-B4A8-9C7D-A3FE-8AB9C0E13D6F}"/>
+              </a:ext>
+            </a:extLst>
+          </p:cNvPr>
+          <p:cNvSpPr txBox="1"/>
+          <p:nvPr/>
+        </p:nvSpPr>
+        <p:spPr>
+          <a:xfrm>
+            <a:off x="836614" y="3874774"/>
+            <a:ext cx="4782134" cy="1938992"/>
+          </a:xfrm>
+          <a:prstGeom prst="rect">
+            <a:avLst/>
+          </a:prstGeom>
+          <a:noFill/>
+        </p:spPr>
+        <p:txBody>
+          <a:bodyPr wrap="square">
+            <a:spAutoFit/>
+          </a:bodyPr>
+          <a:lstStyle/>
+          <a:p>
+            <a:pPr marL="342900" indent="-342900">
+              <a:buFont typeface="Arial" panose="020B0604020202020204" pitchFamily="34" charset="0"/>
+              <a:buChar char="•"/>
+            </a:pPr>
+            <a:r>
+              <a:rPr lang="en-US" sz="2000" dirty="0"/>
+              <a:t>HEAD – only returns with the headers, no content</a:t>
+            </a:r>
+          </a:p>
+          <a:p>
+            <a:pPr marL="342900" indent="-342900">
+              <a:buFont typeface="Arial" panose="020B0604020202020204" pitchFamily="34" charset="0"/>
+              <a:buChar char="•"/>
+            </a:pPr>
+            <a:r>
+              <a:rPr lang="en-US" sz="2000" dirty="0"/>
+              <a:t>TRACE – send back exactly what the server received (good for diagnostics)</a:t>
+            </a:r>
+          </a:p>
+          <a:p>
+            <a:pPr marL="342900" indent="-342900">
+              <a:buFont typeface="Arial" panose="020B0604020202020204" pitchFamily="34" charset="0"/>
+              <a:buChar char="•"/>
+            </a:pPr>
+            <a:r>
+              <a:rPr lang="en-US" sz="2000" dirty="0"/>
+              <a:t>Extension methods – custom or protocol-specific verb </a:t>
+            </a:r>
+          </a:p>
+        </p:txBody>
+      </p:sp>
+      <p:sp>
+        <p:nvSpPr>
+          <p:cNvPr id="26" name="Text Placeholder 2">
+            <a:extLst>
+              <a:ext uri="{FF2B5EF4-FFF2-40B4-BE49-F238E27FC236}">
+                <a16:creationId xmlns:a16="http://schemas.microsoft.com/office/drawing/2014/main" id="{070E7B97-3271-6F24-0949-745D0EBBDC3C}"/>
+              </a:ext>
+            </a:extLst>
+          </p:cNvPr>
+          <p:cNvSpPr txBox="1">
+            <a:spLocks/>
+          </p:cNvSpPr>
+          <p:nvPr/>
+        </p:nvSpPr>
+        <p:spPr>
+          <a:xfrm>
+            <a:off x="839787" y="2970588"/>
+            <a:ext cx="5157787" cy="823912"/>
+          </a:xfrm>
+          <a:prstGeom prst="rect">
+            <a:avLst/>
+          </a:prstGeom>
+        </p:spPr>
+        <p:txBody>
+          <a:bodyPr vert="horz" lIns="0" tIns="0" rIns="0" bIns="0" spcCol="365760" rtlCol="0" anchor="b">
+            <a:noAutofit/>
+          </a:bodyPr>
+          <a:lstStyle>
+            <a:lvl1pPr marL="0" indent="0" algn="l" defTabSz="914377" rtl="0" eaLnBrk="1" latinLnBrk="0" hangingPunct="1">
+              <a:lnSpc>
+                <a:spcPct val="95000"/>
+              </a:lnSpc>
+              <a:spcBef>
+                <a:spcPts val="1000"/>
+              </a:spcBef>
+              <a:buFont typeface="Arial" panose="020B0604020202020204" pitchFamily="34" charset="0"/>
+              <a:buNone/>
+              <a:defRPr sz="2400" b="1" kern="1200">
+                <a:solidFill>
+                  <a:schemeClr val="tx1"/>
+                </a:solidFill>
+                <a:latin typeface="+mn-lt"/>
+                <a:ea typeface="+mn-ea"/>
+                <a:cs typeface="+mn-cs"/>
+              </a:defRPr>
+            </a:lvl1pPr>
+            <a:lvl2pPr marL="457200" indent="0" algn="l" defTabSz="914377" rtl="0" eaLnBrk="1" latinLnBrk="0" hangingPunct="1">
+              <a:lnSpc>
+                <a:spcPct val="95000"/>
+              </a:lnSpc>
+              <a:spcBef>
+                <a:spcPts val="500"/>
+              </a:spcBef>
+              <a:buFont typeface="Arial" panose="020B0604020202020204" pitchFamily="34" charset="0"/>
+              <a:buNone/>
+              <a:defRPr sz="2000" b="1" kern="1200">
+                <a:solidFill>
+                  <a:schemeClr val="tx1"/>
+                </a:solidFill>
+                <a:latin typeface="+mn-lt"/>
+                <a:ea typeface="+mn-ea"/>
+                <a:cs typeface="+mn-cs"/>
+              </a:defRPr>
+            </a:lvl2pPr>
+            <a:lvl3pPr marL="914400" indent="0" algn="l" defTabSz="914377" rtl="0" eaLnBrk="1" latinLnBrk="0" hangingPunct="1">
+              <a:lnSpc>
+                <a:spcPct val="95000"/>
+              </a:lnSpc>
+              <a:spcBef>
+                <a:spcPts val="500"/>
+              </a:spcBef>
+              <a:buFont typeface="Arial" panose="020B0604020202020204" pitchFamily="34" charset="0"/>
+              <a:buNone/>
+              <a:defRPr sz="1800" b="1" kern="1200">
+                <a:solidFill>
+                  <a:schemeClr val="tx1"/>
+                </a:solidFill>
+                <a:latin typeface="+mn-lt"/>
+                <a:ea typeface="+mn-ea"/>
+                <a:cs typeface="+mn-cs"/>
+              </a:defRPr>
+            </a:lvl3pPr>
+            <a:lvl4pPr marL="1371600" indent="0" algn="l" defTabSz="914377" rtl="0" eaLnBrk="1" latinLnBrk="0" hangingPunct="1">
+              <a:lnSpc>
+                <a:spcPct val="95000"/>
+              </a:lnSpc>
+              <a:spcBef>
+                <a:spcPts val="500"/>
+              </a:spcBef>
+              <a:buFont typeface="Arial" panose="020B0604020202020204" pitchFamily="34" charset="0"/>
+              <a:buNone/>
+              <a:defRPr sz="1600" b="1" kern="1200">
+                <a:solidFill>
+                  <a:schemeClr val="tx1"/>
+                </a:solidFill>
+                <a:latin typeface="+mn-lt"/>
+                <a:ea typeface="+mn-ea"/>
+                <a:cs typeface="+mn-cs"/>
+              </a:defRPr>
+            </a:lvl4pPr>
+            <a:lvl5pPr marL="1828800" indent="0" algn="l" defTabSz="914377" rtl="0" eaLnBrk="1" latinLnBrk="0" hangingPunct="1">
+              <a:lnSpc>
+                <a:spcPct val="95000"/>
+              </a:lnSpc>
+              <a:spcBef>
+                <a:spcPts val="500"/>
+              </a:spcBef>
+              <a:buFont typeface="Arial" panose="020B0604020202020204" pitchFamily="34" charset="0"/>
+              <a:buNone/>
+              <a:defRPr sz="1600" b="1" kern="1200">
+                <a:solidFill>
+                  <a:schemeClr val="tx1"/>
+                </a:solidFill>
+                <a:latin typeface="+mn-lt"/>
+                <a:ea typeface="+mn-ea"/>
+                <a:cs typeface="+mn-cs"/>
+              </a:defRPr>
+            </a:lvl5pPr>
+            <a:lvl6pPr marL="2286000" indent="0" algn="l" defTabSz="914377" rtl="0" eaLnBrk="1" latinLnBrk="0" hangingPunct="1">
+              <a:lnSpc>
+                <a:spcPct val="95000"/>
+              </a:lnSpc>
+              <a:spcBef>
+                <a:spcPts val="500"/>
+              </a:spcBef>
+              <a:buFont typeface="Arial" panose="020B0604020202020204" pitchFamily="34" charset="0"/>
+              <a:buNone/>
+              <a:defRPr sz="1600" b="1" kern="1200">
+                <a:solidFill>
+                  <a:schemeClr val="tx1"/>
+                </a:solidFill>
+                <a:latin typeface="+mn-lt"/>
+                <a:ea typeface="+mn-ea"/>
+                <a:cs typeface="+mn-cs"/>
+              </a:defRPr>
+            </a:lvl6pPr>
+            <a:lvl7pPr marL="2743200" indent="0" algn="l" defTabSz="914377" rtl="0" eaLnBrk="1" latinLnBrk="0" hangingPunct="1">
+              <a:lnSpc>
+                <a:spcPct val="95000"/>
+              </a:lnSpc>
+              <a:spcBef>
+                <a:spcPts val="500"/>
+              </a:spcBef>
+              <a:buFont typeface="Arial" panose="020B0604020202020204" pitchFamily="34" charset="0"/>
+              <a:buNone/>
+              <a:defRPr sz="1600" b="1" kern="1200">
+                <a:solidFill>
+                  <a:schemeClr val="tx1"/>
+                </a:solidFill>
+                <a:latin typeface="+mn-lt"/>
+                <a:ea typeface="+mn-ea"/>
+                <a:cs typeface="+mn-cs"/>
+              </a:defRPr>
+            </a:lvl7pPr>
+            <a:lvl8pPr marL="3200400" indent="0" algn="l" defTabSz="914377" rtl="0" eaLnBrk="1" latinLnBrk="0" hangingPunct="1">
+              <a:lnSpc>
+                <a:spcPct val="95000"/>
+              </a:lnSpc>
+              <a:spcBef>
+                <a:spcPts val="500"/>
+              </a:spcBef>
+              <a:buFont typeface="Arial" panose="020B0604020202020204" pitchFamily="34" charset="0"/>
+              <a:buNone/>
+              <a:defRPr sz="1600" b="1" kern="1200">
+                <a:solidFill>
+                  <a:schemeClr val="tx1"/>
+                </a:solidFill>
+                <a:latin typeface="+mn-lt"/>
+                <a:ea typeface="+mn-ea"/>
+                <a:cs typeface="+mn-cs"/>
+              </a:defRPr>
+            </a:lvl8pPr>
+            <a:lvl9pPr marL="3657600" indent="0" algn="l" defTabSz="914377" rtl="0" eaLnBrk="1" latinLnBrk="0" hangingPunct="1">
+              <a:lnSpc>
+                <a:spcPct val="95000"/>
+              </a:lnSpc>
+              <a:spcBef>
+                <a:spcPts val="500"/>
+              </a:spcBef>
+              <a:buFont typeface="Arial" panose="020B0604020202020204" pitchFamily="34" charset="0"/>
+              <a:buNone/>
+              <a:defRPr sz="1600" b="1" kern="1200">
+                <a:solidFill>
+                  <a:schemeClr val="tx1"/>
+                </a:solidFill>
+                <a:latin typeface="+mn-lt"/>
+                <a:ea typeface="+mn-ea"/>
+                <a:cs typeface="+mn-cs"/>
+              </a:defRPr>
+            </a:lvl9pPr>
+          </a:lstStyle>
           <a:p>
             <a:r>
               <a:rPr lang="en-US" dirty="0"/>
-              <a:t>curl</a:t>
-            </a:r>
-          </a:p>
-          <a:p>
-            <a:r>
-              <a:rPr lang="en-US" dirty="0"/>
-              <a:t>postman</a:t>
-            </a:r>
-          </a:p>
-          <a:p>
-            <a:r>
-              <a:rPr lang="en-US" dirty="0"/>
-              <a:t>requests</a:t>
-            </a:r>
-          </a:p>
-          <a:p>
-            <a:r>
-              <a:rPr lang="en-US" dirty="0"/>
-              <a:t>Wireshark</a:t>
-            </a:r>
-          </a:p>
-          <a:p>
-            <a:r>
-              <a:rPr lang="en-US" dirty="0"/>
-              <a:t>Browser (dev tools too!)</a:t>
-            </a:r>
-          </a:p>
-          <a:p>
-            <a:endParaRPr lang="en-US" dirty="0"/>
-          </a:p>
-          <a:p>
-            <a:r>
-              <a:rPr lang="en-US" dirty="0"/>
-              <a:t>Demo</a:t>
+              <a:t>(Some) Other Request Methods</a:t>
             </a:r>
           </a:p>
         </p:txBody>
@@ -31199,7 +33085,7 @@
     </p:spTree>
     <p:extLst>
       <p:ext uri="{BB962C8B-B14F-4D97-AF65-F5344CB8AC3E}">
-        <p14:creationId xmlns:p14="http://schemas.microsoft.com/office/powerpoint/2010/main" val="2012762156"/>
+        <p14:creationId xmlns:p14="http://schemas.microsoft.com/office/powerpoint/2010/main" val="1543073849"/>
       </p:ext>
     </p:extLst>
   </p:cSld>
@@ -31231,7 +33117,7 @@
           <p:cNvPr id="2" name="Title 1">
             <a:extLst>
               <a:ext uri="{FF2B5EF4-FFF2-40B4-BE49-F238E27FC236}">
-                <a16:creationId xmlns:a16="http://schemas.microsoft.com/office/drawing/2014/main" id="{88CC739B-ABD3-1B66-CBCA-E60B87CBD537}"/>
+                <a16:creationId xmlns:a16="http://schemas.microsoft.com/office/drawing/2014/main" id="{45E46C3C-2508-617F-DFFD-69D8C1A562D3}"/>
               </a:ext>
             </a:extLst>
           </p:cNvPr>
@@ -31254,7 +33140,7 @@
           <a:p>
             <a:r>
               <a:rPr lang="en-US" dirty="0"/>
-              <a:t>In python</a:t>
+              <a:t>HTTP Tools</a:t>
             </a:r>
           </a:p>
         </p:txBody>
@@ -31264,7 +33150,7 @@
           <p:cNvPr id="3" name="Content Placeholder 2">
             <a:extLst>
               <a:ext uri="{FF2B5EF4-FFF2-40B4-BE49-F238E27FC236}">
-                <a16:creationId xmlns:a16="http://schemas.microsoft.com/office/drawing/2014/main" id="{7FEEDE65-D283-D0B6-5E49-938319C07FBD}"/>
+                <a16:creationId xmlns:a16="http://schemas.microsoft.com/office/drawing/2014/main" id="{ABEE76AF-6801-3ED8-C63E-EF4D8270B203}"/>
               </a:ext>
             </a:extLst>
           </p:cNvPr>
@@ -31277,43 +33163,108 @@
         </p:nvSpPr>
         <p:spPr>
           <a:xfrm>
-            <a:off x="548640" y="1600199"/>
-            <a:ext cx="11024925" cy="4572000"/>
+            <a:off x="548640" y="1325881"/>
+            <a:ext cx="10027920" cy="4846320"/>
           </a:xfrm>
         </p:spPr>
         <p:txBody>
-          <a:bodyPr/>
+          <a:bodyPr>
+            <a:normAutofit fontScale="77500" lnSpcReduction="20000"/>
+          </a:bodyPr>
           <a:lstStyle/>
           <a:p>
             <a:r>
+              <a:rPr lang="en-US" b="1" dirty="0"/>
+              <a:t>telnet:</a:t>
+            </a:r>
+            <a:r>
               <a:rPr lang="en-US" dirty="0"/>
-              <a:t>Uses the requests library </a:t>
-            </a:r>
-          </a:p>
-          <a:p>
-            <a:r>
-              <a:rPr lang="en-US" dirty="0">
-                <a:hlinkClick r:id="rId2"/>
-              </a:rPr>
-              <a:t>https://docs.python-requests.org/en/latest/user/quickstart/#make-a-request</a:t>
-            </a:r>
+              <a:t> A text-based terminal tool that allows you to manually write raw, unencrypted HTTP requests directly to a server's port.</a:t>
+            </a:r>
+          </a:p>
+          <a:p>
+            <a:r>
+              <a:rPr lang="en-US" b="1" dirty="0" err="1"/>
+              <a:t>wget</a:t>
+            </a:r>
+            <a:r>
+              <a:rPr lang="en-US" b="1" dirty="0"/>
+              <a:t>:</a:t>
+            </a:r>
+            <a:r>
+              <a:rPr lang="en-US" dirty="0"/>
+              <a:t> A command-line utility optimized for downloading files, folders, or entire websites from the web with automatic retries.</a:t>
+            </a:r>
+          </a:p>
+          <a:p>
+            <a:r>
+              <a:rPr lang="en-US" b="1" dirty="0"/>
+              <a:t>curl:</a:t>
+            </a:r>
+            <a:r>
+              <a:rPr lang="en-US" dirty="0"/>
+              <a:t> The industry-standard command-line tool for transferring data to or from a server, highly favored for testing and scripting APIs.</a:t>
+            </a:r>
+          </a:p>
+          <a:p>
+            <a:r>
+              <a:rPr lang="en-US" b="1" dirty="0"/>
+              <a:t>postman:</a:t>
+            </a:r>
+            <a:r>
+              <a:rPr lang="en-US" dirty="0"/>
+              <a:t> A user-friendly, graphical application designed for building, testing, organizing, and documenting API requests.</a:t>
+            </a:r>
+          </a:p>
+          <a:p>
+            <a:r>
+              <a:rPr lang="en-US" b="1" dirty="0"/>
+              <a:t>requests:</a:t>
+            </a:r>
+            <a:r>
+              <a:rPr lang="en-US" dirty="0"/>
+              <a:t> A popular, elegant Python library that allows developers to send HTTP/1.1 requests using simple, human-readable code.</a:t>
+            </a:r>
+          </a:p>
+          <a:p>
+            <a:r>
+              <a:rPr lang="en-US" b="1" dirty="0"/>
+              <a:t>Wireshark:</a:t>
+            </a:r>
+            <a:r>
+              <a:rPr lang="en-US" dirty="0"/>
+              <a:t> A powerful network packet analyzer that lets you capture and inspect the microscopic, real-time traffic flowing through a network.</a:t>
+            </a:r>
+          </a:p>
+          <a:p>
+            <a:r>
+              <a:rPr lang="en-US" b="1" dirty="0"/>
+              <a:t>Browser (dev tools too!):</a:t>
+            </a:r>
+            <a:r>
+              <a:rPr lang="en-US" dirty="0"/>
+              <a:t> Web browsers render the user-facing web page, while their built-in Developer Tools (Network Tab) let you inspect the underlying HTTP requests, headers, and payloads driving the page.</a:t>
+            </a:r>
+          </a:p>
+          <a:p>
             <a:endParaRPr lang="en-US" dirty="0"/>
           </a:p>
           <a:p>
-            <a:endParaRPr lang="en-US" dirty="0"/>
-          </a:p>
-          <a:p>
-            <a:r>
-              <a:rPr lang="en-US" dirty="0"/>
+            <a:pPr marL="0" indent="0">
+              <a:buNone/>
+            </a:pPr>
+            <a:r>
+              <a:rPr lang="en-US" sz="4000" b="1" dirty="0"/>
               <a:t>Demo</a:t>
             </a:r>
+            <a:endParaRPr lang="en-US" b="1" dirty="0"/>
           </a:p>
         </p:txBody>
       </p:sp>
     </p:spTree>
     <p:extLst>
       <p:ext uri="{BB962C8B-B14F-4D97-AF65-F5344CB8AC3E}">
-        <p14:creationId xmlns:p14="http://schemas.microsoft.com/office/powerpoint/2010/main" val="1157162783"/>
+        <p14:creationId xmlns:p14="http://schemas.microsoft.com/office/powerpoint/2010/main" val="2012762156"/>
       </p:ext>
     </p:extLst>
   </p:cSld>
@@ -31345,7 +33296,7 @@
           <p:cNvPr id="2" name="Title 1">
             <a:extLst>
               <a:ext uri="{FF2B5EF4-FFF2-40B4-BE49-F238E27FC236}">
-                <a16:creationId xmlns:a16="http://schemas.microsoft.com/office/drawing/2014/main" id="{E84D9E38-6DAD-E4D7-9B8A-2000494494F0}"/>
+                <a16:creationId xmlns:a16="http://schemas.microsoft.com/office/drawing/2014/main" id="{88CC739B-ABD3-1B66-CBCA-E60B87CBD537}"/>
               </a:ext>
             </a:extLst>
           </p:cNvPr>
@@ -31356,14 +33307,19 @@
             <p:ph type="title"/>
           </p:nvPr>
         </p:nvSpPr>
-        <p:spPr/>
+        <p:spPr>
+          <a:xfrm>
+            <a:off x="548640" y="411481"/>
+            <a:ext cx="8231293" cy="914400"/>
+          </a:xfrm>
+        </p:spPr>
         <p:txBody>
           <a:bodyPr/>
           <a:lstStyle/>
           <a:p>
             <a:r>
               <a:rPr lang="en-US" dirty="0"/>
-              <a:t>More Than Text</a:t>
+              <a:t>In python</a:t>
             </a:r>
           </a:p>
         </p:txBody>
@@ -31373,7 +33329,7 @@
           <p:cNvPr id="3" name="Content Placeholder 2">
             <a:extLst>
               <a:ext uri="{FF2B5EF4-FFF2-40B4-BE49-F238E27FC236}">
-                <a16:creationId xmlns:a16="http://schemas.microsoft.com/office/drawing/2014/main" id="{9A27DC0E-A2EB-AAA5-26E5-80B2C604BDF2}"/>
+                <a16:creationId xmlns:a16="http://schemas.microsoft.com/office/drawing/2014/main" id="{7FEEDE65-D283-D0B6-5E49-938319C07FBD}"/>
               </a:ext>
             </a:extLst>
           </p:cNvPr>
@@ -31384,96 +33340,45 @@
             <p:ph idx="1"/>
           </p:nvPr>
         </p:nvSpPr>
-        <p:spPr/>
+        <p:spPr>
+          <a:xfrm>
+            <a:off x="548640" y="1600199"/>
+            <a:ext cx="11024925" cy="4572000"/>
+          </a:xfrm>
+        </p:spPr>
         <p:txBody>
           <a:bodyPr/>
           <a:lstStyle/>
           <a:p>
             <a:r>
               <a:rPr lang="en-US" dirty="0"/>
-              <a:t>Have you ever seen an image online?</a:t>
-            </a:r>
+              <a:t>Uses the requests library </a:t>
+            </a:r>
+          </a:p>
+          <a:p>
+            <a:r>
+              <a:rPr lang="en-US" dirty="0">
+                <a:hlinkClick r:id="rId2"/>
+              </a:rPr>
+              <a:t>https://docs.python-requests.org/en/latest/user/quickstart/#make-a-request</a:t>
+            </a:r>
+            <a:endParaRPr lang="en-US" dirty="0"/>
+          </a:p>
+          <a:p>
+            <a:endParaRPr lang="en-US" dirty="0"/>
           </a:p>
           <a:p>
             <a:r>
               <a:rPr lang="en-US" dirty="0"/>
-              <a:t>Have you ever seen a video?</a:t>
-            </a:r>
-          </a:p>
-          <a:p>
-            <a:r>
-              <a:rPr lang="en-US" dirty="0"/>
-              <a:t>Other formats??</a:t>
-            </a:r>
-          </a:p>
-          <a:p>
-            <a:endParaRPr lang="en-US" dirty="0"/>
-          </a:p>
-        </p:txBody>
-      </p:sp>
-      <p:sp>
-        <p:nvSpPr>
-          <p:cNvPr id="4" name="Date Placeholder 3">
-            <a:extLst>
-              <a:ext uri="{FF2B5EF4-FFF2-40B4-BE49-F238E27FC236}">
-                <a16:creationId xmlns:a16="http://schemas.microsoft.com/office/drawing/2014/main" id="{BA21DF7F-179D-93A4-A34C-19AFA15CC350}"/>
-              </a:ext>
-            </a:extLst>
-          </p:cNvPr>
-          <p:cNvSpPr>
-            <a:spLocks noGrp="1"/>
-          </p:cNvSpPr>
-          <p:nvPr>
-            <p:ph type="dt" sz="half" idx="10"/>
-          </p:nvPr>
-        </p:nvSpPr>
-        <p:spPr/>
-        <p:txBody>
-          <a:bodyPr/>
-          <a:lstStyle/>
-          <a:p>
-            <a:fld id="{AD622D1A-DF83-41A8-85FF-04D90BF831D3}" type="datetime3">
-              <a:rPr lang="en-US" smtClean="0"/>
-              <a:t>23 June 2026</a:t>
-            </a:fld>
-            <a:endParaRPr lang="en-US"/>
-          </a:p>
-        </p:txBody>
-      </p:sp>
-      <p:sp>
-        <p:nvSpPr>
-          <p:cNvPr id="5" name="Slide Number Placeholder 4">
-            <a:extLst>
-              <a:ext uri="{FF2B5EF4-FFF2-40B4-BE49-F238E27FC236}">
-                <a16:creationId xmlns:a16="http://schemas.microsoft.com/office/drawing/2014/main" id="{B3F49F5A-5999-7FEE-3F3E-C8FE162C0607}"/>
-              </a:ext>
-            </a:extLst>
-          </p:cNvPr>
-          <p:cNvSpPr>
-            <a:spLocks noGrp="1"/>
-          </p:cNvSpPr>
-          <p:nvPr>
-            <p:ph type="sldNum" sz="quarter" idx="11"/>
-          </p:nvPr>
-        </p:nvSpPr>
-        <p:spPr/>
-        <p:txBody>
-          <a:bodyPr/>
-          <a:lstStyle/>
-          <a:p>
-            <a:fld id="{64E5BE4B-2FBF-4174-9E62-85FAD1CB43A6}" type="slidenum">
-              <a:rPr lang="en-US" smtClean="0"/>
-              <a:pPr/>
-              <a:t>9</a:t>
-            </a:fld>
-            <a:endParaRPr lang="en-US"/>
+              <a:t>Demo</a:t>
+            </a:r>
           </a:p>
         </p:txBody>
       </p:sp>
     </p:spTree>
     <p:extLst>
       <p:ext uri="{BB962C8B-B14F-4D97-AF65-F5344CB8AC3E}">
-        <p14:creationId xmlns:p14="http://schemas.microsoft.com/office/powerpoint/2010/main" val="2622715224"/>
+        <p14:creationId xmlns:p14="http://schemas.microsoft.com/office/powerpoint/2010/main" val="1157162783"/>
       </p:ext>
     </p:extLst>
   </p:cSld>
